--- a/Project-1/reports/2.6_Презентация.pptx
+++ b/Project-1/reports/2.6_Презентация.pptx
@@ -14,9 +14,11 @@
     <p:sldId id="262" r:id="rId8"/>
     <p:sldId id="263" r:id="rId9"/>
     <p:sldId id="264" r:id="rId10"/>
+    <p:sldId id="265" r:id="rId11"/>
+    <p:sldId id="266" r:id="rId12"/>
   </p:sldIdLst>
   <p:notesMasterIdLst>
-    <p:notesMasterId r:id="rId11"/>
+    <p:notesMasterId r:id="rId13"/>
   </p:notesMasterIdLst>
   <p:sldSz cx="12192000" cy="6858000"/>
   <p:notesSz cx="6858000" cy="12192000"/>
@@ -115,33 +117,35 @@
   <p:extLst>
     <p:ext uri="{521415D9-36F7-43E2-AB2F-B90AF26B5E84}">
       <p14:sectionLst xmlns:p14="http://schemas.microsoft.com/office/powerpoint/2010/main">
-        <p14:section name="Знакомство" id="{283f8568-02af-9b44-1565-eed1d6ca851b}">
+        <p14:section name="Знакомство" id="{bc99df14-c19a-0ff5-6083-abc9bd13b199}">
           <p14:sldIdLst>
             <p14:sldId id="256"/>
           </p14:sldIdLst>
         </p14:section>
-        <p14:section name="Проблема и решение" id="{b06b79ba-6b47-4868-4ed3-7515c6d56976}">
+        <p14:section name="Проблема и решение" id="{a6eb18c8-b683-7050-da8c-90532f607d3f}">
           <p14:sldIdLst>
             <p14:sldId id="257"/>
             <p14:sldId id="258"/>
           </p14:sldIdLst>
         </p14:section>
-        <p14:section name="Возможности" id="{1656efde-8212-e8ea-2227-a3f5d70f7d1e}">
+        <p14:section name="Возможности" id="{3eea5e40-4a88-f328-8a2d-23d868dc07ae}">
           <p14:sldIdLst>
             <p14:sldId id="259"/>
             <p14:sldId id="260"/>
             <p14:sldId id="261"/>
-          </p14:sldIdLst>
-        </p14:section>
-        <p14:section name="Надёжность" id="{52bab799-170d-af21-b53e-34b039b6bc69}">
-          <p14:sldIdLst>
             <p14:sldId id="262"/>
             <p14:sldId id="263"/>
           </p14:sldIdLst>
         </p14:section>
-        <p14:section name="Итог" id="{2d7d445d-d84b-1ec8-a0b9-98384b65bcc9}">
+        <p14:section name="Надёжность" id="{1f7bf566-0d79-dfd1-c210-923e37efe1d7}">
           <p14:sldIdLst>
             <p14:sldId id="264"/>
+            <p14:sldId id="265"/>
+          </p14:sldIdLst>
+        </p14:section>
+        <p14:section name="Итог" id="{b7682903-4ba1-0da5-e9d3-bf0c7ff21ba2}">
+          <p14:sldIdLst>
+            <p14:sldId id="266"/>
           </p14:sldIdLst>
         </p14:section>
       </p14:sectionLst>
@@ -548,7 +552,7 @@
           <a:p>
             <a:r>
               <a:rPr lang="en-US" dirty="0"/>
-              <a:t>Добрый день! Мы — команда «ВольтМаркет». Сегодня мы покажем систему, которая наводит порядок в магазине электроники. ВольтМаркет — это информационная система на 1С:Предприятие 8.3: закупки, продажи, цены и склад в одном окне.</a:t>
+              <a:t>Добрый день! Мы — команда «ВольтМаркет». ВольтМаркет — это информационная система на 1С:Предприятие 8.3 для магазина электроники: закупки, продажи, бронирование, цены и склад в одном окне.</a:t>
             </a:r>
             <a:endParaRPr lang="en-US" dirty="0"/>
           </a:p>
@@ -572,6 +576,182 @@
             <a:fld id="{F7021451-1387-4CA6-816F-3879F97B5CBC}" type="slidenum">
               <a:rPr lang="en-US"/>
               <a:t>1</a:t>
+            </a:fld>
+            <a:endParaRPr lang="en-US"/>
+          </a:p>
+        </p:txBody>
+      </p:sp>
+    </p:spTree>
+    <p:extLst>
+      <p:ext uri="{BB962C8B-B14F-4D97-AF65-F5344CB8AC3E}">
+        <p14:creationId xmlns:p14="http://schemas.microsoft.com/office/powerpoint/2010/main" val="1024086991"/>
+      </p:ext>
+    </p:extLst>
+  </p:cSld>
+  <p:clrMapOvr>
+    <a:masterClrMapping/>
+  </p:clrMapOvr>
+</p:notes>
+</file>
+
+<file path=ppt/notesSlides/notesSlide10.xml><?xml version="1.0" encoding="utf-8"?>
+<p:notes xmlns:a="http://schemas.openxmlformats.org/drawingml/2006/main" xmlns:r="http://schemas.openxmlformats.org/officeDocument/2006/relationships" xmlns:p="http://schemas.openxmlformats.org/presentationml/2006/main">
+  <p:cSld>
+    <p:spTree>
+      <p:nvGrpSpPr>
+        <p:cNvPr id="1" name=""/>
+        <p:cNvGrpSpPr/>
+        <p:nvPr/>
+      </p:nvGrpSpPr>
+      <p:grpSpPr>
+        <a:xfrm>
+          <a:off x="0" y="0"/>
+          <a:ext cx="0" cy="0"/>
+          <a:chOff x="0" y="0"/>
+          <a:chExt cx="0" cy="0"/>
+        </a:xfrm>
+      </p:grpSpPr>
+      <p:sp>
+        <p:nvSpPr>
+          <p:cNvPr id="2" name="Slide Image Placeholder 1"/>
+          <p:cNvSpPr>
+            <a:spLocks noGrp="1" noRot="1" noChangeAspect="1"/>
+          </p:cNvSpPr>
+          <p:nvPr>
+            <p:ph type="sldImg"/>
+          </p:nvPr>
+        </p:nvSpPr>
+        <p:spPr/>
+      </p:sp>
+      <p:sp>
+        <p:nvSpPr>
+          <p:cNvPr id="3" name="Notes Placeholder 2"/>
+          <p:cNvSpPr>
+            <a:spLocks noGrp="1"/>
+          </p:cNvSpPr>
+          <p:nvPr>
+            <p:ph type="body" idx="1"/>
+          </p:nvPr>
+        </p:nvSpPr>
+        <p:spPr/>
+        <p:txBody>
+          <a:bodyPr/>
+          <a:lstStyle/>
+          <a:p>
+            <a:r>
+              <a:rPr lang="en-US" dirty="0"/>
+              <a:t>ВольтМаркет готов к работе с первого запуска: товары с фото, покупатели, цены, документы и брони уже в базе. Пять разделов, три роли и два языка — русский и китайский.</a:t>
+            </a:r>
+            <a:endParaRPr lang="en-US" dirty="0"/>
+          </a:p>
+        </p:txBody>
+      </p:sp>
+      <p:sp>
+        <p:nvSpPr>
+          <p:cNvPr id="4" name="Slide Number Placeholder 3"/>
+          <p:cNvSpPr>
+            <a:spLocks noGrp="1"/>
+          </p:cNvSpPr>
+          <p:nvPr>
+            <p:ph type="sldNum" sz="quarter" idx="10"/>
+          </p:nvPr>
+        </p:nvSpPr>
+        <p:spPr/>
+        <p:txBody>
+          <a:bodyPr/>
+          <a:lstStyle/>
+          <a:p>
+            <a:fld id="{F7021451-1387-4CA6-816F-3879F97B5CBC}" type="slidenum">
+              <a:rPr lang="en-US"/>
+              <a:t>10</a:t>
+            </a:fld>
+            <a:endParaRPr lang="en-US"/>
+          </a:p>
+        </p:txBody>
+      </p:sp>
+    </p:spTree>
+    <p:extLst>
+      <p:ext uri="{BB962C8B-B14F-4D97-AF65-F5344CB8AC3E}">
+        <p14:creationId xmlns:p14="http://schemas.microsoft.com/office/powerpoint/2010/main" val="1024086991"/>
+      </p:ext>
+    </p:extLst>
+  </p:cSld>
+  <p:clrMapOvr>
+    <a:masterClrMapping/>
+  </p:clrMapOvr>
+</p:notes>
+</file>
+
+<file path=ppt/notesSlides/notesSlide11.xml><?xml version="1.0" encoding="utf-8"?>
+<p:notes xmlns:a="http://schemas.openxmlformats.org/drawingml/2006/main" xmlns:r="http://schemas.openxmlformats.org/officeDocument/2006/relationships" xmlns:p="http://schemas.openxmlformats.org/presentationml/2006/main">
+  <p:cSld>
+    <p:spTree>
+      <p:nvGrpSpPr>
+        <p:cNvPr id="1" name=""/>
+        <p:cNvGrpSpPr/>
+        <p:nvPr/>
+      </p:nvGrpSpPr>
+      <p:grpSpPr>
+        <a:xfrm>
+          <a:off x="0" y="0"/>
+          <a:ext cx="0" cy="0"/>
+          <a:chOff x="0" y="0"/>
+          <a:chExt cx="0" cy="0"/>
+        </a:xfrm>
+      </p:grpSpPr>
+      <p:sp>
+        <p:nvSpPr>
+          <p:cNvPr id="2" name="Slide Image Placeholder 1"/>
+          <p:cNvSpPr>
+            <a:spLocks noGrp="1" noRot="1" noChangeAspect="1"/>
+          </p:cNvSpPr>
+          <p:nvPr>
+            <p:ph type="sldImg"/>
+          </p:nvPr>
+        </p:nvSpPr>
+        <p:spPr/>
+      </p:sp>
+      <p:sp>
+        <p:nvSpPr>
+          <p:cNvPr id="3" name="Notes Placeholder 2"/>
+          <p:cNvSpPr>
+            <a:spLocks noGrp="1"/>
+          </p:cNvSpPr>
+          <p:nvPr>
+            <p:ph type="body" idx="1"/>
+          </p:nvPr>
+        </p:nvSpPr>
+        <p:spPr/>
+        <p:txBody>
+          <a:bodyPr/>
+          <a:lstStyle/>
+          <a:p>
+            <a:r>
+              <a:rPr lang="en-US" dirty="0"/>
+              <a:t>ВольтМаркет — учёт, который заряжает ваш магазин. Попробуйте сами: войдите как продавец, забронируйте товар и продайте его по брони. Спасибо за внимание! Будем рады ответить на вопросы.</a:t>
+            </a:r>
+            <a:endParaRPr lang="en-US" dirty="0"/>
+          </a:p>
+        </p:txBody>
+      </p:sp>
+      <p:sp>
+        <p:nvSpPr>
+          <p:cNvPr id="4" name="Slide Number Placeholder 3"/>
+          <p:cNvSpPr>
+            <a:spLocks noGrp="1"/>
+          </p:cNvSpPr>
+          <p:nvPr>
+            <p:ph type="sldNum" sz="quarter" idx="10"/>
+          </p:nvPr>
+        </p:nvSpPr>
+        <p:spPr/>
+        <p:txBody>
+          <a:bodyPr/>
+          <a:lstStyle/>
+          <a:p>
+            <a:fld id="{F7021451-1387-4CA6-816F-3879F97B5CBC}" type="slidenum">
+              <a:rPr lang="en-US"/>
+              <a:t>11</a:t>
             </a:fld>
             <a:endParaRPr lang="en-US"/>
           </a:p>
@@ -636,7 +816,7 @@
           <a:p>
             <a:r>
               <a:rPr lang="en-US" dirty="0"/>
-              <a:t>Представьте небольшой магазин электроники. Остатки считают в тетради или в таблице, и у каждого продавца свои цифры. Бывает, что покупатель уже оплатил телефон, а на складе его нет. А в конце месяца владелец видит выручку, но не понимает, сколько на самом деле заработал. Именно эти три проблемы решает ВольтМаркет.</a:t>
+              <a:t>Представьте небольшой магазин электроники. Остатки считают в тетради, и у каждого свои цифры. Покупатель оплатил телефон — а на складе его нет. Товар отложили для одного клиента — а продали другому. И в конце месяца непонятно, сколько магазин заработал. Все четыре проблемы решает ВольтМаркет.</a:t>
             </a:r>
             <a:endParaRPr lang="en-US" dirty="0"/>
           </a:p>
@@ -724,7 +904,7 @@
           <a:p>
             <a:r>
               <a:rPr lang="en-US" dirty="0"/>
-              <a:t>ВольтМаркет собирает весь магазин в одном окне. Закупки, продажи, цены и остатки хранятся в одной базе, поэтому цифры у всех одинаковые. При входе сотрудник сразу видит рабочий стол: сколько товаров в каталоге, что лежит на складе, какие выручка и прибыль за месяц и какие товары пора заказать. А на каждом шаге система подсказывает и проверяет.</a:t>
+              <a:t>Все данные хранятся в одной базе, поэтому цифры у всех одинаковые. При входе сотрудник видит рабочий стол: остаток на складе, товар в резерве, выручку и прибыль за месяц, что пора заказать и какие брони ждут покупателей. А на каждом шаге система подсказывает и проверяет.</a:t>
             </a:r>
             <a:endParaRPr lang="en-US" dirty="0"/>
           </a:p>
@@ -812,7 +992,7 @@
           <a:p>
             <a:r>
               <a:rPr lang="en-US" dirty="0"/>
-              <a:t>Что умеет система? Каталог товаров с фотографиями: открываешь товар — и сразу видишь фото, цену и остаток. Цены хранятся с историей: новую цену можно назначить с нужной даты, а старые не теряются. Поступление от поставщика само увеличивает остаток. В продаже цена подставляется из прайса, система проверяет наличие и считает себестоимость. Отчёты показывают остатки по группам и прибыль за любой период, а накладная печатается одной кнопкой.</a:t>
+              <a:t>Что умеет система? Каталог с фотографиями, цены с историей, поступления и продажи с контролем остатка и расчётом прибыли. В новой версии появились бронирование товара и быстрый ввод документов: подбор сразу нескольких товаров и добавление по артикулу. Отчёты показывают остатки, резерв, продажи и брони, а накладные и бланк брони печатаются одной кнопкой.</a:t>
             </a:r>
             <a:endParaRPr lang="en-US" dirty="0"/>
           </a:p>
@@ -900,7 +1080,7 @@
           <a:p>
             <a:r>
               <a:rPr lang="en-US" dirty="0"/>
-              <a:t>Вся работа — это три шага. Закупщик оформляет поступление — и товар появляется на складе. Продавец оформляет продажу — цена уже заполнена, а внизу виден остаток. А руководитель открывает анализ продаж и видит выручку, себестоимость и валовую прибыль по каждому товару и покупателю.</a:t>
+              <a:t>Основная работа — три шага. Закупщик оформляет поступление — товар появляется на складе. Продавец оформляет продажу — цена уже заполнена, справа видны фото и свободный остаток. Руководитель открывает анализ продаж и видит выручку, себестоимость и прибыль.</a:t>
             </a:r>
             <a:endParaRPr lang="en-US" dirty="0"/>
           </a:p>
@@ -988,7 +1168,7 @@
           <a:p>
             <a:r>
               <a:rPr lang="en-US" dirty="0"/>
-              <a:t>Особое внимание мы уделили каталогу. Слева — дерево товарных групп, справа — карточка выбранного товара с фотографией, ценой и остатком. Фото загружается прямо в карточку товара. И всё оформлено в едином фирменном стиле: тёмно-синий, голубой и янтарная молния — символ «Вольта».</a:t>
+              <a:t>Главная новинка — бронирование. Покупатель просит отложить ноутбук — продавец оформляет бронь. Товар сразу уходит из свободного остатка, и продать его другому покупателю система не даст. Покупатель пришёл — продажа заполняется из брони одной ссылкой, и товар списывается со склада. Передумал — бронь отменяют, и товар возвращается в свободный остаток. В списке броней видно состояние каждой, а просроченные выделены красным.</a:t>
             </a:r>
             <a:endParaRPr lang="en-US" dirty="0"/>
           </a:p>
@@ -1076,7 +1256,7 @@
           <a:p>
             <a:r>
               <a:rPr lang="en-US" dirty="0"/>
-              <a:t>Каждый сотрудник видит только своё. Закупщик работает с каталогом, поставщиками и поступлениями, продавец — с покупателями, ценами и продажами, а администратор управляет всем. При этом система защищает от ошибок: продать больше, чем есть на складе, нельзя — она сразу покажет, сколько товара в наличии. Обязательные поля проверяются, а два продавца не смогут одновременно продать один и тот же последний товар.</a:t>
+              <a:t>Мы сделали оформление документов быстрее. Кнопка «Подбор товаров» открывает список с ценами, остатками и фото: вписываешь количество прямо в список и переносишь всё в документ. Можно просто ввести артикул и нажать Enter. Если у покупателя есть бронь, система сама это подскажет, а закупщик одной кнопкой заказывает всё, что заканчивается.</a:t>
             </a:r>
             <a:endParaRPr lang="en-US" dirty="0"/>
           </a:p>
@@ -1164,7 +1344,7 @@
           <a:p>
             <a:r>
               <a:rPr lang="en-US" dirty="0"/>
-              <a:t>ВольтМаркет готов к работе с первого запуска: семнадцать товаров с фотографиями, поставщики, покупатели, цены и документы уже в базе. Четыре раздела, три роли и два языка интерфейса — русский и китайский. Да, наш ВольтМаркет говорит по-китайски!</a:t>
+              <a:t>В карточке товара — фотография, цена, остаток и свободный остаток. У каждого из семнадцати товаров своё фото в едином стиле. Всё оформлено в фирменных цветах: тёмно-синий, голубой и янтарная молния — символ «Вольта».</a:t>
             </a:r>
             <a:endParaRPr lang="en-US" dirty="0"/>
           </a:p>
@@ -1252,7 +1432,7 @@
           <a:p>
             <a:r>
               <a:rPr lang="en-US" dirty="0"/>
-              <a:t>ВольтМаркет — учёт, который заряжает ваш магазин. Попробуйте сами: загрузите базу, войдите как продавец и оформите первую продажу — это займёт минуту. Спасибо за внимание! Будем рады ответить на вопросы.</a:t>
+              <a:t>Каждый сотрудник видит только своё: закупщик — каталог и поступления, продавец — покупателей, цены, брони и продажи, администратор — всё. Система защищает от ошибок: нельзя продать больше, чем есть, и нельзя продать чужую бронь, обязательные поля проверяются, а два продавца не продадут один последний товар одновременно.</a:t>
             </a:r>
             <a:endParaRPr lang="en-US" dirty="0"/>
           </a:p>
@@ -2046,7 +2226,7 @@
       </p:grpSpPr>
       <p:pic>
         <p:nvPicPr>
-          <p:cNvPr id="2" name="Логотип" descr="C:\Study\University\Portfolio\3-course\SEM5\Projects\Project-1\_work\generator\src\pictures\logo.png">    </p:cNvPr>
+          <p:cNvPr id="2" name="Логотип" descr="C:\Study\University\Repos\ProjectsControl\Project-1\_work\generator\src\pictures\logo.png">    </p:cNvPr>
           <p:cNvPicPr>
             <a:picLocks noChangeAspect="1"/>
           </p:cNvPicPr>
@@ -2153,7 +2333,7 @@
         <p:spPr>
           <a:xfrm>
             <a:off x="731520" y="4800600"/>
-            <a:ext cx="5486400" cy="365760"/>
+            <a:ext cx="6035040" cy="365760"/>
           </a:xfrm>
           <a:prstGeom prst="rect">
             <a:avLst/>
@@ -2174,7 +2354,7 @@
                   <a:schemeClr val="bg1"/>
                 </a:solidFill>
               </a:rPr>
-              <a:t>Информационная система на 1С:Предприятие 8.3</a:t>
+              <a:t>Информационная система на 1С:Предприятие 8.3 · версия 1.1 с бронированием</a:t>
             </a:r>
             <a:endParaRPr lang="en-US" sz="1600" dirty="0"/>
           </a:p>
@@ -2225,11 +2405,11 @@
         <p:spPr>
           <a:xfrm>
             <a:off x="6830568" y="1527048"/>
-            <a:ext cx="4809744" cy="3010989"/>
+            <a:ext cx="4809744" cy="2999232"/>
           </a:xfrm>
           <a:prstGeom prst="roundRect">
             <a:avLst>
-              <a:gd name="adj" fmla="val 3644"/>
+              <a:gd name="adj" fmla="val 3659"/>
             </a:avLst>
           </a:prstGeom>
           <a:solidFill>
@@ -2252,7 +2432,7 @@
       </p:sp>
       <p:pic>
         <p:nvPicPr>
-          <p:cNvPr id="8" name="Рабочий стол" descr="C:\Study\University\Portfolio\3-course\SEM5\Projects\Project-1\_work\cheatsheets\src\img\ru_home.png">    </p:cNvPr>
+          <p:cNvPr id="8" name="Рабочий стол" descr="C:\Study\University\Repos\ProjectsControl\Project-1\_work\cheatsheets\src\img\ru_home.png">    </p:cNvPr>
           <p:cNvPicPr>
             <a:picLocks noChangeAspect="1"/>
           </p:cNvPicPr>
@@ -2267,13 +2447,967 @@
         <p:spPr>
           <a:xfrm>
             <a:off x="6903720" y="1600200"/>
-            <a:ext cx="4663440" cy="2864685"/>
+            <a:ext cx="4663440" cy="2852928"/>
           </a:xfrm>
           <a:prstGeom prst="rect">
             <a:avLst/>
           </a:prstGeom>
         </p:spPr>
       </p:pic>
+    </p:spTree>
+  </p:cSld>
+  <p:clrMapOvr>
+    <a:masterClrMapping/>
+  </p:clrMapOvr>
+</p:sld>
+</file>
+
+<file path=ppt/slides/slide10.xml><?xml version="1.0" encoding="utf-8"?>
+<p:sld xmlns:a="http://schemas.openxmlformats.org/drawingml/2006/main" xmlns:r="http://schemas.openxmlformats.org/officeDocument/2006/relationships" xmlns:p="http://schemas.openxmlformats.org/presentationml/2006/main">
+  <p:cSld name="Slide 10">
+    <p:spTree>
+      <p:nvGrpSpPr>
+        <p:cNvPr id="1" name=""/>
+        <p:cNvGrpSpPr/>
+        <p:nvPr/>
+      </p:nvGrpSpPr>
+      <p:grpSpPr>
+        <a:xfrm>
+          <a:off x="0" y="0"/>
+          <a:ext cx="0" cy="0"/>
+          <a:chOff x="0" y="0"/>
+          <a:chExt cx="0" cy="0"/>
+        </a:xfrm>
+      </p:grpSpPr>
+      <p:sp>
+        <p:nvSpPr>
+          <p:cNvPr id="2" name="Text 0"/>
+          <p:cNvSpPr/>
+          <p:nvPr>
+            <p:ph idx="100" type="title" hasCustomPrompt="1"/>
+          </p:nvPr>
+        </p:nvSpPr>
+        <p:spPr>
+          <a:xfrm>
+            <a:off x="640080" y="411480"/>
+            <a:ext cx="10881360" cy="868680"/>
+          </a:xfrm>
+          <a:prstGeom prst="rect">
+            <a:avLst/>
+          </a:prstGeom>
+          <a:noFill/>
+          <a:ln/>
+        </p:spPr>
+        <p:txBody>
+          <a:bodyPr wrap="square" lIns="0" tIns="0" rIns="0" bIns="0" rtlCol="0" anchor="ctr"/>
+          <a:lstStyle/>
+          <a:p>
+            <a:pPr indent="0" marL="0">
+              <a:buNone/>
+            </a:pPr>
+            <a:r>
+              <a:rPr lang="en-US" sz="3600" b="1" dirty="0">
+                <a:solidFill>
+                  <a:schemeClr val="tx2"/>
+                </a:solidFill>
+              </a:rPr>
+              <a:t>Готов к работе с первого запуска</a:t>
+            </a:r>
+            <a:endParaRPr lang="en-US" sz="3600" dirty="0"/>
+          </a:p>
+        </p:txBody>
+      </p:sp>
+      <p:sp>
+        <p:nvSpPr>
+          <p:cNvPr id="3" name="Показатель 1"/>
+          <p:cNvSpPr/>
+          <p:nvPr/>
+        </p:nvSpPr>
+        <p:spPr>
+          <a:xfrm>
+            <a:off x="640080" y="1600200"/>
+            <a:ext cx="2560320" cy="1828800"/>
+          </a:xfrm>
+          <a:prstGeom prst="roundRect">
+            <a:avLst>
+              <a:gd name="adj" fmla="val 7500"/>
+            </a:avLst>
+          </a:prstGeom>
+          <a:solidFill>
+            <a:schemeClr val="bg2"/>
+          </a:solidFill>
+          <a:ln w="12700">
+            <a:solidFill>
+              <a:schemeClr val="bg2"/>
+            </a:solidFill>
+            <a:prstDash val="solid"/>
+          </a:ln>
+        </p:spPr>
+      </p:sp>
+      <p:sp>
+        <p:nvSpPr>
+          <p:cNvPr id="4" name="Показатель 1 число"/>
+          <p:cNvSpPr txBox="1"/>
+          <p:nvPr/>
+        </p:nvSpPr>
+        <p:spPr>
+          <a:xfrm>
+            <a:off x="640080" y="1783080"/>
+            <a:ext cx="2560320" cy="914400"/>
+          </a:xfrm>
+          <a:prstGeom prst="rect">
+            <a:avLst/>
+          </a:prstGeom>
+          <a:noFill/>
+          <a:ln/>
+        </p:spPr>
+        <p:txBody>
+          <a:bodyPr wrap="square" lIns="0" tIns="0" rIns="0" bIns="0" rtlCol="0" anchor="ctr"/>
+          <a:lstStyle/>
+          <a:p>
+            <a:pPr algn="ctr" indent="0" marL="0">
+              <a:buNone/>
+            </a:pPr>
+            <a:r>
+              <a:rPr lang="en-US" sz="6000" b="1" dirty="0">
+                <a:solidFill>
+                  <a:schemeClr val="accent1"/>
+                </a:solidFill>
+              </a:rPr>
+              <a:t>17</a:t>
+            </a:r>
+            <a:endParaRPr lang="en-US" sz="6000" dirty="0"/>
+          </a:p>
+        </p:txBody>
+      </p:sp>
+      <p:sp>
+        <p:nvSpPr>
+          <p:cNvPr id="5" name="Показатель 1 подпись"/>
+          <p:cNvSpPr txBox="1"/>
+          <p:nvPr/>
+        </p:nvSpPr>
+        <p:spPr>
+          <a:xfrm>
+            <a:off x="640080" y="2743200"/>
+            <a:ext cx="2560320" cy="457200"/>
+          </a:xfrm>
+          <a:prstGeom prst="rect">
+            <a:avLst/>
+          </a:prstGeom>
+          <a:noFill/>
+          <a:ln/>
+        </p:spPr>
+        <p:txBody>
+          <a:bodyPr wrap="square" lIns="0" tIns="0" rIns="0" bIns="0" rtlCol="0" anchor="ctr"/>
+          <a:lstStyle/>
+          <a:p>
+            <a:pPr algn="ctr" indent="0" marL="0">
+              <a:buNone/>
+            </a:pPr>
+            <a:r>
+              <a:rPr lang="en-US" sz="1600" dirty="0">
+                <a:solidFill>
+                  <a:schemeClr val="tx2"/>
+                </a:solidFill>
+              </a:rPr>
+              <a:t>товаров с фото</a:t>
+            </a:r>
+            <a:endParaRPr lang="en-US" sz="1600" dirty="0"/>
+          </a:p>
+        </p:txBody>
+      </p:sp>
+      <p:sp>
+        <p:nvSpPr>
+          <p:cNvPr id="6" name="Показатель 2"/>
+          <p:cNvSpPr/>
+          <p:nvPr/>
+        </p:nvSpPr>
+        <p:spPr>
+          <a:xfrm>
+            <a:off x="3429000" y="1600200"/>
+            <a:ext cx="2560320" cy="1828800"/>
+          </a:xfrm>
+          <a:prstGeom prst="roundRect">
+            <a:avLst>
+              <a:gd name="adj" fmla="val 7500"/>
+            </a:avLst>
+          </a:prstGeom>
+          <a:solidFill>
+            <a:schemeClr val="bg2"/>
+          </a:solidFill>
+          <a:ln w="12700">
+            <a:solidFill>
+              <a:schemeClr val="bg2"/>
+            </a:solidFill>
+            <a:prstDash val="solid"/>
+          </a:ln>
+        </p:spPr>
+      </p:sp>
+      <p:sp>
+        <p:nvSpPr>
+          <p:cNvPr id="7" name="Показатель 2 число"/>
+          <p:cNvSpPr txBox="1"/>
+          <p:nvPr/>
+        </p:nvSpPr>
+        <p:spPr>
+          <a:xfrm>
+            <a:off x="3429000" y="1783080"/>
+            <a:ext cx="2560320" cy="914400"/>
+          </a:xfrm>
+          <a:prstGeom prst="rect">
+            <a:avLst/>
+          </a:prstGeom>
+          <a:noFill/>
+          <a:ln/>
+        </p:spPr>
+        <p:txBody>
+          <a:bodyPr wrap="square" lIns="0" tIns="0" rIns="0" bIns="0" rtlCol="0" anchor="ctr"/>
+          <a:lstStyle/>
+          <a:p>
+            <a:pPr algn="ctr" indent="0" marL="0">
+              <a:buNone/>
+            </a:pPr>
+            <a:r>
+              <a:rPr lang="en-US" sz="6000" b="1" dirty="0">
+                <a:solidFill>
+                  <a:schemeClr val="accent1"/>
+                </a:solidFill>
+              </a:rPr>
+              <a:t>5</a:t>
+            </a:r>
+            <a:endParaRPr lang="en-US" sz="6000" dirty="0"/>
+          </a:p>
+        </p:txBody>
+      </p:sp>
+      <p:sp>
+        <p:nvSpPr>
+          <p:cNvPr id="8" name="Показатель 2 подпись"/>
+          <p:cNvSpPr txBox="1"/>
+          <p:nvPr/>
+        </p:nvSpPr>
+        <p:spPr>
+          <a:xfrm>
+            <a:off x="3429000" y="2743200"/>
+            <a:ext cx="2560320" cy="457200"/>
+          </a:xfrm>
+          <a:prstGeom prst="rect">
+            <a:avLst/>
+          </a:prstGeom>
+          <a:noFill/>
+          <a:ln/>
+        </p:spPr>
+        <p:txBody>
+          <a:bodyPr wrap="square" lIns="0" tIns="0" rIns="0" bIns="0" rtlCol="0" anchor="ctr"/>
+          <a:lstStyle/>
+          <a:p>
+            <a:pPr algn="ctr" indent="0" marL="0">
+              <a:buNone/>
+            </a:pPr>
+            <a:r>
+              <a:rPr lang="en-US" sz="1600" dirty="0">
+                <a:solidFill>
+                  <a:schemeClr val="tx2"/>
+                </a:solidFill>
+              </a:rPr>
+              <a:t>разделов</a:t>
+            </a:r>
+            <a:endParaRPr lang="en-US" sz="1600" dirty="0"/>
+          </a:p>
+        </p:txBody>
+      </p:sp>
+      <p:sp>
+        <p:nvSpPr>
+          <p:cNvPr id="9" name="Показатель 3"/>
+          <p:cNvSpPr/>
+          <p:nvPr/>
+        </p:nvSpPr>
+        <p:spPr>
+          <a:xfrm>
+            <a:off x="640080" y="3703320"/>
+            <a:ext cx="2560320" cy="1828800"/>
+          </a:xfrm>
+          <a:prstGeom prst="roundRect">
+            <a:avLst>
+              <a:gd name="adj" fmla="val 7500"/>
+            </a:avLst>
+          </a:prstGeom>
+          <a:solidFill>
+            <a:schemeClr val="bg2"/>
+          </a:solidFill>
+          <a:ln w="12700">
+            <a:solidFill>
+              <a:schemeClr val="bg2"/>
+            </a:solidFill>
+            <a:prstDash val="solid"/>
+          </a:ln>
+        </p:spPr>
+      </p:sp>
+      <p:sp>
+        <p:nvSpPr>
+          <p:cNvPr id="10" name="Показатель 3 число"/>
+          <p:cNvSpPr txBox="1"/>
+          <p:nvPr/>
+        </p:nvSpPr>
+        <p:spPr>
+          <a:xfrm>
+            <a:off x="640080" y="3886200"/>
+            <a:ext cx="2560320" cy="914400"/>
+          </a:xfrm>
+          <a:prstGeom prst="rect">
+            <a:avLst/>
+          </a:prstGeom>
+          <a:noFill/>
+          <a:ln/>
+        </p:spPr>
+        <p:txBody>
+          <a:bodyPr wrap="square" lIns="0" tIns="0" rIns="0" bIns="0" rtlCol="0" anchor="ctr"/>
+          <a:lstStyle/>
+          <a:p>
+            <a:pPr algn="ctr" indent="0" marL="0">
+              <a:buNone/>
+            </a:pPr>
+            <a:r>
+              <a:rPr lang="en-US" sz="6000" b="1" dirty="0">
+                <a:solidFill>
+                  <a:schemeClr val="accent1"/>
+                </a:solidFill>
+              </a:rPr>
+              <a:t>3</a:t>
+            </a:r>
+            <a:endParaRPr lang="en-US" sz="6000" dirty="0"/>
+          </a:p>
+        </p:txBody>
+      </p:sp>
+      <p:sp>
+        <p:nvSpPr>
+          <p:cNvPr id="11" name="Показатель 3 подпись"/>
+          <p:cNvSpPr txBox="1"/>
+          <p:nvPr/>
+        </p:nvSpPr>
+        <p:spPr>
+          <a:xfrm>
+            <a:off x="640080" y="4846320"/>
+            <a:ext cx="2560320" cy="457200"/>
+          </a:xfrm>
+          <a:prstGeom prst="rect">
+            <a:avLst/>
+          </a:prstGeom>
+          <a:noFill/>
+          <a:ln/>
+        </p:spPr>
+        <p:txBody>
+          <a:bodyPr wrap="square" lIns="0" tIns="0" rIns="0" bIns="0" rtlCol="0" anchor="ctr"/>
+          <a:lstStyle/>
+          <a:p>
+            <a:pPr algn="ctr" indent="0" marL="0">
+              <a:buNone/>
+            </a:pPr>
+            <a:r>
+              <a:rPr lang="en-US" sz="1600" dirty="0">
+                <a:solidFill>
+                  <a:schemeClr val="tx2"/>
+                </a:solidFill>
+              </a:rPr>
+              <a:t>роли</a:t>
+            </a:r>
+            <a:endParaRPr lang="en-US" sz="1600" dirty="0"/>
+          </a:p>
+        </p:txBody>
+      </p:sp>
+      <p:sp>
+        <p:nvSpPr>
+          <p:cNvPr id="12" name="Показатель 4"/>
+          <p:cNvSpPr/>
+          <p:nvPr/>
+        </p:nvSpPr>
+        <p:spPr>
+          <a:xfrm>
+            <a:off x="3429000" y="3703320"/>
+            <a:ext cx="2560320" cy="1828800"/>
+          </a:xfrm>
+          <a:prstGeom prst="roundRect">
+            <a:avLst>
+              <a:gd name="adj" fmla="val 7500"/>
+            </a:avLst>
+          </a:prstGeom>
+          <a:solidFill>
+            <a:schemeClr val="bg2"/>
+          </a:solidFill>
+          <a:ln w="12700">
+            <a:solidFill>
+              <a:schemeClr val="bg2"/>
+            </a:solidFill>
+            <a:prstDash val="solid"/>
+          </a:ln>
+        </p:spPr>
+      </p:sp>
+      <p:sp>
+        <p:nvSpPr>
+          <p:cNvPr id="13" name="Показатель 4 число"/>
+          <p:cNvSpPr txBox="1"/>
+          <p:nvPr/>
+        </p:nvSpPr>
+        <p:spPr>
+          <a:xfrm>
+            <a:off x="3429000" y="3886200"/>
+            <a:ext cx="2560320" cy="914400"/>
+          </a:xfrm>
+          <a:prstGeom prst="rect">
+            <a:avLst/>
+          </a:prstGeom>
+          <a:noFill/>
+          <a:ln/>
+        </p:spPr>
+        <p:txBody>
+          <a:bodyPr wrap="square" lIns="0" tIns="0" rIns="0" bIns="0" rtlCol="0" anchor="ctr"/>
+          <a:lstStyle/>
+          <a:p>
+            <a:pPr algn="ctr" indent="0" marL="0">
+              <a:buNone/>
+            </a:pPr>
+            <a:r>
+              <a:rPr lang="en-US" sz="6000" b="1" dirty="0">
+                <a:solidFill>
+                  <a:schemeClr val="accent1"/>
+                </a:solidFill>
+              </a:rPr>
+              <a:t>2</a:t>
+            </a:r>
+            <a:endParaRPr lang="en-US" sz="6000" dirty="0"/>
+          </a:p>
+        </p:txBody>
+      </p:sp>
+      <p:sp>
+        <p:nvSpPr>
+          <p:cNvPr id="14" name="Показатель 4 подпись"/>
+          <p:cNvSpPr txBox="1"/>
+          <p:nvPr/>
+        </p:nvSpPr>
+        <p:spPr>
+          <a:xfrm>
+            <a:off x="3429000" y="4846320"/>
+            <a:ext cx="2560320" cy="457200"/>
+          </a:xfrm>
+          <a:prstGeom prst="rect">
+            <a:avLst/>
+          </a:prstGeom>
+          <a:noFill/>
+          <a:ln/>
+        </p:spPr>
+        <p:txBody>
+          <a:bodyPr wrap="square" lIns="0" tIns="0" rIns="0" bIns="0" rtlCol="0" anchor="ctr"/>
+          <a:lstStyle/>
+          <a:p>
+            <a:pPr algn="ctr" indent="0" marL="0">
+              <a:buNone/>
+            </a:pPr>
+            <a:r>
+              <a:rPr lang="en-US" sz="1600" dirty="0">
+                <a:solidFill>
+                  <a:schemeClr val="tx2"/>
+                </a:solidFill>
+              </a:rPr>
+              <a:t>языка интерфейса</a:t>
+            </a:r>
+            <a:endParaRPr lang="en-US" sz="1600" dirty="0"/>
+          </a:p>
+        </p:txBody>
+      </p:sp>
+      <p:sp>
+        <p:nvSpPr>
+          <p:cNvPr id="15" name="Китайский интерфейс рамка"/>
+          <p:cNvSpPr/>
+          <p:nvPr/>
+        </p:nvSpPr>
+        <p:spPr>
+          <a:xfrm>
+            <a:off x="6327648" y="1527048"/>
+            <a:ext cx="5312664" cy="3306901"/>
+          </a:xfrm>
+          <a:prstGeom prst="roundRect">
+            <a:avLst>
+              <a:gd name="adj" fmla="val 3318"/>
+            </a:avLst>
+          </a:prstGeom>
+          <a:solidFill>
+            <a:schemeClr val="bg1"/>
+          </a:solidFill>
+          <a:ln w="12700">
+            <a:solidFill>
+              <a:schemeClr val="bg2"/>
+            </a:solidFill>
+            <a:prstDash val="solid"/>
+          </a:ln>
+          <a:effectLst>
+            <a:outerShdw sx="100000" sy="100000" kx="0" ky="0" algn="bl" rotWithShape="0" blurRad="101600" dist="38100" dir="5400000">
+              <a:srgbClr val="0F2747">
+                <a:alpha val="25000"/>
+              </a:srgbClr>
+            </a:outerShdw>
+          </a:effectLst>
+        </p:spPr>
+      </p:sp>
+      <p:pic>
+        <p:nvPicPr>
+          <p:cNvPr id="16" name="Китайский интерфейс" descr="C:\Study\University\Repos\ProjectsControl\Project-1\_work\cheatsheets\src\img\zh_home.png">    </p:cNvPr>
+          <p:cNvPicPr>
+            <a:picLocks noChangeAspect="1"/>
+          </p:cNvPicPr>
+          <p:nvPr/>
+        </p:nvPicPr>
+        <p:blipFill>
+          <a:blip r:embed="rId1"/>
+          <a:stretch>
+            <a:fillRect/>
+          </a:stretch>
+        </p:blipFill>
+        <p:spPr>
+          <a:xfrm>
+            <a:off x="6400800" y="1600200"/>
+            <a:ext cx="5166360" cy="3160597"/>
+          </a:xfrm>
+          <a:prstGeom prst="rect">
+            <a:avLst/>
+          </a:prstGeom>
+        </p:spPr>
+      </p:pic>
+      <p:sp>
+        <p:nvSpPr>
+          <p:cNvPr id="17" name="Подпись китайский"/>
+          <p:cNvSpPr txBox="1"/>
+          <p:nvPr/>
+        </p:nvSpPr>
+        <p:spPr>
+          <a:xfrm>
+            <a:off x="6400800" y="4989397"/>
+            <a:ext cx="5166360" cy="411480"/>
+          </a:xfrm>
+          <a:prstGeom prst="rect">
+            <a:avLst/>
+          </a:prstGeom>
+          <a:noFill/>
+          <a:ln/>
+        </p:spPr>
+        <p:txBody>
+          <a:bodyPr wrap="square" lIns="0" tIns="0" rIns="0" bIns="0" rtlCol="0" anchor="ctr"/>
+          <a:lstStyle/>
+          <a:p>
+            <a:pPr algn="ctr" indent="0" marL="0">
+              <a:buNone/>
+            </a:pPr>
+            <a:r>
+              <a:rPr lang="en-US" sz="1700" b="1" dirty="0">
+                <a:solidFill>
+                  <a:schemeClr val="tx2"/>
+                </a:solidFill>
+              </a:rPr>
+              <a:t>Говорит по-китайски: </a:t>
+            </a:r>
+            <a:pPr algn="ctr" indent="0" marL="0">
+              <a:buNone/>
+            </a:pPr>
+            <a:r>
+              <a:rPr lang="en-US" sz="1700" b="1" dirty="0">
+                <a:solidFill>
+                  <a:schemeClr val="accent1"/>
+                </a:solidFill>
+              </a:rPr>
+              <a:t>伏特商城 VoltMarket</a:t>
+            </a:r>
+            <a:endParaRPr lang="en-US" sz="1700" dirty="0"/>
+          </a:p>
+        </p:txBody>
+      </p:sp>
+      <p:sp>
+        <p:nvSpPr>
+          <p:cNvPr id="18" name="Демо"/>
+          <p:cNvSpPr txBox="1"/>
+          <p:nvPr/>
+        </p:nvSpPr>
+        <p:spPr>
+          <a:xfrm>
+            <a:off x="640080" y="5852160"/>
+            <a:ext cx="5349240" cy="365760"/>
+          </a:xfrm>
+          <a:prstGeom prst="rect">
+            <a:avLst/>
+          </a:prstGeom>
+          <a:noFill/>
+          <a:ln/>
+        </p:spPr>
+        <p:txBody>
+          <a:bodyPr wrap="square" lIns="0" tIns="0" rIns="0" bIns="0" rtlCol="0" anchor="ctr"/>
+          <a:lstStyle/>
+          <a:p>
+            <a:pPr indent="0" marL="0">
+              <a:buNone/>
+            </a:pPr>
+            <a:r>
+              <a:rPr lang="en-US" sz="1400" dirty="0">
+                <a:solidFill>
+                  <a:schemeClr val="accent4"/>
+                </a:solidFill>
+              </a:rPr>
+              <a:t>В базе уже есть товары, покупатели, цены, документы и брони</a:t>
+            </a:r>
+            <a:endParaRPr lang="en-US" sz="1400" dirty="0"/>
+          </a:p>
+        </p:txBody>
+      </p:sp>
+      <p:sp>
+        <p:nvSpPr>
+          <p:cNvPr id="25" name="Slide Number Placeholder 0"/>
+          <p:cNvSpPr>
+            <a:spLocks noGrp="1"/>
+          </p:cNvSpPr>
+          <p:nvPr>
+            <p:ph type="sldNum" sz="quarter" idx="4294967295"/>
+          </p:nvPr>
+        </p:nvSpPr>
+        <p:spPr>
+          <a:xfrm>
+            <a:off x="11338560" y="6355080"/>
+            <a:ext cx="457200" cy="274320"/>
+          </a:xfrm>
+          <a:prstGeom prst="rect">
+            <a:avLst/>
+          </a:prstGeom>
+          <a:extLst>
+            <a:ext uri="{C572A759-6A51-4108-AA02-DFA0A04FC94B}">
+              <ma14:wrappingTextBoxFlag xmlns:ma14="http://schemas.microsoft.com/office/mac/drawingml/2011/main" val="0"/>
+            </a:ext>
+          </a:extLst>
+        </p:spPr>
+        <p:txBody>
+          <a:bodyPr/>
+          <a:lstStyle>
+            <a:lvl1pPr>
+              <a:defRPr sz="1100">
+                <a:solidFill>
+                  <a:schemeClr val="accent4"/>
+                </a:solidFill>
+              </a:defRPr>
+            </a:lvl1pPr>
+          </a:lstStyle>
+          <a:p>
+            <a:pPr algn="l"/>
+            <a:fld id="{F7021451-1387-4CA6-816F-3879F97B5CBC}" type="slidenum">
+              <a:rPr b="0" lang="en-US"/>
+              <a:t>10</a:t>
+            </a:fld>
+            <a:endParaRPr lang="en-US"/>
+          </a:p>
+        </p:txBody>
+      </p:sp>
+    </p:spTree>
+  </p:cSld>
+  <p:clrMapOvr>
+    <a:masterClrMapping/>
+  </p:clrMapOvr>
+</p:sld>
+</file>
+
+<file path=ppt/slides/slide11.xml><?xml version="1.0" encoding="utf-8"?>
+<p:sld xmlns:a="http://schemas.openxmlformats.org/drawingml/2006/main" xmlns:r="http://schemas.openxmlformats.org/officeDocument/2006/relationships" xmlns:p="http://schemas.openxmlformats.org/presentationml/2006/main">
+  <p:cSld name="Slide 11">
+    <p:spTree>
+      <p:nvGrpSpPr>
+        <p:cNvPr id="1" name=""/>
+        <p:cNvGrpSpPr/>
+        <p:nvPr/>
+      </p:nvGrpSpPr>
+      <p:grpSpPr>
+        <a:xfrm>
+          <a:off x="0" y="0"/>
+          <a:ext cx="0" cy="0"/>
+          <a:chOff x="0" y="0"/>
+          <a:chExt cx="0" cy="0"/>
+        </a:xfrm>
+      </p:grpSpPr>
+      <p:pic>
+        <p:nvPicPr>
+          <p:cNvPr id="2" name="Логотип" descr="C:\Study\University\Repos\ProjectsControl\Project-1\_work\generator\src\pictures\logo.png">    </p:cNvPr>
+          <p:cNvPicPr>
+            <a:picLocks noChangeAspect="1"/>
+          </p:cNvPicPr>
+          <p:nvPr/>
+        </p:nvPicPr>
+        <p:blipFill>
+          <a:blip r:embed="rId1"/>
+          <a:stretch>
+            <a:fillRect/>
+          </a:stretch>
+        </p:blipFill>
+        <p:spPr>
+          <a:xfrm>
+            <a:off x="731520" y="822960"/>
+            <a:ext cx="4023360" cy="1005840"/>
+          </a:xfrm>
+          <a:prstGeom prst="rect">
+            <a:avLst/>
+          </a:prstGeom>
+        </p:spPr>
+      </p:pic>
+      <p:sp>
+        <p:nvSpPr>
+          <p:cNvPr id="3" name="Text 0"/>
+          <p:cNvSpPr/>
+          <p:nvPr>
+            <p:ph idx="100" type="title" hasCustomPrompt="1"/>
+          </p:nvPr>
+        </p:nvSpPr>
+        <p:spPr>
+          <a:xfrm>
+            <a:off x="731520" y="2331720"/>
+            <a:ext cx="5852160" cy="1188720"/>
+          </a:xfrm>
+          <a:prstGeom prst="rect">
+            <a:avLst/>
+          </a:prstGeom>
+          <a:noFill/>
+          <a:ln/>
+        </p:spPr>
+        <p:txBody>
+          <a:bodyPr wrap="square" lIns="0" tIns="0" rIns="0" bIns="0" rtlCol="0" anchor="t"/>
+          <a:lstStyle/>
+          <a:p>
+            <a:pPr algn="l" indent="0" marL="0">
+              <a:buNone/>
+            </a:pPr>
+            <a:r>
+              <a:rPr lang="en-US" sz="5400" b="1" dirty="0">
+                <a:solidFill>
+                  <a:schemeClr val="bg1"/>
+                </a:solidFill>
+              </a:rPr>
+              <a:t>Спасибо!</a:t>
+            </a:r>
+            <a:endParaRPr lang="en-US" sz="5400" dirty="0"/>
+          </a:p>
+        </p:txBody>
+      </p:sp>
+      <p:sp>
+        <p:nvSpPr>
+          <p:cNvPr id="4" name="Text 0"/>
+          <p:cNvSpPr/>
+          <p:nvPr>
+            <p:ph idx="101" type="body" hasCustomPrompt="1"/>
+          </p:nvPr>
+        </p:nvSpPr>
+        <p:spPr>
+          <a:xfrm>
+            <a:off x="731520" y="3566160"/>
+            <a:ext cx="5486400" cy="1097280"/>
+          </a:xfrm>
+          <a:prstGeom prst="rect">
+            <a:avLst/>
+          </a:prstGeom>
+          <a:noFill/>
+          <a:ln/>
+        </p:spPr>
+        <p:txBody>
+          <a:bodyPr wrap="square" lIns="0" tIns="0" rIns="0" bIns="0" rtlCol="0" anchor="t"/>
+          <a:lstStyle/>
+          <a:p>
+            <a:pPr algn="l" indent="0" marL="0">
+              <a:buNone/>
+            </a:pPr>
+            <a:r>
+              <a:rPr lang="en-US" sz="2200" dirty="0">
+                <a:solidFill>
+                  <a:schemeClr val="accent2"/>
+                </a:solidFill>
+              </a:rPr>
+              <a:t>ВольтМаркет — учёт, который заряжает ваш магазин</a:t>
+            </a:r>
+            <a:endParaRPr lang="en-US" sz="2200" dirty="0"/>
+          </a:p>
+        </p:txBody>
+      </p:sp>
+      <p:sp>
+        <p:nvSpPr>
+          <p:cNvPr id="5" name="Попробуйте"/>
+          <p:cNvSpPr/>
+          <p:nvPr/>
+        </p:nvSpPr>
+        <p:spPr>
+          <a:xfrm>
+            <a:off x="6949440" y="2011680"/>
+            <a:ext cx="4572000" cy="2423160"/>
+          </a:xfrm>
+          <a:prstGeom prst="roundRect">
+            <a:avLst>
+              <a:gd name="adj" fmla="val 5660"/>
+            </a:avLst>
+          </a:prstGeom>
+          <a:solidFill>
+            <a:schemeClr val="bg1"/>
+          </a:solidFill>
+          <a:ln w="12700">
+            <a:solidFill>
+              <a:schemeClr val="bg1"/>
+            </a:solidFill>
+            <a:prstDash val="solid"/>
+          </a:ln>
+        </p:spPr>
+      </p:sp>
+      <p:sp>
+        <p:nvSpPr>
+          <p:cNvPr id="6" name="Попробуйте круг"/>
+          <p:cNvSpPr/>
+          <p:nvPr/>
+        </p:nvSpPr>
+        <p:spPr>
+          <a:xfrm>
+            <a:off x="7269480" y="2286000"/>
+            <a:ext cx="822960" cy="822960"/>
+          </a:xfrm>
+          <a:prstGeom prst="ellipse">
+            <a:avLst/>
+          </a:prstGeom>
+          <a:solidFill>
+            <a:srgbClr val="0F2747"/>
+          </a:solidFill>
+          <a:ln w="12700">
+            <a:solidFill>
+              <a:srgbClr val="0F2747"/>
+            </a:solidFill>
+            <a:prstDash val="solid"/>
+          </a:ln>
+        </p:spPr>
+      </p:sp>
+      <p:pic>
+        <p:nvPicPr>
+          <p:cNvPr id="7" name="Попробуйте иконка" descr="preencoded.png">    </p:cNvPr>
+          <p:cNvPicPr>
+            <a:picLocks noChangeAspect="1"/>
+          </p:cNvPicPr>
+          <p:nvPr/>
+        </p:nvPicPr>
+        <p:blipFill>
+          <a:blip r:embed="rId2"/>
+          <a:stretch>
+            <a:fillRect/>
+          </a:stretch>
+        </p:blipFill>
+        <p:spPr>
+          <a:xfrm>
+            <a:off x="7466990" y="2483510"/>
+            <a:ext cx="427939" cy="427939"/>
+          </a:xfrm>
+          <a:prstGeom prst="rect">
+            <a:avLst/>
+          </a:prstGeom>
+        </p:spPr>
+      </p:pic>
+      <p:sp>
+        <p:nvSpPr>
+          <p:cNvPr id="8" name="Попробуйте заголовок"/>
+          <p:cNvSpPr txBox="1"/>
+          <p:nvPr/>
+        </p:nvSpPr>
+        <p:spPr>
+          <a:xfrm>
+            <a:off x="8275320" y="2286000"/>
+            <a:ext cx="3017520" cy="822960"/>
+          </a:xfrm>
+          <a:prstGeom prst="rect">
+            <a:avLst/>
+          </a:prstGeom>
+          <a:noFill/>
+          <a:ln/>
+        </p:spPr>
+        <p:txBody>
+          <a:bodyPr wrap="square" lIns="0" tIns="0" rIns="0" bIns="0" rtlCol="0" anchor="ctr"/>
+          <a:lstStyle/>
+          <a:p>
+            <a:pPr indent="0" marL="0">
+              <a:buNone/>
+            </a:pPr>
+            <a:r>
+              <a:rPr lang="en-US" sz="2400" b="1" dirty="0">
+                <a:solidFill>
+                  <a:schemeClr val="tx2"/>
+                </a:solidFill>
+              </a:rPr>
+              <a:t>Попробуйте сами</a:t>
+            </a:r>
+            <a:endParaRPr lang="en-US" sz="2400" dirty="0"/>
+          </a:p>
+        </p:txBody>
+      </p:sp>
+      <p:sp>
+        <p:nvSpPr>
+          <p:cNvPr id="9" name="Попробуйте текст"/>
+          <p:cNvSpPr txBox="1"/>
+          <p:nvPr/>
+        </p:nvSpPr>
+        <p:spPr>
+          <a:xfrm>
+            <a:off x="7269480" y="3291840"/>
+            <a:ext cx="3977640" cy="1188720"/>
+          </a:xfrm>
+          <a:prstGeom prst="rect">
+            <a:avLst/>
+          </a:prstGeom>
+          <a:noFill/>
+          <a:ln/>
+        </p:spPr>
+        <p:txBody>
+          <a:bodyPr wrap="square" lIns="0" tIns="0" rIns="0" bIns="0" rtlCol="0" anchor="t"/>
+          <a:lstStyle/>
+          <a:p>
+            <a:pPr indent="0" marL="0">
+              <a:buNone/>
+            </a:pPr>
+            <a:r>
+              <a:rPr lang="en-US" sz="1700" dirty="0">
+                <a:solidFill>
+                  <a:schemeClr val="tx1"/>
+                </a:solidFill>
+              </a:rPr>
+              <a:t>Загрузите VoltMarket.dt, войдите как «Продавец», забронируйте товар и продайте его по брони за минуту</a:t>
+            </a:r>
+            <a:endParaRPr lang="en-US" sz="1700" dirty="0"/>
+          </a:p>
+        </p:txBody>
+      </p:sp>
+      <p:sp>
+        <p:nvSpPr>
+          <p:cNvPr id="10" name="Подпись"/>
+          <p:cNvSpPr txBox="1"/>
+          <p:nvPr/>
+        </p:nvSpPr>
+        <p:spPr>
+          <a:xfrm>
+            <a:off x="731520" y="6172200"/>
+            <a:ext cx="5486400" cy="320040"/>
+          </a:xfrm>
+          <a:prstGeom prst="rect">
+            <a:avLst/>
+          </a:prstGeom>
+          <a:noFill/>
+          <a:ln/>
+        </p:spPr>
+        <p:txBody>
+          <a:bodyPr wrap="square" lIns="0" tIns="0" rIns="0" bIns="0" rtlCol="0" anchor="ctr"/>
+          <a:lstStyle/>
+          <a:p>
+            <a:pPr indent="0" marL="0">
+              <a:buNone/>
+            </a:pPr>
+            <a:r>
+              <a:rPr lang="en-US" sz="1200" dirty="0">
+                <a:solidFill>
+                  <a:schemeClr val="accent4"/>
+                </a:solidFill>
+              </a:rPr>
+              <a:t>Команда «ВольтМаркет» · 2026</a:t>
+            </a:r>
+            <a:endParaRPr lang="en-US" sz="1200" dirty="0"/>
+          </a:p>
+        </p:txBody>
+      </p:sp>
     </p:spTree>
   </p:cSld>
   <p:clrMapOvr>
@@ -2346,11 +3480,11 @@
         <p:spPr>
           <a:xfrm>
             <a:off x="640080" y="1600200"/>
-            <a:ext cx="3474720" cy="2926080"/>
+            <a:ext cx="2606040" cy="3108960"/>
           </a:xfrm>
           <a:prstGeom prst="roundRect">
             <a:avLst>
-              <a:gd name="adj" fmla="val 4688"/>
+              <a:gd name="adj" fmla="val 5263"/>
             </a:avLst>
           </a:prstGeom>
           <a:solidFill>
@@ -2372,8 +3506,8 @@
         </p:nvSpPr>
         <p:spPr>
           <a:xfrm>
-            <a:off x="960120" y="1920240"/>
-            <a:ext cx="914400" cy="914400"/>
+            <a:off x="914400" y="1874520"/>
+            <a:ext cx="868680" cy="868680"/>
           </a:xfrm>
           <a:prstGeom prst="ellipse">
             <a:avLst/>
@@ -2405,8 +3539,8 @@
         </p:blipFill>
         <p:spPr>
           <a:xfrm>
-            <a:off x="1179576" y="2139696"/>
-            <a:ext cx="475488" cy="475488"/>
+            <a:off x="1122883" y="2083003"/>
+            <a:ext cx="451714" cy="451714"/>
           </a:xfrm>
           <a:prstGeom prst="rect">
             <a:avLst/>
@@ -2421,8 +3555,8 @@
         </p:nvSpPr>
         <p:spPr>
           <a:xfrm>
-            <a:off x="960120" y="3017520"/>
-            <a:ext cx="2926080" cy="548640"/>
+            <a:off x="914400" y="2926080"/>
+            <a:ext cx="2194560" cy="685800"/>
           </a:xfrm>
           <a:prstGeom prst="rect">
             <a:avLst/>
@@ -2438,14 +3572,14 @@
               <a:buNone/>
             </a:pPr>
             <a:r>
-              <a:rPr lang="en-US" sz="2200" b="1" dirty="0">
+              <a:rPr lang="en-US" sz="1900" b="1" dirty="0">
                 <a:solidFill>
                   <a:schemeClr val="tx2"/>
                 </a:solidFill>
               </a:rPr>
               <a:t>Тетради и таблицы</a:t>
             </a:r>
-            <a:endParaRPr lang="en-US" sz="2200" dirty="0"/>
+            <a:endParaRPr lang="en-US" sz="1900" dirty="0"/>
           </a:p>
         </p:txBody>
       </p:sp>
@@ -2457,8 +3591,8 @@
         </p:nvSpPr>
         <p:spPr>
           <a:xfrm>
-            <a:off x="960120" y="3611880"/>
-            <a:ext cx="2880360" cy="1371600"/>
+            <a:off x="914400" y="3611880"/>
+            <a:ext cx="2148840" cy="1005840"/>
           </a:xfrm>
           <a:prstGeom prst="rect">
             <a:avLst/>
@@ -2474,14 +3608,14 @@
               <a:buNone/>
             </a:pPr>
             <a:r>
-              <a:rPr lang="en-US" sz="1600" dirty="0">
+              <a:rPr lang="en-US" sz="1400" dirty="0">
                 <a:solidFill>
                   <a:schemeClr val="tx1"/>
                 </a:solidFill>
               </a:rPr>
               <a:t>Остатки считают вручную, и у каждого сотрудника свои цифры</a:t>
             </a:r>
-            <a:endParaRPr lang="en-US" sz="1600" dirty="0"/>
+            <a:endParaRPr lang="en-US" sz="1400" dirty="0"/>
           </a:p>
         </p:txBody>
       </p:sp>
@@ -2493,12 +3627,12 @@
         </p:nvSpPr>
         <p:spPr>
           <a:xfrm>
-            <a:off x="4389120" y="1600200"/>
-            <a:ext cx="3474720" cy="2926080"/>
+            <a:off x="3429000" y="1600200"/>
+            <a:ext cx="2606040" cy="3108960"/>
           </a:xfrm>
           <a:prstGeom prst="roundRect">
             <a:avLst>
-              <a:gd name="adj" fmla="val 4688"/>
+              <a:gd name="adj" fmla="val 5263"/>
             </a:avLst>
           </a:prstGeom>
           <a:solidFill>
@@ -2520,8 +3654,8 @@
         </p:nvSpPr>
         <p:spPr>
           <a:xfrm>
-            <a:off x="4709160" y="1920240"/>
-            <a:ext cx="914400" cy="914400"/>
+            <a:off x="3703320" y="1874520"/>
+            <a:ext cx="868680" cy="868680"/>
           </a:xfrm>
           <a:prstGeom prst="ellipse">
             <a:avLst/>
@@ -2553,8 +3687,8 @@
         </p:blipFill>
         <p:spPr>
           <a:xfrm>
-            <a:off x="4928616" y="2139696"/>
-            <a:ext cx="475488" cy="475488"/>
+            <a:off x="3911803" y="2083003"/>
+            <a:ext cx="451714" cy="451714"/>
           </a:xfrm>
           <a:prstGeom prst="rect">
             <a:avLst/>
@@ -2569,8 +3703,8 @@
         </p:nvSpPr>
         <p:spPr>
           <a:xfrm>
-            <a:off x="4709160" y="3017520"/>
-            <a:ext cx="2926080" cy="548640"/>
+            <a:off x="3703320" y="2926080"/>
+            <a:ext cx="2194560" cy="685800"/>
           </a:xfrm>
           <a:prstGeom prst="rect">
             <a:avLst/>
@@ -2586,14 +3720,14 @@
               <a:buNone/>
             </a:pPr>
             <a:r>
-              <a:rPr lang="en-US" sz="2200" b="1" dirty="0">
+              <a:rPr lang="en-US" sz="1900" b="1" dirty="0">
                 <a:solidFill>
                   <a:schemeClr val="tx2"/>
                 </a:solidFill>
               </a:rPr>
               <a:t>Продали то, чего нет</a:t>
             </a:r>
-            <a:endParaRPr lang="en-US" sz="2200" dirty="0"/>
+            <a:endParaRPr lang="en-US" sz="1900" dirty="0"/>
           </a:p>
         </p:txBody>
       </p:sp>
@@ -2605,8 +3739,8 @@
         </p:nvSpPr>
         <p:spPr>
           <a:xfrm>
-            <a:off x="4709160" y="3611880"/>
-            <a:ext cx="2880360" cy="1371600"/>
+            <a:off x="3703320" y="3611880"/>
+            <a:ext cx="2148840" cy="1005840"/>
           </a:xfrm>
           <a:prstGeom prst="rect">
             <a:avLst/>
@@ -2622,14 +3756,14 @@
               <a:buNone/>
             </a:pPr>
             <a:r>
-              <a:rPr lang="en-US" sz="1600" dirty="0">
+              <a:rPr lang="en-US" sz="1400" dirty="0">
                 <a:solidFill>
                   <a:schemeClr val="tx1"/>
                 </a:solidFill>
               </a:rPr>
               <a:t>Покупатель уже оплатил, а товара на складе не оказалось</a:t>
             </a:r>
-            <a:endParaRPr lang="en-US" sz="1600" dirty="0"/>
+            <a:endParaRPr lang="en-US" sz="1400" dirty="0"/>
           </a:p>
         </p:txBody>
       </p:sp>
@@ -2641,12 +3775,12 @@
         </p:nvSpPr>
         <p:spPr>
           <a:xfrm>
-            <a:off x="8138160" y="1600200"/>
-            <a:ext cx="3474720" cy="2926080"/>
+            <a:off x="6217920" y="1600200"/>
+            <a:ext cx="2606040" cy="3108960"/>
           </a:xfrm>
           <a:prstGeom prst="roundRect">
             <a:avLst>
-              <a:gd name="adj" fmla="val 4688"/>
+              <a:gd name="adj" fmla="val 5263"/>
             </a:avLst>
           </a:prstGeom>
           <a:solidFill>
@@ -2668,8 +3802,8 @@
         </p:nvSpPr>
         <p:spPr>
           <a:xfrm>
-            <a:off x="8458200" y="1920240"/>
-            <a:ext cx="914400" cy="914400"/>
+            <a:off x="6492240" y="1874520"/>
+            <a:ext cx="868680" cy="868680"/>
           </a:xfrm>
           <a:prstGeom prst="ellipse">
             <a:avLst/>
@@ -2701,8 +3835,8 @@
         </p:blipFill>
         <p:spPr>
           <a:xfrm>
-            <a:off x="8677656" y="2139696"/>
-            <a:ext cx="475488" cy="475488"/>
+            <a:off x="6700723" y="2083003"/>
+            <a:ext cx="451714" cy="451714"/>
           </a:xfrm>
           <a:prstGeom prst="rect">
             <a:avLst/>
@@ -2717,8 +3851,8 @@
         </p:nvSpPr>
         <p:spPr>
           <a:xfrm>
-            <a:off x="8458200" y="3017520"/>
-            <a:ext cx="2926080" cy="548640"/>
+            <a:off x="6492240" y="2926080"/>
+            <a:ext cx="2194560" cy="685800"/>
           </a:xfrm>
           <a:prstGeom prst="rect">
             <a:avLst/>
@@ -2734,14 +3868,14 @@
               <a:buNone/>
             </a:pPr>
             <a:r>
-              <a:rPr lang="en-US" sz="2200" b="1" dirty="0">
+              <a:rPr lang="en-US" sz="1900" b="1" dirty="0">
                 <a:solidFill>
                   <a:schemeClr val="tx2"/>
                 </a:solidFill>
               </a:rPr>
-              <a:t>Сколько заработали?</a:t>
-            </a:r>
-            <a:endParaRPr lang="en-US" sz="2200" dirty="0"/>
+              <a:t>Отложили — и продали</a:t>
+            </a:r>
+            <a:endParaRPr lang="en-US" sz="1900" dirty="0"/>
           </a:p>
         </p:txBody>
       </p:sp>
@@ -2753,8 +3887,8 @@
         </p:nvSpPr>
         <p:spPr>
           <a:xfrm>
-            <a:off x="8458200" y="3611880"/>
-            <a:ext cx="2880360" cy="1371600"/>
+            <a:off x="6492240" y="3611880"/>
+            <a:ext cx="2148840" cy="1005840"/>
           </a:xfrm>
           <a:prstGeom prst="rect">
             <a:avLst/>
@@ -2770,20 +3904,168 @@
               <a:buNone/>
             </a:pPr>
             <a:r>
-              <a:rPr lang="en-US" sz="1600" dirty="0">
+              <a:rPr lang="en-US" sz="1400" dirty="0">
                 <a:solidFill>
                   <a:schemeClr val="tx1"/>
                 </a:solidFill>
               </a:rPr>
+              <a:t>Товар обещали одному клиенту, а продали другому</a:t>
+            </a:r>
+            <a:endParaRPr lang="en-US" sz="1400" dirty="0"/>
+          </a:p>
+        </p:txBody>
+      </p:sp>
+      <p:sp>
+        <p:nvSpPr>
+          <p:cNvPr id="18" name="Проблема 4"/>
+          <p:cNvSpPr/>
+          <p:nvPr/>
+        </p:nvSpPr>
+        <p:spPr>
+          <a:xfrm>
+            <a:off x="9006840" y="1600200"/>
+            <a:ext cx="2606040" cy="3108960"/>
+          </a:xfrm>
+          <a:prstGeom prst="roundRect">
+            <a:avLst>
+              <a:gd name="adj" fmla="val 5263"/>
+            </a:avLst>
+          </a:prstGeom>
+          <a:solidFill>
+            <a:schemeClr val="bg2"/>
+          </a:solidFill>
+          <a:ln w="12700">
+            <a:solidFill>
+              <a:schemeClr val="bg2"/>
+            </a:solidFill>
+            <a:prstDash val="solid"/>
+          </a:ln>
+        </p:spPr>
+      </p:sp>
+      <p:sp>
+        <p:nvSpPr>
+          <p:cNvPr id="19" name="Проблема 4 круг"/>
+          <p:cNvSpPr/>
+          <p:nvPr/>
+        </p:nvSpPr>
+        <p:spPr>
+          <a:xfrm>
+            <a:off x="9281160" y="1874520"/>
+            <a:ext cx="868680" cy="868680"/>
+          </a:xfrm>
+          <a:prstGeom prst="ellipse">
+            <a:avLst/>
+          </a:prstGeom>
+          <a:solidFill>
+            <a:srgbClr val="0F2747"/>
+          </a:solidFill>
+          <a:ln w="12700">
+            <a:solidFill>
+              <a:srgbClr val="0F2747"/>
+            </a:solidFill>
+            <a:prstDash val="solid"/>
+          </a:ln>
+        </p:spPr>
+      </p:sp>
+      <p:pic>
+        <p:nvPicPr>
+          <p:cNvPr id="20" name="Проблема 4 иконка" descr="preencoded.png">    </p:cNvPr>
+          <p:cNvPicPr>
+            <a:picLocks noChangeAspect="1"/>
+          </p:cNvPicPr>
+          <p:nvPr/>
+        </p:nvPicPr>
+        <p:blipFill>
+          <a:blip r:embed="rId4"/>
+          <a:stretch>
+            <a:fillRect/>
+          </a:stretch>
+        </p:blipFill>
+        <p:spPr>
+          <a:xfrm>
+            <a:off x="9489643" y="2083003"/>
+            <a:ext cx="451714" cy="451714"/>
+          </a:xfrm>
+          <a:prstGeom prst="rect">
+            <a:avLst/>
+          </a:prstGeom>
+        </p:spPr>
+      </p:pic>
+      <p:sp>
+        <p:nvSpPr>
+          <p:cNvPr id="21" name="Проблема 4 заголовок"/>
+          <p:cNvSpPr txBox="1"/>
+          <p:nvPr/>
+        </p:nvSpPr>
+        <p:spPr>
+          <a:xfrm>
+            <a:off x="9281160" y="2926080"/>
+            <a:ext cx="2194560" cy="685800"/>
+          </a:xfrm>
+          <a:prstGeom prst="rect">
+            <a:avLst/>
+          </a:prstGeom>
+          <a:noFill/>
+          <a:ln/>
+        </p:spPr>
+        <p:txBody>
+          <a:bodyPr wrap="square" lIns="0" tIns="0" rIns="0" bIns="0" rtlCol="0" anchor="t"/>
+          <a:lstStyle/>
+          <a:p>
+            <a:pPr indent="0" marL="0">
+              <a:buNone/>
+            </a:pPr>
+            <a:r>
+              <a:rPr lang="en-US" sz="1900" b="1" dirty="0">
+                <a:solidFill>
+                  <a:schemeClr val="tx2"/>
+                </a:solidFill>
+              </a:rPr>
+              <a:t>Сколько заработали?</a:t>
+            </a:r>
+            <a:endParaRPr lang="en-US" sz="1900" dirty="0"/>
+          </a:p>
+        </p:txBody>
+      </p:sp>
+      <p:sp>
+        <p:nvSpPr>
+          <p:cNvPr id="22" name="Проблема 4 текст"/>
+          <p:cNvSpPr txBox="1"/>
+          <p:nvPr/>
+        </p:nvSpPr>
+        <p:spPr>
+          <a:xfrm>
+            <a:off x="9281160" y="3611880"/>
+            <a:ext cx="2148840" cy="1005840"/>
+          </a:xfrm>
+          <a:prstGeom prst="rect">
+            <a:avLst/>
+          </a:prstGeom>
+          <a:noFill/>
+          <a:ln/>
+        </p:spPr>
+        <p:txBody>
+          <a:bodyPr wrap="square" lIns="0" tIns="0" rIns="0" bIns="0" rtlCol="0" anchor="t"/>
+          <a:lstStyle/>
+          <a:p>
+            <a:pPr indent="0" marL="0">
+              <a:buNone/>
+            </a:pPr>
+            <a:r>
+              <a:rPr lang="en-US" sz="1400" dirty="0">
+                <a:solidFill>
+                  <a:schemeClr val="tx1"/>
+                </a:solidFill>
+              </a:rPr>
               <a:t>Выручку видно, а себестоимость и прибыль — нет</a:t>
             </a:r>
-            <a:endParaRPr lang="en-US" sz="1600" dirty="0"/>
-          </a:p>
-        </p:txBody>
-      </p:sp>
-      <p:sp>
-        <p:nvSpPr>
-          <p:cNvPr id="18" name="Вывод"/>
+            <a:endParaRPr lang="en-US" sz="1400" dirty="0"/>
+          </a:p>
+        </p:txBody>
+      </p:sp>
+      <p:sp>
+        <p:nvSpPr>
+          <p:cNvPr id="23" name="Вывод"/>
           <p:cNvSpPr txBox="1"/>
           <p:nvPr/>
         </p:nvSpPr>
@@ -2811,7 +4093,7 @@
                   <a:schemeClr val="accent1"/>
                 </a:solidFill>
               </a:rPr>
-              <a:t>ВольтМаркет решает все три проблемы</a:t>
+              <a:t>ВольтМаркет решает все четыре проблемы</a:t>
             </a:r>
             <a:endParaRPr lang="en-US" sz="2200" dirty="0"/>
           </a:p>
@@ -3117,7 +4399,7 @@
                   <a:schemeClr val="accent2"/>
                 </a:solidFill>
               </a:rPr>
-              <a:t>остаток, выручка и прибыль за месяц</a:t>
+              <a:t>остаток, резерв, выручка, прибыль и брони</a:t>
             </a:r>
             <a:endParaRPr lang="en-US" sz="2100" dirty="0"/>
           </a:p>
@@ -3231,11 +4513,11 @@
         <p:spPr>
           <a:xfrm>
             <a:off x="5824728" y="1527048"/>
-            <a:ext cx="5815584" cy="3628862"/>
+            <a:ext cx="5815584" cy="3614569"/>
           </a:xfrm>
           <a:prstGeom prst="roundRect">
             <a:avLst>
-              <a:gd name="adj" fmla="val 3024"/>
+              <a:gd name="adj" fmla="val 3036"/>
             </a:avLst>
           </a:prstGeom>
           <a:solidFill>
@@ -3258,7 +4540,7 @@
       </p:sp>
       <p:pic>
         <p:nvPicPr>
-          <p:cNvPr id="13" name="Рабочий стол" descr="C:\Study\University\Portfolio\3-course\SEM5\Projects\Project-1\_work\cheatsheets\src\img\ru_home.png">    </p:cNvPr>
+          <p:cNvPr id="13" name="Рабочий стол" descr="C:\Study\University\Repos\ProjectsControl\Project-1\_work\cheatsheets\src\img\ru_home.png">    </p:cNvPr>
           <p:cNvPicPr>
             <a:picLocks noChangeAspect="1"/>
           </p:cNvPicPr>
@@ -3273,7 +4555,7 @@
         <p:spPr>
           <a:xfrm>
             <a:off x="5897880" y="1600200"/>
-            <a:ext cx="5669280" cy="3482558"/>
+            <a:ext cx="5669280" cy="3468265"/>
           </a:xfrm>
           <a:prstGeom prst="rect">
             <a:avLst/>
@@ -3288,7 +4570,7 @@
         </p:nvSpPr>
         <p:spPr>
           <a:xfrm>
-            <a:off x="5897880" y="5265638"/>
+            <a:off x="5897880" y="5251345"/>
             <a:ext cx="5669280" cy="320040"/>
           </a:xfrm>
           <a:prstGeom prst="rect">
@@ -3433,11 +4715,11 @@
         <p:spPr>
           <a:xfrm>
             <a:off x="640080" y="1554480"/>
-            <a:ext cx="3474720" cy="2057400"/>
+            <a:ext cx="2606040" cy="2103120"/>
           </a:xfrm>
           <a:prstGeom prst="roundRect">
             <a:avLst>
-              <a:gd name="adj" fmla="val 6667"/>
+              <a:gd name="adj" fmla="val 6522"/>
             </a:avLst>
           </a:prstGeom>
           <a:solidFill>
@@ -3459,8 +4741,8 @@
         </p:nvSpPr>
         <p:spPr>
           <a:xfrm>
-            <a:off x="914400" y="1874520"/>
-            <a:ext cx="777240" cy="777240"/>
+            <a:off x="868680" y="1828800"/>
+            <a:ext cx="685800" cy="685800"/>
           </a:xfrm>
           <a:prstGeom prst="ellipse">
             <a:avLst/>
@@ -3492,8 +4774,8 @@
         </p:blipFill>
         <p:spPr>
           <a:xfrm>
-            <a:off x="1100938" y="2061058"/>
-            <a:ext cx="404165" cy="404165"/>
+            <a:off x="1033272" y="1993392"/>
+            <a:ext cx="356616" cy="356616"/>
           </a:xfrm>
           <a:prstGeom prst="rect">
             <a:avLst/>
@@ -3508,8 +4790,8 @@
         </p:nvSpPr>
         <p:spPr>
           <a:xfrm>
-            <a:off x="1874520" y="1874520"/>
-            <a:ext cx="2103120" cy="777240"/>
+            <a:off x="1664208" y="1828800"/>
+            <a:ext cx="1508760" cy="685800"/>
           </a:xfrm>
           <a:prstGeom prst="rect">
             <a:avLst/>
@@ -3525,14 +4807,14 @@
               <a:buNone/>
             </a:pPr>
             <a:r>
-              <a:rPr lang="en-US" sz="2000" b="1" dirty="0">
+              <a:rPr lang="en-US" sz="1700" b="1" dirty="0">
                 <a:solidFill>
                   <a:schemeClr val="tx2"/>
                 </a:solidFill>
               </a:rPr>
               <a:t>Каталог с фото</a:t>
             </a:r>
-            <a:endParaRPr lang="en-US" sz="2000" dirty="0"/>
+            <a:endParaRPr lang="en-US" sz="1700" dirty="0"/>
           </a:p>
         </p:txBody>
       </p:sp>
@@ -3544,8 +4826,8 @@
         </p:nvSpPr>
         <p:spPr>
           <a:xfrm>
-            <a:off x="914400" y="2788920"/>
-            <a:ext cx="2971800" cy="731520"/>
+            <a:off x="868680" y="2651760"/>
+            <a:ext cx="2240280" cy="868680"/>
           </a:xfrm>
           <a:prstGeom prst="rect">
             <a:avLst/>
@@ -3561,14 +4843,14 @@
               <a:buNone/>
             </a:pPr>
             <a:r>
-              <a:rPr lang="en-US" sz="1500" dirty="0">
+              <a:rPr lang="en-US" sz="1400" dirty="0">
                 <a:solidFill>
                   <a:schemeClr val="tx1"/>
                 </a:solidFill>
               </a:rPr>
-              <a:t>Карточка товара с фотографией, ценой и остатком</a:t>
-            </a:r>
-            <a:endParaRPr lang="en-US" sz="1500" dirty="0"/>
+              <a:t>Фото, цена, остаток и свободный остаток</a:t>
+            </a:r>
+            <a:endParaRPr lang="en-US" sz="1400" dirty="0"/>
           </a:p>
         </p:txBody>
       </p:sp>
@@ -3580,12 +4862,12 @@
         </p:nvSpPr>
         <p:spPr>
           <a:xfrm>
-            <a:off x="4389120" y="1554480"/>
-            <a:ext cx="3474720" cy="2057400"/>
+            <a:off x="3429000" y="1554480"/>
+            <a:ext cx="2606040" cy="2103120"/>
           </a:xfrm>
           <a:prstGeom prst="roundRect">
             <a:avLst>
-              <a:gd name="adj" fmla="val 6667"/>
+              <a:gd name="adj" fmla="val 6522"/>
             </a:avLst>
           </a:prstGeom>
           <a:solidFill>
@@ -3607,8 +4889,8 @@
         </p:nvSpPr>
         <p:spPr>
           <a:xfrm>
-            <a:off x="4663440" y="1874520"/>
-            <a:ext cx="777240" cy="777240"/>
+            <a:off x="3657600" y="1828800"/>
+            <a:ext cx="685800" cy="685800"/>
           </a:xfrm>
           <a:prstGeom prst="ellipse">
             <a:avLst/>
@@ -3640,8 +4922,8 @@
         </p:blipFill>
         <p:spPr>
           <a:xfrm>
-            <a:off x="4849978" y="2061058"/>
-            <a:ext cx="404165" cy="404165"/>
+            <a:off x="3822192" y="1993392"/>
+            <a:ext cx="356616" cy="356616"/>
           </a:xfrm>
           <a:prstGeom prst="rect">
             <a:avLst/>
@@ -3656,8 +4938,8 @@
         </p:nvSpPr>
         <p:spPr>
           <a:xfrm>
-            <a:off x="5623560" y="1874520"/>
-            <a:ext cx="2103120" cy="777240"/>
+            <a:off x="4453128" y="1828800"/>
+            <a:ext cx="1508760" cy="685800"/>
           </a:xfrm>
           <a:prstGeom prst="rect">
             <a:avLst/>
@@ -3673,14 +4955,14 @@
               <a:buNone/>
             </a:pPr>
             <a:r>
-              <a:rPr lang="en-US" sz="2000" b="1" dirty="0">
+              <a:rPr lang="en-US" sz="1700" b="1" dirty="0">
                 <a:solidFill>
                   <a:schemeClr val="tx2"/>
                 </a:solidFill>
               </a:rPr>
               <a:t>Цены с историей</a:t>
             </a:r>
-            <a:endParaRPr lang="en-US" sz="2000" dirty="0"/>
+            <a:endParaRPr lang="en-US" sz="1700" dirty="0"/>
           </a:p>
         </p:txBody>
       </p:sp>
@@ -3692,8 +4974,8 @@
         </p:nvSpPr>
         <p:spPr>
           <a:xfrm>
-            <a:off x="4663440" y="2788920"/>
-            <a:ext cx="2971800" cy="731520"/>
+            <a:off x="3657600" y="2651760"/>
+            <a:ext cx="2240280" cy="868680"/>
           </a:xfrm>
           <a:prstGeom prst="rect">
             <a:avLst/>
@@ -3709,14 +4991,14 @@
               <a:buNone/>
             </a:pPr>
             <a:r>
-              <a:rPr lang="en-US" sz="1500" dirty="0">
+              <a:rPr lang="en-US" sz="1400" dirty="0">
                 <a:solidFill>
                   <a:schemeClr val="tx1"/>
                 </a:solidFill>
               </a:rPr>
               <a:t>Новая цена с нужной даты, прежние сохраняются</a:t>
             </a:r>
-            <a:endParaRPr lang="en-US" sz="1500" dirty="0"/>
+            <a:endParaRPr lang="en-US" sz="1400" dirty="0"/>
           </a:p>
         </p:txBody>
       </p:sp>
@@ -3728,12 +5010,12 @@
         </p:nvSpPr>
         <p:spPr>
           <a:xfrm>
-            <a:off x="8138160" y="1554480"/>
-            <a:ext cx="3474720" cy="2057400"/>
+            <a:off x="6217920" y="1554480"/>
+            <a:ext cx="2606040" cy="2103120"/>
           </a:xfrm>
           <a:prstGeom prst="roundRect">
             <a:avLst>
-              <a:gd name="adj" fmla="val 6667"/>
+              <a:gd name="adj" fmla="val 6522"/>
             </a:avLst>
           </a:prstGeom>
           <a:solidFill>
@@ -3755,8 +5037,8 @@
         </p:nvSpPr>
         <p:spPr>
           <a:xfrm>
-            <a:off x="8412480" y="1874520"/>
-            <a:ext cx="777240" cy="777240"/>
+            <a:off x="6446520" y="1828800"/>
+            <a:ext cx="685800" cy="685800"/>
           </a:xfrm>
           <a:prstGeom prst="ellipse">
             <a:avLst/>
@@ -3788,8 +5070,8 @@
         </p:blipFill>
         <p:spPr>
           <a:xfrm>
-            <a:off x="8599018" y="2061058"/>
-            <a:ext cx="404165" cy="404165"/>
+            <a:off x="6611112" y="1993392"/>
+            <a:ext cx="356616" cy="356616"/>
           </a:xfrm>
           <a:prstGeom prst="rect">
             <a:avLst/>
@@ -3804,8 +5086,8 @@
         </p:nvSpPr>
         <p:spPr>
           <a:xfrm>
-            <a:off x="9372600" y="1874520"/>
-            <a:ext cx="2103120" cy="777240"/>
+            <a:off x="7242048" y="1828800"/>
+            <a:ext cx="1508760" cy="685800"/>
           </a:xfrm>
           <a:prstGeom prst="rect">
             <a:avLst/>
@@ -3821,14 +5103,14 @@
               <a:buNone/>
             </a:pPr>
             <a:r>
-              <a:rPr lang="en-US" sz="2000" b="1" dirty="0">
+              <a:rPr lang="en-US" sz="1700" b="1" dirty="0">
                 <a:solidFill>
                   <a:schemeClr val="tx2"/>
                 </a:solidFill>
               </a:rPr>
               <a:t>Поступления</a:t>
             </a:r>
-            <a:endParaRPr lang="en-US" sz="2000" dirty="0"/>
+            <a:endParaRPr lang="en-US" sz="1700" dirty="0"/>
           </a:p>
         </p:txBody>
       </p:sp>
@@ -3840,8 +5122,8 @@
         </p:nvSpPr>
         <p:spPr>
           <a:xfrm>
-            <a:off x="8412480" y="2788920"/>
-            <a:ext cx="2971800" cy="731520"/>
+            <a:off x="6446520" y="2651760"/>
+            <a:ext cx="2240280" cy="868680"/>
           </a:xfrm>
           <a:prstGeom prst="rect">
             <a:avLst/>
@@ -3857,14 +5139,14 @@
               <a:buNone/>
             </a:pPr>
             <a:r>
-              <a:rPr lang="en-US" sz="1500" dirty="0">
+              <a:rPr lang="en-US" sz="1400" dirty="0">
                 <a:solidFill>
                   <a:schemeClr val="tx1"/>
                 </a:solidFill>
               </a:rPr>
               <a:t>Приход от поставщика — остаток растёт сам</a:t>
             </a:r>
-            <a:endParaRPr lang="en-US" sz="1500" dirty="0"/>
+            <a:endParaRPr lang="en-US" sz="1400" dirty="0"/>
           </a:p>
         </p:txBody>
       </p:sp>
@@ -3876,12 +5158,12 @@
         </p:nvSpPr>
         <p:spPr>
           <a:xfrm>
-            <a:off x="640080" y="3886200"/>
-            <a:ext cx="3474720" cy="2057400"/>
+            <a:off x="9006840" y="1554480"/>
+            <a:ext cx="2606040" cy="2103120"/>
           </a:xfrm>
           <a:prstGeom prst="roundRect">
             <a:avLst>
-              <a:gd name="adj" fmla="val 6667"/>
+              <a:gd name="adj" fmla="val 6522"/>
             </a:avLst>
           </a:prstGeom>
           <a:solidFill>
@@ -3903,8 +5185,8 @@
         </p:nvSpPr>
         <p:spPr>
           <a:xfrm>
-            <a:off x="914400" y="4206240"/>
-            <a:ext cx="777240" cy="777240"/>
+            <a:off x="9235440" y="1828800"/>
+            <a:ext cx="685800" cy="685800"/>
           </a:xfrm>
           <a:prstGeom prst="ellipse">
             <a:avLst/>
@@ -3936,8 +5218,8 @@
         </p:blipFill>
         <p:spPr>
           <a:xfrm>
-            <a:off x="1100938" y="4392778"/>
-            <a:ext cx="404165" cy="404165"/>
+            <a:off x="9400032" y="1993392"/>
+            <a:ext cx="356616" cy="356616"/>
           </a:xfrm>
           <a:prstGeom prst="rect">
             <a:avLst/>
@@ -3952,8 +5234,8 @@
         </p:nvSpPr>
         <p:spPr>
           <a:xfrm>
-            <a:off x="1874520" y="4206240"/>
-            <a:ext cx="2103120" cy="777240"/>
+            <a:off x="10030968" y="1828800"/>
+            <a:ext cx="1508760" cy="685800"/>
           </a:xfrm>
           <a:prstGeom prst="rect">
             <a:avLst/>
@@ -3969,14 +5251,14 @@
               <a:buNone/>
             </a:pPr>
             <a:r>
-              <a:rPr lang="en-US" sz="2000" b="1" dirty="0">
+              <a:rPr lang="en-US" sz="1700" b="1" dirty="0">
                 <a:solidFill>
                   <a:schemeClr val="tx2"/>
                 </a:solidFill>
               </a:rPr>
               <a:t>Продажи</a:t>
             </a:r>
-            <a:endParaRPr lang="en-US" sz="2000" dirty="0"/>
+            <a:endParaRPr lang="en-US" sz="1700" dirty="0"/>
           </a:p>
         </p:txBody>
       </p:sp>
@@ -3988,8 +5270,8 @@
         </p:nvSpPr>
         <p:spPr>
           <a:xfrm>
-            <a:off x="914400" y="5120640"/>
-            <a:ext cx="2971800" cy="731520"/>
+            <a:off x="9235440" y="2651760"/>
+            <a:ext cx="2240280" cy="868680"/>
           </a:xfrm>
           <a:prstGeom prst="rect">
             <a:avLst/>
@@ -4005,14 +5287,14 @@
               <a:buNone/>
             </a:pPr>
             <a:r>
-              <a:rPr lang="en-US" sz="1500" dirty="0">
+              <a:rPr lang="en-US" sz="1400" dirty="0">
                 <a:solidFill>
                   <a:schemeClr val="tx1"/>
                 </a:solidFill>
               </a:rPr>
-              <a:t>Цена из прайса, контроль остатка, расчёт прибыли</a:t>
-            </a:r>
-            <a:endParaRPr lang="en-US" sz="1500" dirty="0"/>
+              <a:t>Цена из прайса, контроль остатка и прибыль</a:t>
+            </a:r>
+            <a:endParaRPr lang="en-US" sz="1400" dirty="0"/>
           </a:p>
         </p:txBody>
       </p:sp>
@@ -4024,12 +5306,12 @@
         </p:nvSpPr>
         <p:spPr>
           <a:xfrm>
-            <a:off x="4389120" y="3886200"/>
-            <a:ext cx="3474720" cy="2057400"/>
+            <a:off x="640080" y="3886200"/>
+            <a:ext cx="2606040" cy="2103120"/>
           </a:xfrm>
           <a:prstGeom prst="roundRect">
             <a:avLst>
-              <a:gd name="adj" fmla="val 6667"/>
+              <a:gd name="adj" fmla="val 6522"/>
             </a:avLst>
           </a:prstGeom>
           <a:solidFill>
@@ -4051,8 +5333,304 @@
         </p:nvSpPr>
         <p:spPr>
           <a:xfrm>
-            <a:off x="4663440" y="4206240"/>
-            <a:ext cx="777240" cy="777240"/>
+            <a:off x="868680" y="4160520"/>
+            <a:ext cx="685800" cy="685800"/>
+          </a:xfrm>
+          <a:prstGeom prst="ellipse">
+            <a:avLst/>
+          </a:prstGeom>
+          <a:solidFill>
+            <a:srgbClr val="FFB300"/>
+          </a:solidFill>
+          <a:ln w="12700">
+            <a:solidFill>
+              <a:srgbClr val="FFB300"/>
+            </a:solidFill>
+            <a:prstDash val="solid"/>
+          </a:ln>
+        </p:spPr>
+      </p:sp>
+      <p:pic>
+        <p:nvPicPr>
+          <p:cNvPr id="25" name="Возможность 5 иконка" descr="preencoded.png">    </p:cNvPr>
+          <p:cNvPicPr>
+            <a:picLocks noChangeAspect="1"/>
+          </p:cNvPicPr>
+          <p:nvPr/>
+        </p:nvPicPr>
+        <p:blipFill>
+          <a:blip r:embed="rId5"/>
+          <a:stretch>
+            <a:fillRect/>
+          </a:stretch>
+        </p:blipFill>
+        <p:spPr>
+          <a:xfrm>
+            <a:off x="1033272" y="4325112"/>
+            <a:ext cx="356616" cy="356616"/>
+          </a:xfrm>
+          <a:prstGeom prst="rect">
+            <a:avLst/>
+          </a:prstGeom>
+        </p:spPr>
+      </p:pic>
+      <p:sp>
+        <p:nvSpPr>
+          <p:cNvPr id="26" name="Возможность 5 заголовок"/>
+          <p:cNvSpPr txBox="1"/>
+          <p:nvPr/>
+        </p:nvSpPr>
+        <p:spPr>
+          <a:xfrm>
+            <a:off x="1664208" y="4160520"/>
+            <a:ext cx="1508760" cy="685800"/>
+          </a:xfrm>
+          <a:prstGeom prst="rect">
+            <a:avLst/>
+          </a:prstGeom>
+          <a:noFill/>
+          <a:ln/>
+        </p:spPr>
+        <p:txBody>
+          <a:bodyPr wrap="square" lIns="0" tIns="0" rIns="0" bIns="0" rtlCol="0" anchor="ctr"/>
+          <a:lstStyle/>
+          <a:p>
+            <a:pPr indent="0" marL="0">
+              <a:buNone/>
+            </a:pPr>
+            <a:r>
+              <a:rPr lang="en-US" sz="1700" b="1" dirty="0">
+                <a:solidFill>
+                  <a:schemeClr val="tx2"/>
+                </a:solidFill>
+              </a:rPr>
+              <a:t>Бронирование</a:t>
+            </a:r>
+            <a:endParaRPr lang="en-US" sz="1700" dirty="0"/>
+          </a:p>
+        </p:txBody>
+      </p:sp>
+      <p:sp>
+        <p:nvSpPr>
+          <p:cNvPr id="27" name="Возможность 5 текст"/>
+          <p:cNvSpPr txBox="1"/>
+          <p:nvPr/>
+        </p:nvSpPr>
+        <p:spPr>
+          <a:xfrm>
+            <a:off x="868680" y="4983480"/>
+            <a:ext cx="2240280" cy="868680"/>
+          </a:xfrm>
+          <a:prstGeom prst="rect">
+            <a:avLst/>
+          </a:prstGeom>
+          <a:noFill/>
+          <a:ln/>
+        </p:spPr>
+        <p:txBody>
+          <a:bodyPr wrap="square" lIns="0" tIns="0" rIns="0" bIns="0" rtlCol="0" anchor="t"/>
+          <a:lstStyle/>
+          <a:p>
+            <a:pPr indent="0" marL="0">
+              <a:buNone/>
+            </a:pPr>
+            <a:r>
+              <a:rPr lang="en-US" sz="1400" dirty="0">
+                <a:solidFill>
+                  <a:schemeClr val="tx1"/>
+                </a:solidFill>
+              </a:rPr>
+              <a:t>Товар отложен за покупателем до выкупа</a:t>
+            </a:r>
+            <a:endParaRPr lang="en-US" sz="1400" dirty="0"/>
+          </a:p>
+        </p:txBody>
+      </p:sp>
+      <p:sp>
+        <p:nvSpPr>
+          <p:cNvPr id="28" name="Возможность 6"/>
+          <p:cNvSpPr/>
+          <p:nvPr/>
+        </p:nvSpPr>
+        <p:spPr>
+          <a:xfrm>
+            <a:off x="3429000" y="3886200"/>
+            <a:ext cx="2606040" cy="2103120"/>
+          </a:xfrm>
+          <a:prstGeom prst="roundRect">
+            <a:avLst>
+              <a:gd name="adj" fmla="val 6522"/>
+            </a:avLst>
+          </a:prstGeom>
+          <a:solidFill>
+            <a:schemeClr val="bg2"/>
+          </a:solidFill>
+          <a:ln w="12700">
+            <a:solidFill>
+              <a:schemeClr val="bg2"/>
+            </a:solidFill>
+            <a:prstDash val="solid"/>
+          </a:ln>
+        </p:spPr>
+      </p:sp>
+      <p:sp>
+        <p:nvSpPr>
+          <p:cNvPr id="29" name="Возможность 6 круг"/>
+          <p:cNvSpPr/>
+          <p:nvPr/>
+        </p:nvSpPr>
+        <p:spPr>
+          <a:xfrm>
+            <a:off x="3657600" y="4160520"/>
+            <a:ext cx="685800" cy="685800"/>
+          </a:xfrm>
+          <a:prstGeom prst="ellipse">
+            <a:avLst/>
+          </a:prstGeom>
+          <a:solidFill>
+            <a:srgbClr val="FFB300"/>
+          </a:solidFill>
+          <a:ln w="12700">
+            <a:solidFill>
+              <a:srgbClr val="FFB300"/>
+            </a:solidFill>
+            <a:prstDash val="solid"/>
+          </a:ln>
+        </p:spPr>
+      </p:sp>
+      <p:pic>
+        <p:nvPicPr>
+          <p:cNvPr id="30" name="Возможность 6 иконка" descr="preencoded.png">    </p:cNvPr>
+          <p:cNvPicPr>
+            <a:picLocks noChangeAspect="1"/>
+          </p:cNvPicPr>
+          <p:nvPr/>
+        </p:nvPicPr>
+        <p:blipFill>
+          <a:blip r:embed="rId6"/>
+          <a:stretch>
+            <a:fillRect/>
+          </a:stretch>
+        </p:blipFill>
+        <p:spPr>
+          <a:xfrm>
+            <a:off x="3822192" y="4325112"/>
+            <a:ext cx="356616" cy="356616"/>
+          </a:xfrm>
+          <a:prstGeom prst="rect">
+            <a:avLst/>
+          </a:prstGeom>
+        </p:spPr>
+      </p:pic>
+      <p:sp>
+        <p:nvSpPr>
+          <p:cNvPr id="31" name="Возможность 6 заголовок"/>
+          <p:cNvSpPr txBox="1"/>
+          <p:nvPr/>
+        </p:nvSpPr>
+        <p:spPr>
+          <a:xfrm>
+            <a:off x="4453128" y="4160520"/>
+            <a:ext cx="1508760" cy="685800"/>
+          </a:xfrm>
+          <a:prstGeom prst="rect">
+            <a:avLst/>
+          </a:prstGeom>
+          <a:noFill/>
+          <a:ln/>
+        </p:spPr>
+        <p:txBody>
+          <a:bodyPr wrap="square" lIns="0" tIns="0" rIns="0" bIns="0" rtlCol="0" anchor="ctr"/>
+          <a:lstStyle/>
+          <a:p>
+            <a:pPr indent="0" marL="0">
+              <a:buNone/>
+            </a:pPr>
+            <a:r>
+              <a:rPr lang="en-US" sz="1700" b="1" dirty="0">
+                <a:solidFill>
+                  <a:schemeClr val="tx2"/>
+                </a:solidFill>
+              </a:rPr>
+              <a:t>Быстрый ввод</a:t>
+            </a:r>
+            <a:endParaRPr lang="en-US" sz="1700" dirty="0"/>
+          </a:p>
+        </p:txBody>
+      </p:sp>
+      <p:sp>
+        <p:nvSpPr>
+          <p:cNvPr id="32" name="Возможность 6 текст"/>
+          <p:cNvSpPr txBox="1"/>
+          <p:nvPr/>
+        </p:nvSpPr>
+        <p:spPr>
+          <a:xfrm>
+            <a:off x="3657600" y="4983480"/>
+            <a:ext cx="2240280" cy="868680"/>
+          </a:xfrm>
+          <a:prstGeom prst="rect">
+            <a:avLst/>
+          </a:prstGeom>
+          <a:noFill/>
+          <a:ln/>
+        </p:spPr>
+        <p:txBody>
+          <a:bodyPr wrap="square" lIns="0" tIns="0" rIns="0" bIns="0" rtlCol="0" anchor="t"/>
+          <a:lstStyle/>
+          <a:p>
+            <a:pPr indent="0" marL="0">
+              <a:buNone/>
+            </a:pPr>
+            <a:r>
+              <a:rPr lang="en-US" sz="1400" dirty="0">
+                <a:solidFill>
+                  <a:schemeClr val="tx1"/>
+                </a:solidFill>
+              </a:rPr>
+              <a:t>Подбор товаров и добавление по артикулу</a:t>
+            </a:r>
+            <a:endParaRPr lang="en-US" sz="1400" dirty="0"/>
+          </a:p>
+        </p:txBody>
+      </p:sp>
+      <p:sp>
+        <p:nvSpPr>
+          <p:cNvPr id="33" name="Возможность 7"/>
+          <p:cNvSpPr/>
+          <p:nvPr/>
+        </p:nvSpPr>
+        <p:spPr>
+          <a:xfrm>
+            <a:off x="6217920" y="3886200"/>
+            <a:ext cx="2606040" cy="2103120"/>
+          </a:xfrm>
+          <a:prstGeom prst="roundRect">
+            <a:avLst>
+              <a:gd name="adj" fmla="val 6522"/>
+            </a:avLst>
+          </a:prstGeom>
+          <a:solidFill>
+            <a:schemeClr val="bg2"/>
+          </a:solidFill>
+          <a:ln w="12700">
+            <a:solidFill>
+              <a:schemeClr val="bg2"/>
+            </a:solidFill>
+            <a:prstDash val="solid"/>
+          </a:ln>
+        </p:spPr>
+      </p:sp>
+      <p:sp>
+        <p:nvSpPr>
+          <p:cNvPr id="34" name="Возможность 7 круг"/>
+          <p:cNvSpPr/>
+          <p:nvPr/>
+        </p:nvSpPr>
+        <p:spPr>
+          <a:xfrm>
+            <a:off x="6446520" y="4160520"/>
+            <a:ext cx="685800" cy="685800"/>
           </a:xfrm>
           <a:prstGeom prst="ellipse">
             <a:avLst/>
@@ -4070,22 +5648,22 @@
       </p:sp>
       <p:pic>
         <p:nvPicPr>
-          <p:cNvPr id="25" name="Возможность 5 иконка" descr="preencoded.png">    </p:cNvPr>
+          <p:cNvPr id="35" name="Возможность 7 иконка" descr="preencoded.png">    </p:cNvPr>
           <p:cNvPicPr>
             <a:picLocks noChangeAspect="1"/>
           </p:cNvPicPr>
           <p:nvPr/>
         </p:nvPicPr>
         <p:blipFill>
-          <a:blip r:embed="rId5"/>
+          <a:blip r:embed="rId7"/>
           <a:stretch>
             <a:fillRect/>
           </a:stretch>
         </p:blipFill>
         <p:spPr>
           <a:xfrm>
-            <a:off x="4849978" y="4392778"/>
-            <a:ext cx="404165" cy="404165"/>
+            <a:off x="6611112" y="4325112"/>
+            <a:ext cx="356616" cy="356616"/>
           </a:xfrm>
           <a:prstGeom prst="rect">
             <a:avLst/>
@@ -4094,14 +5672,14 @@
       </p:pic>
       <p:sp>
         <p:nvSpPr>
-          <p:cNvPr id="26" name="Возможность 5 заголовок"/>
+          <p:cNvPr id="36" name="Возможность 7 заголовок"/>
           <p:cNvSpPr txBox="1"/>
           <p:nvPr/>
         </p:nvSpPr>
         <p:spPr>
           <a:xfrm>
-            <a:off x="5623560" y="4206240"/>
-            <a:ext cx="2103120" cy="777240"/>
+            <a:off x="7242048" y="4160520"/>
+            <a:ext cx="1508760" cy="685800"/>
           </a:xfrm>
           <a:prstGeom prst="rect">
             <a:avLst/>
@@ -4117,27 +5695,27 @@
               <a:buNone/>
             </a:pPr>
             <a:r>
-              <a:rPr lang="en-US" sz="2000" b="1" dirty="0">
+              <a:rPr lang="en-US" sz="1700" b="1" dirty="0">
                 <a:solidFill>
                   <a:schemeClr val="tx2"/>
                 </a:solidFill>
               </a:rPr>
               <a:t>Отчёты</a:t>
             </a:r>
-            <a:endParaRPr lang="en-US" sz="2000" dirty="0"/>
-          </a:p>
-        </p:txBody>
-      </p:sp>
-      <p:sp>
-        <p:nvSpPr>
-          <p:cNvPr id="27" name="Возможность 5 текст"/>
+            <a:endParaRPr lang="en-US" sz="1700" dirty="0"/>
+          </a:p>
+        </p:txBody>
+      </p:sp>
+      <p:sp>
+        <p:nvSpPr>
+          <p:cNvPr id="37" name="Возможность 7 текст"/>
           <p:cNvSpPr txBox="1"/>
           <p:nvPr/>
         </p:nvSpPr>
         <p:spPr>
           <a:xfrm>
-            <a:off x="4663440" y="5120640"/>
-            <a:ext cx="2971800" cy="731520"/>
+            <a:off x="6446520" y="4983480"/>
+            <a:ext cx="2240280" cy="868680"/>
           </a:xfrm>
           <a:prstGeom prst="rect">
             <a:avLst/>
@@ -4153,31 +5731,31 @@
               <a:buNone/>
             </a:pPr>
             <a:r>
-              <a:rPr lang="en-US" sz="1500" dirty="0">
+              <a:rPr lang="en-US" sz="1400" dirty="0">
                 <a:solidFill>
                   <a:schemeClr val="tx1"/>
                 </a:solidFill>
               </a:rPr>
-              <a:t>Остатки по группам и анализ продаж за период</a:t>
-            </a:r>
-            <a:endParaRPr lang="en-US" sz="1500" dirty="0"/>
-          </a:p>
-        </p:txBody>
-      </p:sp>
-      <p:sp>
-        <p:nvSpPr>
-          <p:cNvPr id="28" name="Возможность 6"/>
+              <a:t>Остатки, резерв, продажи и брони</a:t>
+            </a:r>
+            <a:endParaRPr lang="en-US" sz="1400" dirty="0"/>
+          </a:p>
+        </p:txBody>
+      </p:sp>
+      <p:sp>
+        <p:nvSpPr>
+          <p:cNvPr id="38" name="Возможность 8"/>
           <p:cNvSpPr/>
           <p:nvPr/>
         </p:nvSpPr>
         <p:spPr>
           <a:xfrm>
-            <a:off x="8138160" y="3886200"/>
-            <a:ext cx="3474720" cy="2057400"/>
+            <a:off x="9006840" y="3886200"/>
+            <a:ext cx="2606040" cy="2103120"/>
           </a:xfrm>
           <a:prstGeom prst="roundRect">
             <a:avLst>
-              <a:gd name="adj" fmla="val 6667"/>
+              <a:gd name="adj" fmla="val 6522"/>
             </a:avLst>
           </a:prstGeom>
           <a:solidFill>
@@ -4193,14 +5771,14 @@
       </p:sp>
       <p:sp>
         <p:nvSpPr>
-          <p:cNvPr id="29" name="Возможность 6 круг"/>
+          <p:cNvPr id="39" name="Возможность 8 круг"/>
           <p:cNvSpPr/>
           <p:nvPr/>
         </p:nvSpPr>
         <p:spPr>
           <a:xfrm>
-            <a:off x="8412480" y="4206240"/>
-            <a:ext cx="777240" cy="777240"/>
+            <a:off x="9235440" y="4160520"/>
+            <a:ext cx="685800" cy="685800"/>
           </a:xfrm>
           <a:prstGeom prst="ellipse">
             <a:avLst/>
@@ -4218,22 +5796,22 @@
       </p:sp>
       <p:pic>
         <p:nvPicPr>
-          <p:cNvPr id="30" name="Возможность 6 иконка" descr="preencoded.png">    </p:cNvPr>
+          <p:cNvPr id="40" name="Возможность 8 иконка" descr="preencoded.png">    </p:cNvPr>
           <p:cNvPicPr>
             <a:picLocks noChangeAspect="1"/>
           </p:cNvPicPr>
           <p:nvPr/>
         </p:nvPicPr>
         <p:blipFill>
-          <a:blip r:embed="rId6"/>
+          <a:blip r:embed="rId8"/>
           <a:stretch>
             <a:fillRect/>
           </a:stretch>
         </p:blipFill>
         <p:spPr>
           <a:xfrm>
-            <a:off x="8599018" y="4392778"/>
-            <a:ext cx="404165" cy="404165"/>
+            <a:off x="9400032" y="4325112"/>
+            <a:ext cx="356616" cy="356616"/>
           </a:xfrm>
           <a:prstGeom prst="rect">
             <a:avLst/>
@@ -4242,14 +5820,14 @@
       </p:pic>
       <p:sp>
         <p:nvSpPr>
-          <p:cNvPr id="31" name="Возможность 6 заголовок"/>
+          <p:cNvPr id="41" name="Возможность 8 заголовок"/>
           <p:cNvSpPr txBox="1"/>
           <p:nvPr/>
         </p:nvSpPr>
         <p:spPr>
           <a:xfrm>
-            <a:off x="9372600" y="4206240"/>
-            <a:ext cx="2103120" cy="777240"/>
+            <a:off x="10030968" y="4160520"/>
+            <a:ext cx="1508760" cy="685800"/>
           </a:xfrm>
           <a:prstGeom prst="rect">
             <a:avLst/>
@@ -4265,27 +5843,27 @@
               <a:buNone/>
             </a:pPr>
             <a:r>
-              <a:rPr lang="en-US" sz="2000" b="1" dirty="0">
+              <a:rPr lang="en-US" sz="1700" b="1" dirty="0">
                 <a:solidFill>
                   <a:schemeClr val="tx2"/>
                 </a:solidFill>
               </a:rPr>
-              <a:t>Накладные</a:t>
-            </a:r>
-            <a:endParaRPr lang="en-US" sz="2000" dirty="0"/>
-          </a:p>
-        </p:txBody>
-      </p:sp>
-      <p:sp>
-        <p:nvSpPr>
-          <p:cNvPr id="32" name="Возможность 6 текст"/>
+              <a:t>Печать</a:t>
+            </a:r>
+            <a:endParaRPr lang="en-US" sz="1700" dirty="0"/>
+          </a:p>
+        </p:txBody>
+      </p:sp>
+      <p:sp>
+        <p:nvSpPr>
+          <p:cNvPr id="42" name="Возможность 8 текст"/>
           <p:cNvSpPr txBox="1"/>
           <p:nvPr/>
         </p:nvSpPr>
         <p:spPr>
           <a:xfrm>
-            <a:off x="8412480" y="5120640"/>
-            <a:ext cx="2971800" cy="731520"/>
+            <a:off x="9235440" y="4983480"/>
+            <a:ext cx="2240280" cy="868680"/>
           </a:xfrm>
           <a:prstGeom prst="rect">
             <a:avLst/>
@@ -4301,14 +5879,50 @@
               <a:buNone/>
             </a:pPr>
             <a:r>
-              <a:rPr lang="en-US" sz="1500" dirty="0">
+              <a:rPr lang="en-US" sz="1400" dirty="0">
                 <a:solidFill>
                   <a:schemeClr val="tx1"/>
                 </a:solidFill>
               </a:rPr>
-              <a:t>Печать в фирменном стиле одной кнопкой</a:t>
-            </a:r>
-            <a:endParaRPr lang="en-US" sz="1500" dirty="0"/>
+              <a:t>Накладные и бланк брони одной кнопкой</a:t>
+            </a:r>
+            <a:endParaRPr lang="en-US" sz="1400" dirty="0"/>
+          </a:p>
+        </p:txBody>
+      </p:sp>
+      <p:sp>
+        <p:nvSpPr>
+          <p:cNvPr id="43" name="Новое"/>
+          <p:cNvSpPr txBox="1"/>
+          <p:nvPr/>
+        </p:nvSpPr>
+        <p:spPr>
+          <a:xfrm>
+            <a:off x="6217920" y="5989320"/>
+            <a:ext cx="5349240" cy="274320"/>
+          </a:xfrm>
+          <a:prstGeom prst="rect">
+            <a:avLst/>
+          </a:prstGeom>
+          <a:noFill/>
+          <a:ln/>
+        </p:spPr>
+        <p:txBody>
+          <a:bodyPr wrap="square" lIns="0" tIns="0" rIns="0" bIns="0" rtlCol="0" anchor="ctr"/>
+          <a:lstStyle/>
+          <a:p>
+            <a:pPr algn="r" indent="0" marL="0">
+              <a:buNone/>
+            </a:pPr>
+            <a:r>
+              <a:rPr lang="en-US" sz="1200" b="1" dirty="0">
+                <a:solidFill>
+                  <a:schemeClr val="accent3"/>
+                </a:solidFill>
+              </a:rPr>
+              <a:t>Новое в версии 1.1</a:t>
+            </a:r>
+            <a:endParaRPr lang="en-US" sz="1200" dirty="0"/>
           </a:p>
         </p:txBody>
       </p:sp>
@@ -4526,11 +6140,11 @@
         <p:spPr>
           <a:xfrm>
             <a:off x="640080" y="2441448"/>
-            <a:ext cx="3438144" cy="2168434"/>
+            <a:ext cx="3438144" cy="2160136"/>
           </a:xfrm>
           <a:prstGeom prst="roundRect">
             <a:avLst>
-              <a:gd name="adj" fmla="val 5060"/>
+              <a:gd name="adj" fmla="val 5080"/>
             </a:avLst>
           </a:prstGeom>
           <a:solidFill>
@@ -4553,7 +6167,7 @@
       </p:sp>
       <p:pic>
         <p:nvPicPr>
-          <p:cNvPr id="7" name="Шаг 1 скриншот" descr="C:\Study\University\Portfolio\3-course\SEM5\Projects\Project-1\_work\cheatsheets\src\img\ru_receipt.png">    </p:cNvPr>
+          <p:cNvPr id="7" name="Шаг 1 скриншот" descr="C:\Study\University\Repos\ProjectsControl\Project-1\_work\cheatsheets\src\img\ru_receipt.png">    </p:cNvPr>
           <p:cNvPicPr>
             <a:picLocks noChangeAspect="1"/>
           </p:cNvPicPr>
@@ -4568,7 +6182,7 @@
         <p:spPr>
           <a:xfrm>
             <a:off x="713232" y="2514600"/>
-            <a:ext cx="3291840" cy="2022130"/>
+            <a:ext cx="3291840" cy="2013832"/>
           </a:xfrm>
           <a:prstGeom prst="rect">
             <a:avLst/>
@@ -4583,7 +6197,7 @@
         </p:nvSpPr>
         <p:spPr>
           <a:xfrm>
-            <a:off x="640080" y="4811050"/>
+            <a:off x="640080" y="4802752"/>
             <a:ext cx="3474720" cy="457200"/>
           </a:xfrm>
           <a:prstGeom prst="rect">
@@ -4741,11 +6355,11 @@
         <p:spPr>
           <a:xfrm>
             <a:off x="4434840" y="2441448"/>
-            <a:ext cx="3438144" cy="2168434"/>
+            <a:ext cx="3438144" cy="2160136"/>
           </a:xfrm>
           <a:prstGeom prst="roundRect">
             <a:avLst>
-              <a:gd name="adj" fmla="val 5060"/>
+              <a:gd name="adj" fmla="val 5080"/>
             </a:avLst>
           </a:prstGeom>
           <a:solidFill>
@@ -4768,7 +6382,7 @@
       </p:sp>
       <p:pic>
         <p:nvPicPr>
-          <p:cNvPr id="14" name="Шаг 2 скриншот" descr="C:\Study\University\Portfolio\3-course\SEM5\Projects\Project-1\_work\cheatsheets\src\img\ru_sale.png">    </p:cNvPr>
+          <p:cNvPr id="14" name="Шаг 2 скриншот" descr="C:\Study\University\Repos\ProjectsControl\Project-1\_work\cheatsheets\src\img\ru_sale.png">    </p:cNvPr>
           <p:cNvPicPr>
             <a:picLocks noChangeAspect="1"/>
           </p:cNvPicPr>
@@ -4783,7 +6397,7 @@
         <p:spPr>
           <a:xfrm>
             <a:off x="4507992" y="2514600"/>
-            <a:ext cx="3291840" cy="2022130"/>
+            <a:ext cx="3291840" cy="2013832"/>
           </a:xfrm>
           <a:prstGeom prst="rect">
             <a:avLst/>
@@ -4798,7 +6412,7 @@
         </p:nvSpPr>
         <p:spPr>
           <a:xfrm>
-            <a:off x="4434840" y="4811050"/>
+            <a:off x="4434840" y="4802752"/>
             <a:ext cx="3474720" cy="457200"/>
           </a:xfrm>
           <a:prstGeom prst="rect">
@@ -4820,7 +6434,7 @@
                   <a:schemeClr val="tx1"/>
                 </a:solidFill>
               </a:rPr>
-              <a:t>Цена уже заполнена, остаток виден</a:t>
+              <a:t>Цена уже заполнена, фото и свободный остаток видны</a:t>
             </a:r>
             <a:endParaRPr lang="en-US" sz="1600" dirty="0"/>
           </a:p>
@@ -4956,11 +6570,11 @@
         <p:spPr>
           <a:xfrm>
             <a:off x="8229600" y="2441448"/>
-            <a:ext cx="3438144" cy="2168434"/>
+            <a:ext cx="3438144" cy="2160136"/>
           </a:xfrm>
           <a:prstGeom prst="roundRect">
             <a:avLst>
-              <a:gd name="adj" fmla="val 5060"/>
+              <a:gd name="adj" fmla="val 5080"/>
             </a:avLst>
           </a:prstGeom>
           <a:solidFill>
@@ -4983,7 +6597,7 @@
       </p:sp>
       <p:pic>
         <p:nvPicPr>
-          <p:cNvPr id="21" name="Шаг 3 скриншот" descr="C:\Study\University\Portfolio\3-course\SEM5\Projects\Project-1\_work\cheatsheets\src\img\ru_report_sales.png">    </p:cNvPr>
+          <p:cNvPr id="21" name="Шаг 3 скриншот" descr="C:\Study\University\Repos\ProjectsControl\Project-1\_work\cheatsheets\src\img\ru_report_sales.png">    </p:cNvPr>
           <p:cNvPicPr>
             <a:picLocks noChangeAspect="1"/>
           </p:cNvPicPr>
@@ -4998,7 +6612,7 @@
         <p:spPr>
           <a:xfrm>
             <a:off x="8302752" y="2514600"/>
-            <a:ext cx="3291840" cy="2022130"/>
+            <a:ext cx="3291840" cy="2013832"/>
           </a:xfrm>
           <a:prstGeom prst="rect">
             <a:avLst/>
@@ -5013,7 +6627,7 @@
         </p:nvSpPr>
         <p:spPr>
           <a:xfrm>
-            <a:off x="8229600" y="4811050"/>
+            <a:off x="8229600" y="4802752"/>
             <a:ext cx="3474720" cy="457200"/>
           </a:xfrm>
           <a:prstGeom prst="rect">
@@ -5140,10 +6754,10 @@
             <a:r>
               <a:rPr lang="en-US" sz="3600" b="1" dirty="0">
                 <a:solidFill>
-                  <a:schemeClr val="tx2"/>
-                </a:solidFill>
-              </a:rPr>
-              <a:t>Товар видно с первого взгляда</a:t>
+                  <a:schemeClr val="bg1"/>
+                </a:solidFill>
+              </a:rPr>
+              <a:t>Бронь: товар ждёт своего покупателя</a:t>
             </a:r>
             <a:endParaRPr lang="en-US" sz="3600" dirty="0"/>
           </a:p>
@@ -5151,18 +6765,351 @@
       </p:sp>
       <p:sp>
         <p:nvSpPr>
-          <p:cNvPr id="3" name="Карточка товара рамка"/>
+          <p:cNvPr id="3" name="Бронь 1 круг"/>
           <p:cNvSpPr/>
           <p:nvPr/>
         </p:nvSpPr>
         <p:spPr>
           <a:xfrm>
-            <a:off x="640080" y="1527048"/>
-            <a:ext cx="6089904" cy="3797373"/>
+            <a:off x="640080" y="1645920"/>
+            <a:ext cx="777240" cy="777240"/>
+          </a:xfrm>
+          <a:prstGeom prst="ellipse">
+            <a:avLst/>
+          </a:prstGeom>
+          <a:solidFill>
+            <a:srgbClr val="FFB300"/>
+          </a:solidFill>
+          <a:ln w="12700">
+            <a:solidFill>
+              <a:srgbClr val="FFB300"/>
+            </a:solidFill>
+            <a:prstDash val="solid"/>
+          </a:ln>
+        </p:spPr>
+      </p:sp>
+      <p:pic>
+        <p:nvPicPr>
+          <p:cNvPr id="4" name="Бронь 1 иконка" descr="preencoded.png">    </p:cNvPr>
+          <p:cNvPicPr>
+            <a:picLocks noChangeAspect="1"/>
+          </p:cNvPicPr>
+          <p:nvPr/>
+        </p:nvPicPr>
+        <p:blipFill>
+          <a:blip r:embed="rId1"/>
+          <a:stretch>
+            <a:fillRect/>
+          </a:stretch>
+        </p:blipFill>
+        <p:spPr>
+          <a:xfrm>
+            <a:off x="826618" y="1832458"/>
+            <a:ext cx="404165" cy="404165"/>
+          </a:xfrm>
+          <a:prstGeom prst="rect">
+            <a:avLst/>
+          </a:prstGeom>
+        </p:spPr>
+      </p:pic>
+      <p:sp>
+        <p:nvSpPr>
+          <p:cNvPr id="5" name="Бронь 1 текст"/>
+          <p:cNvSpPr txBox="1"/>
+          <p:nvPr/>
+        </p:nvSpPr>
+        <p:spPr>
+          <a:xfrm>
+            <a:off x="1600200" y="1600200"/>
+            <a:ext cx="4023360" cy="914400"/>
+          </a:xfrm>
+          <a:prstGeom prst="rect">
+            <a:avLst/>
+          </a:prstGeom>
+          <a:noFill/>
+          <a:ln/>
+        </p:spPr>
+        <p:txBody>
+          <a:bodyPr wrap="square" lIns="0" tIns="0" rIns="0" bIns="0" rtlCol="0" anchor="ctr"/>
+          <a:lstStyle/>
+          <a:p>
+            <a:pPr indent="0" marL="0">
+              <a:buNone/>
+            </a:pPr>
+            <a:r>
+              <a:rPr lang="en-US" sz="2100" b="1" dirty="0">
+                <a:solidFill>
+                  <a:schemeClr val="bg1"/>
+                </a:solidFill>
+              </a:rPr>
+              <a:t>Забронировали</a:t>
+            </a:r>
+            <a:endParaRPr lang="en-US" sz="2100" dirty="0"/>
+          </a:p>
+          <a:p>
+            <a:pPr indent="0" marL="0">
+              <a:buNone/>
+            </a:pPr>
+            <a:r>
+              <a:rPr lang="en-US" sz="1500" dirty="0">
+                <a:solidFill>
+                  <a:schemeClr val="accent2"/>
+                </a:solidFill>
+              </a:rPr>
+              <a:t>товар ушёл из свободного остатка — другому его не продать</a:t>
+            </a:r>
+            <a:endParaRPr lang="en-US" sz="2100" dirty="0"/>
+          </a:p>
+        </p:txBody>
+      </p:sp>
+      <p:sp>
+        <p:nvSpPr>
+          <p:cNvPr id="6" name="Бронь 2 круг"/>
+          <p:cNvSpPr/>
+          <p:nvPr/>
+        </p:nvSpPr>
+        <p:spPr>
+          <a:xfrm>
+            <a:off x="640080" y="2971800"/>
+            <a:ext cx="777240" cy="777240"/>
+          </a:xfrm>
+          <a:prstGeom prst="ellipse">
+            <a:avLst/>
+          </a:prstGeom>
+          <a:solidFill>
+            <a:srgbClr val="FFFFFF"/>
+          </a:solidFill>
+          <a:ln w="12700">
+            <a:solidFill>
+              <a:srgbClr val="FFFFFF"/>
+            </a:solidFill>
+            <a:prstDash val="solid"/>
+          </a:ln>
+        </p:spPr>
+      </p:sp>
+      <p:pic>
+        <p:nvPicPr>
+          <p:cNvPr id="7" name="Бронь 2 иконка" descr="preencoded.png">    </p:cNvPr>
+          <p:cNvPicPr>
+            <a:picLocks noChangeAspect="1"/>
+          </p:cNvPicPr>
+          <p:nvPr/>
+        </p:nvPicPr>
+        <p:blipFill>
+          <a:blip r:embed="rId2"/>
+          <a:stretch>
+            <a:fillRect/>
+          </a:stretch>
+        </p:blipFill>
+        <p:spPr>
+          <a:xfrm>
+            <a:off x="826618" y="3158338"/>
+            <a:ext cx="404165" cy="404165"/>
+          </a:xfrm>
+          <a:prstGeom prst="rect">
+            <a:avLst/>
+          </a:prstGeom>
+        </p:spPr>
+      </p:pic>
+      <p:sp>
+        <p:nvSpPr>
+          <p:cNvPr id="8" name="Бронь 2 текст"/>
+          <p:cNvSpPr txBox="1"/>
+          <p:nvPr/>
+        </p:nvSpPr>
+        <p:spPr>
+          <a:xfrm>
+            <a:off x="1600200" y="2926080"/>
+            <a:ext cx="4023360" cy="914400"/>
+          </a:xfrm>
+          <a:prstGeom prst="rect">
+            <a:avLst/>
+          </a:prstGeom>
+          <a:noFill/>
+          <a:ln/>
+        </p:spPr>
+        <p:txBody>
+          <a:bodyPr wrap="square" lIns="0" tIns="0" rIns="0" bIns="0" rtlCol="0" anchor="ctr"/>
+          <a:lstStyle/>
+          <a:p>
+            <a:pPr indent="0" marL="0">
+              <a:buNone/>
+            </a:pPr>
+            <a:r>
+              <a:rPr lang="en-US" sz="2100" b="1" dirty="0">
+                <a:solidFill>
+                  <a:schemeClr val="bg1"/>
+                </a:solidFill>
+              </a:rPr>
+              <a:t>Продали по брони</a:t>
+            </a:r>
+            <a:endParaRPr lang="en-US" sz="2100" dirty="0"/>
+          </a:p>
+          <a:p>
+            <a:pPr indent="0" marL="0">
+              <a:buNone/>
+            </a:pPr>
+            <a:r>
+              <a:rPr lang="en-US" sz="1500" dirty="0">
+                <a:solidFill>
+                  <a:schemeClr val="accent2"/>
+                </a:solidFill>
+              </a:rPr>
+              <a:t>продажа заполняется из брони, товар списан со склада</a:t>
+            </a:r>
+            <a:endParaRPr lang="en-US" sz="2100" dirty="0"/>
+          </a:p>
+        </p:txBody>
+      </p:sp>
+      <p:sp>
+        <p:nvSpPr>
+          <p:cNvPr id="9" name="Бронь 3 круг"/>
+          <p:cNvSpPr/>
+          <p:nvPr/>
+        </p:nvSpPr>
+        <p:spPr>
+          <a:xfrm>
+            <a:off x="640080" y="4297680"/>
+            <a:ext cx="777240" cy="777240"/>
+          </a:xfrm>
+          <a:prstGeom prst="ellipse">
+            <a:avLst/>
+          </a:prstGeom>
+          <a:solidFill>
+            <a:srgbClr val="FFFFFF"/>
+          </a:solidFill>
+          <a:ln w="12700">
+            <a:solidFill>
+              <a:srgbClr val="FFFFFF"/>
+            </a:solidFill>
+            <a:prstDash val="solid"/>
+          </a:ln>
+        </p:spPr>
+      </p:sp>
+      <p:pic>
+        <p:nvPicPr>
+          <p:cNvPr id="10" name="Бронь 3 иконка" descr="preencoded.png">    </p:cNvPr>
+          <p:cNvPicPr>
+            <a:picLocks noChangeAspect="1"/>
+          </p:cNvPicPr>
+          <p:nvPr/>
+        </p:nvPicPr>
+        <p:blipFill>
+          <a:blip r:embed="rId3"/>
+          <a:stretch>
+            <a:fillRect/>
+          </a:stretch>
+        </p:blipFill>
+        <p:spPr>
+          <a:xfrm>
+            <a:off x="826618" y="4484218"/>
+            <a:ext cx="404165" cy="404165"/>
+          </a:xfrm>
+          <a:prstGeom prst="rect">
+            <a:avLst/>
+          </a:prstGeom>
+        </p:spPr>
+      </p:pic>
+      <p:sp>
+        <p:nvSpPr>
+          <p:cNvPr id="11" name="Бронь 3 текст"/>
+          <p:cNvSpPr txBox="1"/>
+          <p:nvPr/>
+        </p:nvSpPr>
+        <p:spPr>
+          <a:xfrm>
+            <a:off x="1600200" y="4251960"/>
+            <a:ext cx="4023360" cy="914400"/>
+          </a:xfrm>
+          <a:prstGeom prst="rect">
+            <a:avLst/>
+          </a:prstGeom>
+          <a:noFill/>
+          <a:ln/>
+        </p:spPr>
+        <p:txBody>
+          <a:bodyPr wrap="square" lIns="0" tIns="0" rIns="0" bIns="0" rtlCol="0" anchor="ctr"/>
+          <a:lstStyle/>
+          <a:p>
+            <a:pPr indent="0" marL="0">
+              <a:buNone/>
+            </a:pPr>
+            <a:r>
+              <a:rPr lang="en-US" sz="2100" b="1" dirty="0">
+                <a:solidFill>
+                  <a:schemeClr val="bg1"/>
+                </a:solidFill>
+              </a:rPr>
+              <a:t>Отменили бронь</a:t>
+            </a:r>
+            <a:endParaRPr lang="en-US" sz="2100" dirty="0"/>
+          </a:p>
+          <a:p>
+            <a:pPr indent="0" marL="0">
+              <a:buNone/>
+            </a:pPr>
+            <a:r>
+              <a:rPr lang="en-US" sz="1500" dirty="0">
+                <a:solidFill>
+                  <a:schemeClr val="accent2"/>
+                </a:solidFill>
+              </a:rPr>
+              <a:t>товар вернулся в свободный остаток и снова в продаже</a:t>
+            </a:r>
+            <a:endParaRPr lang="en-US" sz="2100" dirty="0"/>
+          </a:p>
+        </p:txBody>
+      </p:sp>
+      <p:sp>
+        <p:nvSpPr>
+          <p:cNvPr id="12" name="Формула"/>
+          <p:cNvSpPr txBox="1"/>
+          <p:nvPr/>
+        </p:nvSpPr>
+        <p:spPr>
+          <a:xfrm>
+            <a:off x="640080" y="5669280"/>
+            <a:ext cx="5029200" cy="411480"/>
+          </a:xfrm>
+          <a:prstGeom prst="rect">
+            <a:avLst/>
+          </a:prstGeom>
+          <a:noFill/>
+          <a:ln/>
+        </p:spPr>
+        <p:txBody>
+          <a:bodyPr wrap="square" lIns="0" tIns="0" rIns="0" bIns="0" rtlCol="0" anchor="ctr"/>
+          <a:lstStyle/>
+          <a:p>
+            <a:pPr indent="0" marL="0">
+              <a:buNone/>
+            </a:pPr>
+            <a:r>
+              <a:rPr lang="en-US" sz="1800" b="1" dirty="0">
+                <a:solidFill>
+                  <a:schemeClr val="accent3"/>
+                </a:solidFill>
+              </a:rPr>
+              <a:t>Свободно = на складе − в резерве</a:t>
+            </a:r>
+            <a:endParaRPr lang="en-US" sz="1800" dirty="0"/>
+          </a:p>
+        </p:txBody>
+      </p:sp>
+      <p:sp>
+        <p:nvSpPr>
+          <p:cNvPr id="13" name="Список броней рамка"/>
+          <p:cNvSpPr/>
+          <p:nvPr/>
+        </p:nvSpPr>
+        <p:spPr>
+          <a:xfrm>
+            <a:off x="5824728" y="1527048"/>
+            <a:ext cx="5815584" cy="3614569"/>
           </a:xfrm>
           <a:prstGeom prst="roundRect">
             <a:avLst>
-              <a:gd name="adj" fmla="val 2890"/>
+              <a:gd name="adj" fmla="val 3036"/>
             </a:avLst>
           </a:prstGeom>
           <a:solidFill>
@@ -5185,217 +7132,7 @@
       </p:sp>
       <p:pic>
         <p:nvPicPr>
-          <p:cNvPr id="4" name="Карточка товара" descr="C:\Study\University\Portfolio\3-course\SEM5\Projects\Project-1\_work\cheatsheets\src\img\ru_item.png">    </p:cNvPr>
-          <p:cNvPicPr>
-            <a:picLocks noChangeAspect="1"/>
-          </p:cNvPicPr>
-          <p:nvPr/>
-        </p:nvPicPr>
-        <p:blipFill>
-          <a:blip r:embed="rId1"/>
-          <a:stretch>
-            <a:fillRect/>
-          </a:stretch>
-        </p:blipFill>
-        <p:spPr>
-          <a:xfrm>
-            <a:off x="713232" y="1600200"/>
-            <a:ext cx="5943600" cy="3651069"/>
-          </a:xfrm>
-          <a:prstGeom prst="rect">
-            <a:avLst/>
-          </a:prstGeom>
-        </p:spPr>
-      </p:pic>
-      <p:sp>
-        <p:nvSpPr>
-          <p:cNvPr id="5" name="Подпись карточка"/>
-          <p:cNvSpPr txBox="1"/>
-          <p:nvPr/>
-        </p:nvSpPr>
-        <p:spPr>
-          <a:xfrm>
-            <a:off x="640080" y="5452437"/>
-            <a:ext cx="6035040" cy="365760"/>
-          </a:xfrm>
-          <a:prstGeom prst="rect">
-            <a:avLst/>
-          </a:prstGeom>
-          <a:noFill/>
-          <a:ln/>
-        </p:spPr>
-        <p:txBody>
-          <a:bodyPr wrap="square" lIns="0" tIns="0" rIns="0" bIns="0" rtlCol="0" anchor="t"/>
-          <a:lstStyle/>
-          <a:p>
-            <a:pPr indent="0" marL="0">
-              <a:buNone/>
-            </a:pPr>
-            <a:r>
-              <a:rPr lang="en-US" sz="1500" dirty="0">
-                <a:solidFill>
-                  <a:schemeClr val="tx1"/>
-                </a:solidFill>
-              </a:rPr>
-              <a:t>Фото, цена и остаток — прямо в карточке товара</a:t>
-            </a:r>
-            <a:endParaRPr lang="en-US" sz="1500" dirty="0"/>
-          </a:p>
-        </p:txBody>
-      </p:sp>
-      <p:sp>
-        <p:nvSpPr>
-          <p:cNvPr id="6" name="Фото 1 рамка"/>
-          <p:cNvSpPr/>
-          <p:nvPr/>
-        </p:nvSpPr>
-        <p:spPr>
-          <a:xfrm>
-            <a:off x="6912864" y="1563624"/>
-            <a:ext cx="2313432" cy="1746504"/>
-          </a:xfrm>
-          <a:prstGeom prst="roundRect">
-            <a:avLst>
-              <a:gd name="adj" fmla="val 4188"/>
-            </a:avLst>
-          </a:prstGeom>
-          <a:solidFill>
-            <a:schemeClr val="bg1"/>
-          </a:solidFill>
-          <a:ln w="12700">
-            <a:solidFill>
-              <a:schemeClr val="bg2"/>
-            </a:solidFill>
-            <a:prstDash val="solid"/>
-          </a:ln>
-          <a:effectLst>
-            <a:outerShdw sx="100000" sy="100000" kx="0" ky="0" algn="bl" rotWithShape="0" blurRad="101600" dist="38100" dir="5400000">
-              <a:srgbClr val="0F2747">
-                <a:alpha val="25000"/>
-              </a:srgbClr>
-            </a:outerShdw>
-          </a:effectLst>
-        </p:spPr>
-      </p:sp>
-      <p:pic>
-        <p:nvPicPr>
-          <p:cNvPr id="7" name="Фото 1" descr="C:\Study\University\Portfolio\3-course\SEM5\Projects\Project-1\_work\generator\src\photos\VM-SP-002.png">    </p:cNvPr>
-          <p:cNvPicPr>
-            <a:picLocks noChangeAspect="1"/>
-          </p:cNvPicPr>
-          <p:nvPr/>
-        </p:nvPicPr>
-        <p:blipFill>
-          <a:blip r:embed="rId2"/>
-          <a:stretch>
-            <a:fillRect/>
-          </a:stretch>
-        </p:blipFill>
-        <p:spPr>
-          <a:xfrm>
-            <a:off x="6949440" y="1600200"/>
-            <a:ext cx="2240280" cy="1682496"/>
-          </a:xfrm>
-          <a:prstGeom prst="rect">
-            <a:avLst/>
-          </a:prstGeom>
-        </p:spPr>
-      </p:pic>
-      <p:sp>
-        <p:nvSpPr>
-          <p:cNvPr id="8" name="Фото 2 рамка"/>
-          <p:cNvSpPr/>
-          <p:nvPr/>
-        </p:nvSpPr>
-        <p:spPr>
-          <a:xfrm>
-            <a:off x="9317736" y="1563624"/>
-            <a:ext cx="2313432" cy="1746504"/>
-          </a:xfrm>
-          <a:prstGeom prst="roundRect">
-            <a:avLst>
-              <a:gd name="adj" fmla="val 4188"/>
-            </a:avLst>
-          </a:prstGeom>
-          <a:solidFill>
-            <a:schemeClr val="bg1"/>
-          </a:solidFill>
-          <a:ln w="12700">
-            <a:solidFill>
-              <a:schemeClr val="bg2"/>
-            </a:solidFill>
-            <a:prstDash val="solid"/>
-          </a:ln>
-          <a:effectLst>
-            <a:outerShdw sx="100000" sy="100000" kx="0" ky="0" algn="bl" rotWithShape="0" blurRad="101600" dist="38100" dir="5400000">
-              <a:srgbClr val="0F2747">
-                <a:alpha val="25000"/>
-              </a:srgbClr>
-            </a:outerShdw>
-          </a:effectLst>
-        </p:spPr>
-      </p:sp>
-      <p:pic>
-        <p:nvPicPr>
-          <p:cNvPr id="9" name="Фото 2" descr="C:\Study\University\Portfolio\3-course\SEM5\Projects\Project-1\_work\generator\src\photos\VM-NB-003.png">    </p:cNvPr>
-          <p:cNvPicPr>
-            <a:picLocks noChangeAspect="1"/>
-          </p:cNvPicPr>
-          <p:nvPr/>
-        </p:nvPicPr>
-        <p:blipFill>
-          <a:blip r:embed="rId3"/>
-          <a:stretch>
-            <a:fillRect/>
-          </a:stretch>
-        </p:blipFill>
-        <p:spPr>
-          <a:xfrm>
-            <a:off x="9354312" y="1600200"/>
-            <a:ext cx="2240280" cy="1682496"/>
-          </a:xfrm>
-          <a:prstGeom prst="rect">
-            <a:avLst/>
-          </a:prstGeom>
-        </p:spPr>
-      </p:pic>
-      <p:sp>
-        <p:nvSpPr>
-          <p:cNvPr id="10" name="Фото 3 рамка"/>
-          <p:cNvSpPr/>
-          <p:nvPr/>
-        </p:nvSpPr>
-        <p:spPr>
-          <a:xfrm>
-            <a:off x="6912864" y="3438144"/>
-            <a:ext cx="2313432" cy="1746504"/>
-          </a:xfrm>
-          <a:prstGeom prst="roundRect">
-            <a:avLst>
-              <a:gd name="adj" fmla="val 4188"/>
-            </a:avLst>
-          </a:prstGeom>
-          <a:solidFill>
-            <a:schemeClr val="bg1"/>
-          </a:solidFill>
-          <a:ln w="12700">
-            <a:solidFill>
-              <a:schemeClr val="bg2"/>
-            </a:solidFill>
-            <a:prstDash val="solid"/>
-          </a:ln>
-          <a:effectLst>
-            <a:outerShdw sx="100000" sy="100000" kx="0" ky="0" algn="bl" rotWithShape="0" blurRad="101600" dist="38100" dir="5400000">
-              <a:srgbClr val="0F2747">
-                <a:alpha val="25000"/>
-              </a:srgbClr>
-            </a:outerShdw>
-          </a:effectLst>
-        </p:spPr>
-      </p:sp>
-      <p:pic>
-        <p:nvPicPr>
-          <p:cNvPr id="11" name="Фото 3" descr="C:\Study\University\Portfolio\3-course\SEM5\Projects\Project-1\_work\generator\src\photos\VM-AU-003.png">    </p:cNvPr>
+          <p:cNvPr id="14" name="Список броней" descr="C:\Study\University\Repos\ProjectsControl\Project-1\_work\cheatsheets\src\img\ru_book_list.png">    </p:cNvPr>
           <p:cNvPicPr>
             <a:picLocks noChangeAspect="1"/>
           </p:cNvPicPr>
@@ -5409,8 +7146,8 @@
         </p:blipFill>
         <p:spPr>
           <a:xfrm>
-            <a:off x="6949440" y="3474720"/>
-            <a:ext cx="2240280" cy="1682496"/>
+            <a:off x="5897880" y="1600200"/>
+            <a:ext cx="5669280" cy="3468265"/>
           </a:xfrm>
           <a:prstGeom prst="rect">
             <a:avLst/>
@@ -5419,72 +7156,14 @@
       </p:pic>
       <p:sp>
         <p:nvSpPr>
-          <p:cNvPr id="12" name="Фото 4 рамка"/>
-          <p:cNvSpPr/>
-          <p:nvPr/>
-        </p:nvSpPr>
-        <p:spPr>
-          <a:xfrm>
-            <a:off x="9317736" y="3438144"/>
-            <a:ext cx="2313432" cy="1746504"/>
-          </a:xfrm>
-          <a:prstGeom prst="roundRect">
-            <a:avLst>
-              <a:gd name="adj" fmla="val 4188"/>
-            </a:avLst>
-          </a:prstGeom>
-          <a:solidFill>
-            <a:schemeClr val="bg1"/>
-          </a:solidFill>
-          <a:ln w="12700">
-            <a:solidFill>
-              <a:schemeClr val="bg2"/>
-            </a:solidFill>
-            <a:prstDash val="solid"/>
-          </a:ln>
-          <a:effectLst>
-            <a:outerShdw sx="100000" sy="100000" kx="0" ky="0" algn="bl" rotWithShape="0" blurRad="101600" dist="38100" dir="5400000">
-              <a:srgbClr val="0F2747">
-                <a:alpha val="25000"/>
-              </a:srgbClr>
-            </a:outerShdw>
-          </a:effectLst>
-        </p:spPr>
-      </p:sp>
-      <p:pic>
-        <p:nvPicPr>
-          <p:cNvPr id="13" name="Фото 4" descr="C:\Study\University\Portfolio\3-course\SEM5\Projects\Project-1\_work\generator\src\photos\VM-TV-002.png">    </p:cNvPr>
-          <p:cNvPicPr>
-            <a:picLocks noChangeAspect="1"/>
-          </p:cNvPicPr>
-          <p:nvPr/>
-        </p:nvPicPr>
-        <p:blipFill>
-          <a:blip r:embed="rId5"/>
-          <a:stretch>
-            <a:fillRect/>
-          </a:stretch>
-        </p:blipFill>
-        <p:spPr>
-          <a:xfrm>
-            <a:off x="9354312" y="3474720"/>
-            <a:ext cx="2240280" cy="1682496"/>
-          </a:xfrm>
-          <a:prstGeom prst="rect">
-            <a:avLst/>
-          </a:prstGeom>
-        </p:spPr>
-      </p:pic>
-      <p:sp>
-        <p:nvSpPr>
-          <p:cNvPr id="14" name="Подпись фото"/>
+          <p:cNvPr id="15" name="Подпись брони"/>
           <p:cNvSpPr txBox="1"/>
           <p:nvPr/>
         </p:nvSpPr>
         <p:spPr>
           <a:xfrm>
-            <a:off x="6949440" y="5452437"/>
-            <a:ext cx="4663440" cy="365760"/>
+            <a:off x="5897880" y="5251345"/>
+            <a:ext cx="5669280" cy="320040"/>
           </a:xfrm>
           <a:prstGeom prst="rect">
             <a:avLst/>
@@ -5493,42 +7172,6 @@
           <a:ln/>
         </p:spPr>
         <p:txBody>
-          <a:bodyPr wrap="square" lIns="0" tIns="0" rIns="0" bIns="0" rtlCol="0" anchor="t"/>
-          <a:lstStyle/>
-          <a:p>
-            <a:pPr indent="0" marL="0">
-              <a:buNone/>
-            </a:pPr>
-            <a:r>
-              <a:rPr lang="en-US" sz="1500" dirty="0">
-                <a:solidFill>
-                  <a:schemeClr val="tx1"/>
-                </a:solidFill>
-              </a:rPr>
-              <a:t>17 товаров — у каждого своя фотография в едином стиле</a:t>
-            </a:r>
-            <a:endParaRPr lang="en-US" sz="1500" dirty="0"/>
-          </a:p>
-        </p:txBody>
-      </p:sp>
-      <p:sp>
-        <p:nvSpPr>
-          <p:cNvPr id="15" name="Стиль"/>
-          <p:cNvSpPr txBox="1"/>
-          <p:nvPr/>
-        </p:nvSpPr>
-        <p:spPr>
-          <a:xfrm>
-            <a:off x="640080" y="5870448"/>
-            <a:ext cx="10881360" cy="384048"/>
-          </a:xfrm>
-          <a:prstGeom prst="rect">
-            <a:avLst/>
-          </a:prstGeom>
-          <a:noFill/>
-          <a:ln/>
-        </p:spPr>
-        <p:txBody>
           <a:bodyPr wrap="square" lIns="0" tIns="0" rIns="0" bIns="0" rtlCol="0" anchor="ctr"/>
           <a:lstStyle/>
           <a:p>
@@ -5536,14 +7179,14 @@
               <a:buNone/>
             </a:pPr>
             <a:r>
-              <a:rPr lang="en-US" sz="1800" b="1" i="1" dirty="0">
-                <a:solidFill>
-                  <a:schemeClr val="accent1"/>
-                </a:solidFill>
-              </a:rPr>
-              <a:t>Единый фирменный стиль: тёмно-синий, голубой и янтарная молния</a:t>
-            </a:r>
-            <a:endParaRPr lang="en-US" sz="1800" dirty="0"/>
+              <a:rPr lang="en-US" sz="1200" dirty="0">
+                <a:solidFill>
+                  <a:schemeClr val="accent4"/>
+                </a:solidFill>
+              </a:rPr>
+              <a:t>Состояние каждой брони видно сразу: просроченные — красным</a:t>
+            </a:r>
+            <a:endParaRPr lang="en-US" sz="1200" dirty="0"/>
           </a:p>
         </p:txBody>
       </p:sp>
@@ -5646,10 +7289,10 @@
             <a:r>
               <a:rPr lang="en-US" sz="3600" b="1" dirty="0">
                 <a:solidFill>
-                  <a:schemeClr val="bg1"/>
-                </a:solidFill>
-              </a:rPr>
-              <a:t>Каждому — своё, и никаких ошибок</a:t>
+                  <a:schemeClr val="tx2"/>
+                </a:solidFill>
+              </a:rPr>
+              <a:t>Продажа за пару кликов</a:t>
             </a:r>
             <a:endParaRPr lang="en-US" sz="3600" dirty="0"/>
           </a:p>
@@ -5657,14 +7300,108 @@
       </p:sp>
       <p:sp>
         <p:nvSpPr>
-          <p:cNvPr id="3" name="Роль 1 круг"/>
+          <p:cNvPr id="3" name="Подбор товаров рамка"/>
           <p:cNvSpPr/>
           <p:nvPr/>
         </p:nvSpPr>
         <p:spPr>
           <a:xfrm>
-            <a:off x="640080" y="1645920"/>
-            <a:ext cx="822960" cy="822960"/>
+            <a:off x="640080" y="1527048"/>
+            <a:ext cx="6821424" cy="4229907"/>
+          </a:xfrm>
+          <a:prstGeom prst="roundRect">
+            <a:avLst>
+              <a:gd name="adj" fmla="val 2594"/>
+            </a:avLst>
+          </a:prstGeom>
+          <a:solidFill>
+            <a:schemeClr val="bg1"/>
+          </a:solidFill>
+          <a:ln w="12700">
+            <a:solidFill>
+              <a:schemeClr val="bg2"/>
+            </a:solidFill>
+            <a:prstDash val="solid"/>
+          </a:ln>
+          <a:effectLst>
+            <a:outerShdw sx="100000" sy="100000" kx="0" ky="0" algn="bl" rotWithShape="0" blurRad="101600" dist="38100" dir="5400000">
+              <a:srgbClr val="0F2747">
+                <a:alpha val="25000"/>
+              </a:srgbClr>
+            </a:outerShdw>
+          </a:effectLst>
+        </p:spPr>
+      </p:sp>
+      <p:pic>
+        <p:nvPicPr>
+          <p:cNvPr id="4" name="Подбор товаров" descr="C:\Study\University\Repos\ProjectsControl\Project-1\_work\cheatsheets\src\img\ru_pick.png">    </p:cNvPr>
+          <p:cNvPicPr>
+            <a:picLocks noChangeAspect="1"/>
+          </p:cNvPicPr>
+          <p:nvPr/>
+        </p:nvPicPr>
+        <p:blipFill>
+          <a:blip r:embed="rId1"/>
+          <a:stretch>
+            <a:fillRect/>
+          </a:stretch>
+        </p:blipFill>
+        <p:spPr>
+          <a:xfrm>
+            <a:off x="713232" y="1600200"/>
+            <a:ext cx="6675120" cy="4083603"/>
+          </a:xfrm>
+          <a:prstGeom prst="rect">
+            <a:avLst/>
+          </a:prstGeom>
+        </p:spPr>
+      </p:pic>
+      <p:sp>
+        <p:nvSpPr>
+          <p:cNvPr id="5" name="Подпись подбор"/>
+          <p:cNvSpPr txBox="1"/>
+          <p:nvPr/>
+        </p:nvSpPr>
+        <p:spPr>
+          <a:xfrm>
+            <a:off x="640080" y="5884971"/>
+            <a:ext cx="6812280" cy="365760"/>
+          </a:xfrm>
+          <a:prstGeom prst="rect">
+            <a:avLst/>
+          </a:prstGeom>
+          <a:noFill/>
+          <a:ln/>
+        </p:spPr>
+        <p:txBody>
+          <a:bodyPr wrap="square" lIns="0" tIns="0" rIns="0" bIns="0" rtlCol="0" anchor="ctr"/>
+          <a:lstStyle/>
+          <a:p>
+            <a:pPr indent="0" marL="0">
+              <a:buNone/>
+            </a:pPr>
+            <a:r>
+              <a:rPr lang="en-US" sz="1400" dirty="0">
+                <a:solidFill>
+                  <a:schemeClr val="tx1"/>
+                </a:solidFill>
+              </a:rPr>
+              <a:t>Подбор: количество прямо в списке, поиск по мере ввода, фото товара</a:t>
+            </a:r>
+            <a:endParaRPr lang="en-US" sz="1400" dirty="0"/>
+          </a:p>
+        </p:txBody>
+      </p:sp>
+      <p:sp>
+        <p:nvSpPr>
+          <p:cNvPr id="6" name="Удобство 1 круг"/>
+          <p:cNvSpPr/>
+          <p:nvPr/>
+        </p:nvSpPr>
+        <p:spPr>
+          <a:xfrm>
+            <a:off x="7818120" y="1600200"/>
+            <a:ext cx="685800" cy="685800"/>
           </a:xfrm>
           <a:prstGeom prst="ellipse">
             <a:avLst/>
@@ -5682,22 +7419,22 @@
       </p:sp>
       <p:pic>
         <p:nvPicPr>
-          <p:cNvPr id="4" name="Роль 1 иконка" descr="preencoded.png">    </p:cNvPr>
+          <p:cNvPr id="7" name="Удобство 1 иконка" descr="preencoded.png">    </p:cNvPr>
           <p:cNvPicPr>
             <a:picLocks noChangeAspect="1"/>
           </p:cNvPicPr>
           <p:nvPr/>
         </p:nvPicPr>
         <p:blipFill>
-          <a:blip r:embed="rId1"/>
+          <a:blip r:embed="rId2"/>
           <a:stretch>
             <a:fillRect/>
           </a:stretch>
         </p:blipFill>
         <p:spPr>
           <a:xfrm>
-            <a:off x="837590" y="1843430"/>
-            <a:ext cx="427939" cy="427939"/>
+            <a:off x="7982712" y="1764792"/>
+            <a:ext cx="356616" cy="356616"/>
           </a:xfrm>
           <a:prstGeom prst="rect">
             <a:avLst/>
@@ -5706,14 +7443,14 @@
       </p:pic>
       <p:sp>
         <p:nvSpPr>
-          <p:cNvPr id="5" name="Роль 1 текст"/>
+          <p:cNvPr id="8" name="Удобство 1 текст"/>
           <p:cNvSpPr txBox="1"/>
           <p:nvPr/>
         </p:nvSpPr>
         <p:spPr>
           <a:xfrm>
-            <a:off x="1691640" y="1645920"/>
-            <a:ext cx="3840480" cy="822960"/>
+            <a:off x="8641080" y="1554480"/>
+            <a:ext cx="3017520" cy="777240"/>
           </a:xfrm>
           <a:prstGeom prst="rect">
             <a:avLst/>
@@ -5729,41 +7466,41 @@
               <a:buNone/>
             </a:pPr>
             <a:r>
-              <a:rPr lang="en-US" sz="2200" b="1" dirty="0">
-                <a:solidFill>
-                  <a:schemeClr val="bg1"/>
-                </a:solidFill>
-              </a:rPr>
-              <a:t>Закупщик</a:t>
-            </a:r>
-            <a:endParaRPr lang="en-US" sz="2200" dirty="0"/>
+              <a:rPr lang="en-US" sz="1800" b="1" dirty="0">
+                <a:solidFill>
+                  <a:schemeClr val="tx2"/>
+                </a:solidFill>
+              </a:rPr>
+              <a:t>Подбор товаров</a:t>
+            </a:r>
+            <a:endParaRPr lang="en-US" sz="1800" dirty="0"/>
           </a:p>
           <a:p>
             <a:pPr indent="0" marL="0">
               <a:buNone/>
             </a:pPr>
             <a:r>
-              <a:rPr lang="en-US" sz="1600" dirty="0">
-                <a:solidFill>
-                  <a:schemeClr val="accent2"/>
-                </a:solidFill>
-              </a:rPr>
-              <a:t>каталог, поставщики, поступления</a:t>
-            </a:r>
-            <a:endParaRPr lang="en-US" sz="2200" dirty="0"/>
-          </a:p>
-        </p:txBody>
-      </p:sp>
-      <p:sp>
-        <p:nvSpPr>
-          <p:cNvPr id="6" name="Роль 2 круг"/>
+              <a:rPr lang="en-US" sz="1400" dirty="0">
+                <a:solidFill>
+                  <a:schemeClr val="tx1"/>
+                </a:solidFill>
+              </a:rPr>
+              <a:t>сразу несколько позиций</a:t>
+            </a:r>
+            <a:endParaRPr lang="en-US" sz="1800" dirty="0"/>
+          </a:p>
+        </p:txBody>
+      </p:sp>
+      <p:sp>
+        <p:nvSpPr>
+          <p:cNvPr id="9" name="Удобство 2 круг"/>
           <p:cNvSpPr/>
           <p:nvPr/>
         </p:nvSpPr>
         <p:spPr>
           <a:xfrm>
-            <a:off x="640080" y="3017520"/>
-            <a:ext cx="822960" cy="822960"/>
+            <a:off x="7818120" y="2679192"/>
+            <a:ext cx="685800" cy="685800"/>
           </a:xfrm>
           <a:prstGeom prst="ellipse">
             <a:avLst/>
@@ -5781,22 +7518,22 @@
       </p:sp>
       <p:pic>
         <p:nvPicPr>
-          <p:cNvPr id="7" name="Роль 2 иконка" descr="preencoded.png">    </p:cNvPr>
+          <p:cNvPr id="10" name="Удобство 2 иконка" descr="preencoded.png">    </p:cNvPr>
           <p:cNvPicPr>
             <a:picLocks noChangeAspect="1"/>
           </p:cNvPicPr>
           <p:nvPr/>
         </p:nvPicPr>
         <p:blipFill>
-          <a:blip r:embed="rId2"/>
+          <a:blip r:embed="rId3"/>
           <a:stretch>
             <a:fillRect/>
           </a:stretch>
         </p:blipFill>
         <p:spPr>
           <a:xfrm>
-            <a:off x="837590" y="3215030"/>
-            <a:ext cx="427939" cy="427939"/>
+            <a:off x="7982712" y="2843784"/>
+            <a:ext cx="356616" cy="356616"/>
           </a:xfrm>
           <a:prstGeom prst="rect">
             <a:avLst/>
@@ -5805,14 +7542,14 @@
       </p:pic>
       <p:sp>
         <p:nvSpPr>
-          <p:cNvPr id="8" name="Роль 2 текст"/>
+          <p:cNvPr id="11" name="Удобство 2 текст"/>
           <p:cNvSpPr txBox="1"/>
           <p:nvPr/>
         </p:nvSpPr>
         <p:spPr>
           <a:xfrm>
-            <a:off x="1691640" y="3017520"/>
-            <a:ext cx="3840480" cy="822960"/>
+            <a:off x="8641080" y="2633472"/>
+            <a:ext cx="3017520" cy="777240"/>
           </a:xfrm>
           <a:prstGeom prst="rect">
             <a:avLst/>
@@ -5828,41 +7565,41 @@
               <a:buNone/>
             </a:pPr>
             <a:r>
-              <a:rPr lang="en-US" sz="2200" b="1" dirty="0">
-                <a:solidFill>
-                  <a:schemeClr val="bg1"/>
-                </a:solidFill>
-              </a:rPr>
-              <a:t>Продавец</a:t>
-            </a:r>
-            <a:endParaRPr lang="en-US" sz="2200" dirty="0"/>
+              <a:rPr lang="en-US" sz="1800" b="1" dirty="0">
+                <a:solidFill>
+                  <a:schemeClr val="tx2"/>
+                </a:solidFill>
+              </a:rPr>
+              <a:t>Ввод по артикулу</a:t>
+            </a:r>
+            <a:endParaRPr lang="en-US" sz="1800" dirty="0"/>
           </a:p>
           <a:p>
             <a:pPr indent="0" marL="0">
               <a:buNone/>
             </a:pPr>
             <a:r>
-              <a:rPr lang="en-US" sz="1600" dirty="0">
-                <a:solidFill>
-                  <a:schemeClr val="accent2"/>
-                </a:solidFill>
-              </a:rPr>
-              <a:t>покупатели, цены, продажи</a:t>
-            </a:r>
-            <a:endParaRPr lang="en-US" sz="2200" dirty="0"/>
-          </a:p>
-        </p:txBody>
-      </p:sp>
-      <p:sp>
-        <p:nvSpPr>
-          <p:cNvPr id="9" name="Роль 3 круг"/>
+              <a:rPr lang="en-US" sz="1400" dirty="0">
+                <a:solidFill>
+                  <a:schemeClr val="tx1"/>
+                </a:solidFill>
+              </a:rPr>
+              <a:t>ввёл артикул — нажал Enter</a:t>
+            </a:r>
+            <a:endParaRPr lang="en-US" sz="1800" dirty="0"/>
+          </a:p>
+        </p:txBody>
+      </p:sp>
+      <p:sp>
+        <p:nvSpPr>
+          <p:cNvPr id="12" name="Удобство 3 круг"/>
           <p:cNvSpPr/>
           <p:nvPr/>
         </p:nvSpPr>
         <p:spPr>
           <a:xfrm>
-            <a:off x="640080" y="4389120"/>
-            <a:ext cx="822960" cy="822960"/>
+            <a:off x="7818120" y="3758184"/>
+            <a:ext cx="685800" cy="685800"/>
           </a:xfrm>
           <a:prstGeom prst="ellipse">
             <a:avLst/>
@@ -5880,133 +7617,7 @@
       </p:sp>
       <p:pic>
         <p:nvPicPr>
-          <p:cNvPr id="10" name="Роль 3 иконка" descr="preencoded.png">    </p:cNvPr>
-          <p:cNvPicPr>
-            <a:picLocks noChangeAspect="1"/>
-          </p:cNvPicPr>
-          <p:nvPr/>
-        </p:nvPicPr>
-        <p:blipFill>
-          <a:blip r:embed="rId3"/>
-          <a:stretch>
-            <a:fillRect/>
-          </a:stretch>
-        </p:blipFill>
-        <p:spPr>
-          <a:xfrm>
-            <a:off x="837590" y="4586630"/>
-            <a:ext cx="427939" cy="427939"/>
-          </a:xfrm>
-          <a:prstGeom prst="rect">
-            <a:avLst/>
-          </a:prstGeom>
-        </p:spPr>
-      </p:pic>
-      <p:sp>
-        <p:nvSpPr>
-          <p:cNvPr id="11" name="Роль 3 текст"/>
-          <p:cNvSpPr txBox="1"/>
-          <p:nvPr/>
-        </p:nvSpPr>
-        <p:spPr>
-          <a:xfrm>
-            <a:off x="1691640" y="4389120"/>
-            <a:ext cx="3840480" cy="822960"/>
-          </a:xfrm>
-          <a:prstGeom prst="rect">
-            <a:avLst/>
-          </a:prstGeom>
-          <a:noFill/>
-          <a:ln/>
-        </p:spPr>
-        <p:txBody>
-          <a:bodyPr wrap="square" lIns="0" tIns="0" rIns="0" bIns="0" rtlCol="0" anchor="ctr"/>
-          <a:lstStyle/>
-          <a:p>
-            <a:pPr indent="0" marL="0">
-              <a:buNone/>
-            </a:pPr>
-            <a:r>
-              <a:rPr lang="en-US" sz="2200" b="1" dirty="0">
-                <a:solidFill>
-                  <a:schemeClr val="bg1"/>
-                </a:solidFill>
-              </a:rPr>
-              <a:t>Администратор</a:t>
-            </a:r>
-            <a:endParaRPr lang="en-US" sz="2200" dirty="0"/>
-          </a:p>
-          <a:p>
-            <a:pPr indent="0" marL="0">
-              <a:buNone/>
-            </a:pPr>
-            <a:r>
-              <a:rPr lang="en-US" sz="1600" dirty="0">
-                <a:solidFill>
-                  <a:schemeClr val="accent2"/>
-                </a:solidFill>
-              </a:rPr>
-              <a:t>всё, плюс пользователи и права</a:t>
-            </a:r>
-            <a:endParaRPr lang="en-US" sz="2200" dirty="0"/>
-          </a:p>
-        </p:txBody>
-      </p:sp>
-      <p:sp>
-        <p:nvSpPr>
-          <p:cNvPr id="12" name="Защита"/>
-          <p:cNvSpPr/>
-          <p:nvPr/>
-        </p:nvSpPr>
-        <p:spPr>
-          <a:xfrm>
-            <a:off x="6035040" y="1645920"/>
-            <a:ext cx="5486400" cy="3429000"/>
-          </a:xfrm>
-          <a:prstGeom prst="roundRect">
-            <a:avLst>
-              <a:gd name="adj" fmla="val 4000"/>
-            </a:avLst>
-          </a:prstGeom>
-          <a:solidFill>
-            <a:schemeClr val="bg1"/>
-          </a:solidFill>
-          <a:ln w="12700">
-            <a:solidFill>
-              <a:schemeClr val="bg1"/>
-            </a:solidFill>
-            <a:prstDash val="solid"/>
-          </a:ln>
-        </p:spPr>
-      </p:sp>
-      <p:sp>
-        <p:nvSpPr>
-          <p:cNvPr id="13" name="Защита круг"/>
-          <p:cNvSpPr/>
-          <p:nvPr/>
-        </p:nvSpPr>
-        <p:spPr>
-          <a:xfrm>
-            <a:off x="6355080" y="1920240"/>
-            <a:ext cx="822960" cy="822960"/>
-          </a:xfrm>
-          <a:prstGeom prst="ellipse">
-            <a:avLst/>
-          </a:prstGeom>
-          <a:solidFill>
-            <a:srgbClr val="0F2747"/>
-          </a:solidFill>
-          <a:ln w="12700">
-            <a:solidFill>
-              <a:srgbClr val="0F2747"/>
-            </a:solidFill>
-            <a:prstDash val="solid"/>
-          </a:ln>
-        </p:spPr>
-      </p:sp>
-      <p:pic>
-        <p:nvPicPr>
-          <p:cNvPr id="14" name="Защита иконка" descr="preencoded.png">    </p:cNvPr>
+          <p:cNvPr id="13" name="Удобство 3 иконка" descr="preencoded.png">    </p:cNvPr>
           <p:cNvPicPr>
             <a:picLocks noChangeAspect="1"/>
           </p:cNvPicPr>
@@ -6020,8 +7631,8 @@
         </p:blipFill>
         <p:spPr>
           <a:xfrm>
-            <a:off x="6552590" y="2117750"/>
-            <a:ext cx="427939" cy="427939"/>
+            <a:off x="7982712" y="3922776"/>
+            <a:ext cx="356616" cy="356616"/>
           </a:xfrm>
           <a:prstGeom prst="rect">
             <a:avLst/>
@@ -6030,14 +7641,14 @@
       </p:pic>
       <p:sp>
         <p:nvSpPr>
-          <p:cNvPr id="15" name="Защита заголовок"/>
+          <p:cNvPr id="14" name="Удобство 3 текст"/>
           <p:cNvSpPr txBox="1"/>
           <p:nvPr/>
         </p:nvSpPr>
         <p:spPr>
           <a:xfrm>
-            <a:off x="7360920" y="1920240"/>
-            <a:ext cx="3931920" cy="822960"/>
+            <a:off x="8641080" y="3712464"/>
+            <a:ext cx="3017520" cy="777240"/>
           </a:xfrm>
           <a:prstGeom prst="rect">
             <a:avLst/>
@@ -6053,27 +7664,90 @@
               <a:buNone/>
             </a:pPr>
             <a:r>
-              <a:rPr lang="en-US" sz="2400" b="1" dirty="0">
+              <a:rPr lang="en-US" sz="1800" b="1" dirty="0">
                 <a:solidFill>
                   <a:schemeClr val="tx2"/>
                 </a:solidFill>
               </a:rPr>
-              <a:t>Защита от ошибок</a:t>
-            </a:r>
-            <a:endParaRPr lang="en-US" sz="2400" dirty="0"/>
-          </a:p>
-        </p:txBody>
-      </p:sp>
-      <p:sp>
-        <p:nvSpPr>
-          <p:cNvPr id="16" name="Защита список"/>
+              <a:t>Подсказка о брони</a:t>
+            </a:r>
+            <a:endParaRPr lang="en-US" sz="1800" dirty="0"/>
+          </a:p>
+          <a:p>
+            <a:pPr indent="0" marL="0">
+              <a:buNone/>
+            </a:pPr>
+            <a:r>
+              <a:rPr lang="en-US" sz="1400" dirty="0">
+                <a:solidFill>
+                  <a:schemeClr val="tx1"/>
+                </a:solidFill>
+              </a:rPr>
+              <a:t>одна ссылка заполнит продажу</a:t>
+            </a:r>
+            <a:endParaRPr lang="en-US" sz="1800" dirty="0"/>
+          </a:p>
+        </p:txBody>
+      </p:sp>
+      <p:sp>
+        <p:nvSpPr>
+          <p:cNvPr id="15" name="Удобство 4 круг"/>
+          <p:cNvSpPr/>
+          <p:nvPr/>
+        </p:nvSpPr>
+        <p:spPr>
+          <a:xfrm>
+            <a:off x="7818120" y="4837176"/>
+            <a:ext cx="685800" cy="685800"/>
+          </a:xfrm>
+          <a:prstGeom prst="ellipse">
+            <a:avLst/>
+          </a:prstGeom>
+          <a:solidFill>
+            <a:srgbClr val="1565C0"/>
+          </a:solidFill>
+          <a:ln w="12700">
+            <a:solidFill>
+              <a:srgbClr val="1565C0"/>
+            </a:solidFill>
+            <a:prstDash val="solid"/>
+          </a:ln>
+        </p:spPr>
+      </p:sp>
+      <p:pic>
+        <p:nvPicPr>
+          <p:cNvPr id="16" name="Удобство 4 иконка" descr="preencoded.png">    </p:cNvPr>
+          <p:cNvPicPr>
+            <a:picLocks noChangeAspect="1"/>
+          </p:cNvPicPr>
+          <p:nvPr/>
+        </p:nvPicPr>
+        <p:blipFill>
+          <a:blip r:embed="rId5"/>
+          <a:stretch>
+            <a:fillRect/>
+          </a:stretch>
+        </p:blipFill>
+        <p:spPr>
+          <a:xfrm>
+            <a:off x="7982712" y="5001768"/>
+            <a:ext cx="356616" cy="356616"/>
+          </a:xfrm>
+          <a:prstGeom prst="rect">
+            <a:avLst/>
+          </a:prstGeom>
+        </p:spPr>
+      </p:pic>
+      <p:sp>
+        <p:nvSpPr>
+          <p:cNvPr id="17" name="Удобство 4 текст"/>
           <p:cNvSpPr txBox="1"/>
           <p:nvPr/>
         </p:nvSpPr>
         <p:spPr>
           <a:xfrm>
-            <a:off x="6355080" y="2971800"/>
-            <a:ext cx="4892040" cy="2468880"/>
+            <a:off x="8641080" y="4791456"/>
+            <a:ext cx="3017520" cy="777240"/>
           </a:xfrm>
           <a:prstGeom prst="rect">
             <a:avLst/>
@@ -6082,61 +7756,35 @@
           <a:ln/>
         </p:spPr>
         <p:txBody>
-          <a:bodyPr wrap="square" lIns="0" tIns="0" rIns="0" bIns="0" rtlCol="0" anchor="t"/>
-          <a:lstStyle/>
-          <a:p>
-            <a:pPr marL="342900" indent="-342900">
-              <a:spcAft>
-                <a:spcPts val="1000"/>
-              </a:spcAft>
-              <a:buSzPct val="100000"/>
-              <a:buChar char="•"/>
-            </a:pPr>
-            <a:r>
-              <a:rPr lang="en-US" sz="1700" dirty="0">
+          <a:bodyPr wrap="square" lIns="0" tIns="0" rIns="0" bIns="0" rtlCol="0" anchor="ctr"/>
+          <a:lstStyle/>
+          <a:p>
+            <a:pPr indent="0" marL="0">
+              <a:buNone/>
+            </a:pPr>
+            <a:r>
+              <a:rPr lang="en-US" sz="1800" b="1" dirty="0">
+                <a:solidFill>
+                  <a:schemeClr val="tx2"/>
+                </a:solidFill>
+              </a:rPr>
+              <a:t>Дозаказ</a:t>
+            </a:r>
+            <a:endParaRPr lang="en-US" sz="1800" dirty="0"/>
+          </a:p>
+          <a:p>
+            <a:pPr indent="0" marL="0">
+              <a:buNone/>
+            </a:pPr>
+            <a:r>
+              <a:rPr lang="en-US" sz="1400" dirty="0">
                 <a:solidFill>
                   <a:schemeClr val="tx1"/>
                 </a:solidFill>
               </a:rPr>
-              <a:t>Нельзя продать больше, чем есть на складе — система покажет остаток</a:t>
-            </a:r>
-            <a:endParaRPr lang="en-US" sz="1700" dirty="0"/>
-          </a:p>
-          <a:p>
-            <a:pPr marL="342900" indent="-342900">
-              <a:spcAft>
-                <a:spcPts val="1000"/>
-              </a:spcAft>
-              <a:buSzPct val="100000"/>
-              <a:buChar char="•"/>
-            </a:pPr>
-            <a:r>
-              <a:rPr lang="en-US" sz="1700" dirty="0">
-                <a:solidFill>
-                  <a:schemeClr val="tx1"/>
-                </a:solidFill>
-              </a:rPr>
-              <a:t>Обязательные поля проверяются перед проведением</a:t>
-            </a:r>
-            <a:endParaRPr lang="en-US" sz="1700" dirty="0"/>
-          </a:p>
-          <a:p>
-            <a:pPr marL="342900" indent="-342900">
-              <a:spcAft>
-                <a:spcPts val="1000"/>
-              </a:spcAft>
-              <a:buSzPct val="100000"/>
-              <a:buChar char="•"/>
-            </a:pPr>
-            <a:r>
-              <a:rPr lang="en-US" sz="1700" dirty="0">
-                <a:solidFill>
-                  <a:schemeClr val="tx1"/>
-                </a:solidFill>
-              </a:rPr>
-              <a:t>Два продавца не продадут один последний товар одновременно</a:t>
-            </a:r>
-            <a:endParaRPr lang="en-US" sz="1700" dirty="0"/>
+              <a:t>всё, что заканчивается, — в поступление</a:t>
+            </a:r>
+            <a:endParaRPr lang="en-US" sz="1800" dirty="0"/>
           </a:p>
         </p:txBody>
       </p:sp>
@@ -6242,7 +7890,7 @@
                   <a:schemeClr val="tx2"/>
                 </a:solidFill>
               </a:rPr>
-              <a:t>Готов к работе с первого запуска</a:t>
+              <a:t>Товар видно с первого взгляда</a:t>
             </a:r>
             <a:endParaRPr lang="en-US" sz="3600" dirty="0"/>
           </a:p>
@@ -6250,414 +7898,18 @@
       </p:sp>
       <p:sp>
         <p:nvSpPr>
-          <p:cNvPr id="3" name="Показатель 1"/>
+          <p:cNvPr id="3" name="Карточка товара рамка"/>
           <p:cNvSpPr/>
           <p:nvPr/>
         </p:nvSpPr>
         <p:spPr>
           <a:xfrm>
-            <a:off x="640080" y="1600200"/>
-            <a:ext cx="2560320" cy="1828800"/>
+            <a:off x="640080" y="1527048"/>
+            <a:ext cx="6089904" cy="3782389"/>
           </a:xfrm>
           <a:prstGeom prst="roundRect">
             <a:avLst>
-              <a:gd name="adj" fmla="val 7500"/>
-            </a:avLst>
-          </a:prstGeom>
-          <a:solidFill>
-            <a:schemeClr val="bg2"/>
-          </a:solidFill>
-          <a:ln w="12700">
-            <a:solidFill>
-              <a:schemeClr val="bg2"/>
-            </a:solidFill>
-            <a:prstDash val="solid"/>
-          </a:ln>
-        </p:spPr>
-      </p:sp>
-      <p:sp>
-        <p:nvSpPr>
-          <p:cNvPr id="4" name="Показатель 1 число"/>
-          <p:cNvSpPr txBox="1"/>
-          <p:nvPr/>
-        </p:nvSpPr>
-        <p:spPr>
-          <a:xfrm>
-            <a:off x="640080" y="1783080"/>
-            <a:ext cx="2560320" cy="914400"/>
-          </a:xfrm>
-          <a:prstGeom prst="rect">
-            <a:avLst/>
-          </a:prstGeom>
-          <a:noFill/>
-          <a:ln/>
-        </p:spPr>
-        <p:txBody>
-          <a:bodyPr wrap="square" lIns="0" tIns="0" rIns="0" bIns="0" rtlCol="0" anchor="ctr"/>
-          <a:lstStyle/>
-          <a:p>
-            <a:pPr algn="ctr" indent="0" marL="0">
-              <a:buNone/>
-            </a:pPr>
-            <a:r>
-              <a:rPr lang="en-US" sz="6000" b="1" dirty="0">
-                <a:solidFill>
-                  <a:schemeClr val="accent1"/>
-                </a:solidFill>
-              </a:rPr>
-              <a:t>17</a:t>
-            </a:r>
-            <a:endParaRPr lang="en-US" sz="6000" dirty="0"/>
-          </a:p>
-        </p:txBody>
-      </p:sp>
-      <p:sp>
-        <p:nvSpPr>
-          <p:cNvPr id="5" name="Показатель 1 подпись"/>
-          <p:cNvSpPr txBox="1"/>
-          <p:nvPr/>
-        </p:nvSpPr>
-        <p:spPr>
-          <a:xfrm>
-            <a:off x="640080" y="2743200"/>
-            <a:ext cx="2560320" cy="457200"/>
-          </a:xfrm>
-          <a:prstGeom prst="rect">
-            <a:avLst/>
-          </a:prstGeom>
-          <a:noFill/>
-          <a:ln/>
-        </p:spPr>
-        <p:txBody>
-          <a:bodyPr wrap="square" lIns="0" tIns="0" rIns="0" bIns="0" rtlCol="0" anchor="ctr"/>
-          <a:lstStyle/>
-          <a:p>
-            <a:pPr algn="ctr" indent="0" marL="0">
-              <a:buNone/>
-            </a:pPr>
-            <a:r>
-              <a:rPr lang="en-US" sz="1600" dirty="0">
-                <a:solidFill>
-                  <a:schemeClr val="tx2"/>
-                </a:solidFill>
-              </a:rPr>
-              <a:t>товаров с фото</a:t>
-            </a:r>
-            <a:endParaRPr lang="en-US" sz="1600" dirty="0"/>
-          </a:p>
-        </p:txBody>
-      </p:sp>
-      <p:sp>
-        <p:nvSpPr>
-          <p:cNvPr id="6" name="Показатель 2"/>
-          <p:cNvSpPr/>
-          <p:nvPr/>
-        </p:nvSpPr>
-        <p:spPr>
-          <a:xfrm>
-            <a:off x="3429000" y="1600200"/>
-            <a:ext cx="2560320" cy="1828800"/>
-          </a:xfrm>
-          <a:prstGeom prst="roundRect">
-            <a:avLst>
-              <a:gd name="adj" fmla="val 7500"/>
-            </a:avLst>
-          </a:prstGeom>
-          <a:solidFill>
-            <a:schemeClr val="bg2"/>
-          </a:solidFill>
-          <a:ln w="12700">
-            <a:solidFill>
-              <a:schemeClr val="bg2"/>
-            </a:solidFill>
-            <a:prstDash val="solid"/>
-          </a:ln>
-        </p:spPr>
-      </p:sp>
-      <p:sp>
-        <p:nvSpPr>
-          <p:cNvPr id="7" name="Показатель 2 число"/>
-          <p:cNvSpPr txBox="1"/>
-          <p:nvPr/>
-        </p:nvSpPr>
-        <p:spPr>
-          <a:xfrm>
-            <a:off x="3429000" y="1783080"/>
-            <a:ext cx="2560320" cy="914400"/>
-          </a:xfrm>
-          <a:prstGeom prst="rect">
-            <a:avLst/>
-          </a:prstGeom>
-          <a:noFill/>
-          <a:ln/>
-        </p:spPr>
-        <p:txBody>
-          <a:bodyPr wrap="square" lIns="0" tIns="0" rIns="0" bIns="0" rtlCol="0" anchor="ctr"/>
-          <a:lstStyle/>
-          <a:p>
-            <a:pPr algn="ctr" indent="0" marL="0">
-              <a:buNone/>
-            </a:pPr>
-            <a:r>
-              <a:rPr lang="en-US" sz="6000" b="1" dirty="0">
-                <a:solidFill>
-                  <a:schemeClr val="accent1"/>
-                </a:solidFill>
-              </a:rPr>
-              <a:t>4</a:t>
-            </a:r>
-            <a:endParaRPr lang="en-US" sz="6000" dirty="0"/>
-          </a:p>
-        </p:txBody>
-      </p:sp>
-      <p:sp>
-        <p:nvSpPr>
-          <p:cNvPr id="8" name="Показатель 2 подпись"/>
-          <p:cNvSpPr txBox="1"/>
-          <p:nvPr/>
-        </p:nvSpPr>
-        <p:spPr>
-          <a:xfrm>
-            <a:off x="3429000" y="2743200"/>
-            <a:ext cx="2560320" cy="457200"/>
-          </a:xfrm>
-          <a:prstGeom prst="rect">
-            <a:avLst/>
-          </a:prstGeom>
-          <a:noFill/>
-          <a:ln/>
-        </p:spPr>
-        <p:txBody>
-          <a:bodyPr wrap="square" lIns="0" tIns="0" rIns="0" bIns="0" rtlCol="0" anchor="ctr"/>
-          <a:lstStyle/>
-          <a:p>
-            <a:pPr algn="ctr" indent="0" marL="0">
-              <a:buNone/>
-            </a:pPr>
-            <a:r>
-              <a:rPr lang="en-US" sz="1600" dirty="0">
-                <a:solidFill>
-                  <a:schemeClr val="tx2"/>
-                </a:solidFill>
-              </a:rPr>
-              <a:t>раздела</a:t>
-            </a:r>
-            <a:endParaRPr lang="en-US" sz="1600" dirty="0"/>
-          </a:p>
-        </p:txBody>
-      </p:sp>
-      <p:sp>
-        <p:nvSpPr>
-          <p:cNvPr id="9" name="Показатель 3"/>
-          <p:cNvSpPr/>
-          <p:nvPr/>
-        </p:nvSpPr>
-        <p:spPr>
-          <a:xfrm>
-            <a:off x="640080" y="3703320"/>
-            <a:ext cx="2560320" cy="1828800"/>
-          </a:xfrm>
-          <a:prstGeom prst="roundRect">
-            <a:avLst>
-              <a:gd name="adj" fmla="val 7500"/>
-            </a:avLst>
-          </a:prstGeom>
-          <a:solidFill>
-            <a:schemeClr val="bg2"/>
-          </a:solidFill>
-          <a:ln w="12700">
-            <a:solidFill>
-              <a:schemeClr val="bg2"/>
-            </a:solidFill>
-            <a:prstDash val="solid"/>
-          </a:ln>
-        </p:spPr>
-      </p:sp>
-      <p:sp>
-        <p:nvSpPr>
-          <p:cNvPr id="10" name="Показатель 3 число"/>
-          <p:cNvSpPr txBox="1"/>
-          <p:nvPr/>
-        </p:nvSpPr>
-        <p:spPr>
-          <a:xfrm>
-            <a:off x="640080" y="3886200"/>
-            <a:ext cx="2560320" cy="914400"/>
-          </a:xfrm>
-          <a:prstGeom prst="rect">
-            <a:avLst/>
-          </a:prstGeom>
-          <a:noFill/>
-          <a:ln/>
-        </p:spPr>
-        <p:txBody>
-          <a:bodyPr wrap="square" lIns="0" tIns="0" rIns="0" bIns="0" rtlCol="0" anchor="ctr"/>
-          <a:lstStyle/>
-          <a:p>
-            <a:pPr algn="ctr" indent="0" marL="0">
-              <a:buNone/>
-            </a:pPr>
-            <a:r>
-              <a:rPr lang="en-US" sz="6000" b="1" dirty="0">
-                <a:solidFill>
-                  <a:schemeClr val="accent1"/>
-                </a:solidFill>
-              </a:rPr>
-              <a:t>3</a:t>
-            </a:r>
-            <a:endParaRPr lang="en-US" sz="6000" dirty="0"/>
-          </a:p>
-        </p:txBody>
-      </p:sp>
-      <p:sp>
-        <p:nvSpPr>
-          <p:cNvPr id="11" name="Показатель 3 подпись"/>
-          <p:cNvSpPr txBox="1"/>
-          <p:nvPr/>
-        </p:nvSpPr>
-        <p:spPr>
-          <a:xfrm>
-            <a:off x="640080" y="4846320"/>
-            <a:ext cx="2560320" cy="457200"/>
-          </a:xfrm>
-          <a:prstGeom prst="rect">
-            <a:avLst/>
-          </a:prstGeom>
-          <a:noFill/>
-          <a:ln/>
-        </p:spPr>
-        <p:txBody>
-          <a:bodyPr wrap="square" lIns="0" tIns="0" rIns="0" bIns="0" rtlCol="0" anchor="ctr"/>
-          <a:lstStyle/>
-          <a:p>
-            <a:pPr algn="ctr" indent="0" marL="0">
-              <a:buNone/>
-            </a:pPr>
-            <a:r>
-              <a:rPr lang="en-US" sz="1600" dirty="0">
-                <a:solidFill>
-                  <a:schemeClr val="tx2"/>
-                </a:solidFill>
-              </a:rPr>
-              <a:t>роли</a:t>
-            </a:r>
-            <a:endParaRPr lang="en-US" sz="1600" dirty="0"/>
-          </a:p>
-        </p:txBody>
-      </p:sp>
-      <p:sp>
-        <p:nvSpPr>
-          <p:cNvPr id="12" name="Показатель 4"/>
-          <p:cNvSpPr/>
-          <p:nvPr/>
-        </p:nvSpPr>
-        <p:spPr>
-          <a:xfrm>
-            <a:off x="3429000" y="3703320"/>
-            <a:ext cx="2560320" cy="1828800"/>
-          </a:xfrm>
-          <a:prstGeom prst="roundRect">
-            <a:avLst>
-              <a:gd name="adj" fmla="val 7500"/>
-            </a:avLst>
-          </a:prstGeom>
-          <a:solidFill>
-            <a:schemeClr val="bg2"/>
-          </a:solidFill>
-          <a:ln w="12700">
-            <a:solidFill>
-              <a:schemeClr val="bg2"/>
-            </a:solidFill>
-            <a:prstDash val="solid"/>
-          </a:ln>
-        </p:spPr>
-      </p:sp>
-      <p:sp>
-        <p:nvSpPr>
-          <p:cNvPr id="13" name="Показатель 4 число"/>
-          <p:cNvSpPr txBox="1"/>
-          <p:nvPr/>
-        </p:nvSpPr>
-        <p:spPr>
-          <a:xfrm>
-            <a:off x="3429000" y="3886200"/>
-            <a:ext cx="2560320" cy="914400"/>
-          </a:xfrm>
-          <a:prstGeom prst="rect">
-            <a:avLst/>
-          </a:prstGeom>
-          <a:noFill/>
-          <a:ln/>
-        </p:spPr>
-        <p:txBody>
-          <a:bodyPr wrap="square" lIns="0" tIns="0" rIns="0" bIns="0" rtlCol="0" anchor="ctr"/>
-          <a:lstStyle/>
-          <a:p>
-            <a:pPr algn="ctr" indent="0" marL="0">
-              <a:buNone/>
-            </a:pPr>
-            <a:r>
-              <a:rPr lang="en-US" sz="6000" b="1" dirty="0">
-                <a:solidFill>
-                  <a:schemeClr val="accent1"/>
-                </a:solidFill>
-              </a:rPr>
-              <a:t>2</a:t>
-            </a:r>
-            <a:endParaRPr lang="en-US" sz="6000" dirty="0"/>
-          </a:p>
-        </p:txBody>
-      </p:sp>
-      <p:sp>
-        <p:nvSpPr>
-          <p:cNvPr id="14" name="Показатель 4 подпись"/>
-          <p:cNvSpPr txBox="1"/>
-          <p:nvPr/>
-        </p:nvSpPr>
-        <p:spPr>
-          <a:xfrm>
-            <a:off x="3429000" y="4846320"/>
-            <a:ext cx="2560320" cy="457200"/>
-          </a:xfrm>
-          <a:prstGeom prst="rect">
-            <a:avLst/>
-          </a:prstGeom>
-          <a:noFill/>
-          <a:ln/>
-        </p:spPr>
-        <p:txBody>
-          <a:bodyPr wrap="square" lIns="0" tIns="0" rIns="0" bIns="0" rtlCol="0" anchor="ctr"/>
-          <a:lstStyle/>
-          <a:p>
-            <a:pPr algn="ctr" indent="0" marL="0">
-              <a:buNone/>
-            </a:pPr>
-            <a:r>
-              <a:rPr lang="en-US" sz="1600" dirty="0">
-                <a:solidFill>
-                  <a:schemeClr val="tx2"/>
-                </a:solidFill>
-              </a:rPr>
-              <a:t>языка интерфейса</a:t>
-            </a:r>
-            <a:endParaRPr lang="en-US" sz="1600" dirty="0"/>
-          </a:p>
-        </p:txBody>
-      </p:sp>
-      <p:sp>
-        <p:nvSpPr>
-          <p:cNvPr id="15" name="Китайский интерфейс рамка"/>
-          <p:cNvSpPr/>
-          <p:nvPr/>
-        </p:nvSpPr>
-        <p:spPr>
-          <a:xfrm>
-            <a:off x="6327648" y="1527048"/>
-            <a:ext cx="5312664" cy="3319925"/>
-          </a:xfrm>
-          <a:prstGeom prst="roundRect">
-            <a:avLst>
-              <a:gd name="adj" fmla="val 3305"/>
+              <a:gd name="adj" fmla="val 2901"/>
             </a:avLst>
           </a:prstGeom>
           <a:solidFill>
@@ -6680,7 +7932,7 @@
       </p:sp>
       <p:pic>
         <p:nvPicPr>
-          <p:cNvPr id="16" name="Китайский интерфейс" descr="C:\Study\University\Portfolio\3-course\SEM5\Projects\Project-1\_work\cheatsheets\src\img\zh_home.png">    </p:cNvPr>
+          <p:cNvPr id="4" name="Карточка товара" descr="C:\Study\University\Repos\ProjectsControl\Project-1\_work\cheatsheets\src\img\ru_item.png">    </p:cNvPr>
           <p:cNvPicPr>
             <a:picLocks noChangeAspect="1"/>
           </p:cNvPicPr>
@@ -6694,8 +7946,8 @@
         </p:blipFill>
         <p:spPr>
           <a:xfrm>
-            <a:off x="6400800" y="1600200"/>
-            <a:ext cx="5166360" cy="3173621"/>
+            <a:off x="713232" y="1600200"/>
+            <a:ext cx="5943600" cy="3636085"/>
           </a:xfrm>
           <a:prstGeom prst="rect">
             <a:avLst/>
@@ -6704,14 +7956,14 @@
       </p:pic>
       <p:sp>
         <p:nvSpPr>
-          <p:cNvPr id="17" name="Подпись китайский"/>
+          <p:cNvPr id="5" name="Подпись карточка"/>
           <p:cNvSpPr txBox="1"/>
           <p:nvPr/>
         </p:nvSpPr>
         <p:spPr>
           <a:xfrm>
-            <a:off x="6400800" y="5002421"/>
-            <a:ext cx="5166360" cy="411480"/>
+            <a:off x="640080" y="5437453"/>
+            <a:ext cx="6035040" cy="365760"/>
           </a:xfrm>
           <a:prstGeom prst="rect">
             <a:avLst/>
@@ -6720,45 +7972,266 @@
           <a:ln/>
         </p:spPr>
         <p:txBody>
-          <a:bodyPr wrap="square" lIns="0" tIns="0" rIns="0" bIns="0" rtlCol="0" anchor="ctr"/>
-          <a:lstStyle/>
-          <a:p>
-            <a:pPr algn="ctr" indent="0" marL="0">
-              <a:buNone/>
-            </a:pPr>
-            <a:r>
-              <a:rPr lang="en-US" sz="1700" b="1" dirty="0">
-                <a:solidFill>
-                  <a:schemeClr val="tx2"/>
-                </a:solidFill>
-              </a:rPr>
-              <a:t>Говорит по-китайски: </a:t>
-            </a:r>
-            <a:pPr algn="ctr" indent="0" marL="0">
-              <a:buNone/>
-            </a:pPr>
-            <a:r>
-              <a:rPr lang="en-US" sz="1700" b="1" dirty="0">
-                <a:solidFill>
-                  <a:schemeClr val="accent1"/>
-                </a:solidFill>
-              </a:rPr>
-              <a:t>伏特商城 VoltMarket</a:t>
-            </a:r>
-            <a:endParaRPr lang="en-US" sz="1700" dirty="0"/>
-          </a:p>
-        </p:txBody>
-      </p:sp>
-      <p:sp>
-        <p:nvSpPr>
-          <p:cNvPr id="18" name="Демо"/>
+          <a:bodyPr wrap="square" lIns="0" tIns="0" rIns="0" bIns="0" rtlCol="0" anchor="t"/>
+          <a:lstStyle/>
+          <a:p>
+            <a:pPr indent="0" marL="0">
+              <a:buNone/>
+            </a:pPr>
+            <a:r>
+              <a:rPr lang="en-US" sz="1500" dirty="0">
+                <a:solidFill>
+                  <a:schemeClr val="tx1"/>
+                </a:solidFill>
+              </a:rPr>
+              <a:t>Фото, цена и остаток — прямо в карточке товара</a:t>
+            </a:r>
+            <a:endParaRPr lang="en-US" sz="1500" dirty="0"/>
+          </a:p>
+        </p:txBody>
+      </p:sp>
+      <p:sp>
+        <p:nvSpPr>
+          <p:cNvPr id="6" name="Фото 1 рамка"/>
+          <p:cNvSpPr/>
+          <p:nvPr/>
+        </p:nvSpPr>
+        <p:spPr>
+          <a:xfrm>
+            <a:off x="6912864" y="1563624"/>
+            <a:ext cx="2313432" cy="1746504"/>
+          </a:xfrm>
+          <a:prstGeom prst="roundRect">
+            <a:avLst>
+              <a:gd name="adj" fmla="val 4188"/>
+            </a:avLst>
+          </a:prstGeom>
+          <a:solidFill>
+            <a:schemeClr val="bg1"/>
+          </a:solidFill>
+          <a:ln w="12700">
+            <a:solidFill>
+              <a:schemeClr val="bg2"/>
+            </a:solidFill>
+            <a:prstDash val="solid"/>
+          </a:ln>
+          <a:effectLst>
+            <a:outerShdw sx="100000" sy="100000" kx="0" ky="0" algn="bl" rotWithShape="0" blurRad="101600" dist="38100" dir="5400000">
+              <a:srgbClr val="0F2747">
+                <a:alpha val="25000"/>
+              </a:srgbClr>
+            </a:outerShdw>
+          </a:effectLst>
+        </p:spPr>
+      </p:sp>
+      <p:pic>
+        <p:nvPicPr>
+          <p:cNvPr id="7" name="Фото 1" descr="C:\Study\University\Repos\ProjectsControl\Project-1\_work\generator\src\photos\VM-SP-002.png">    </p:cNvPr>
+          <p:cNvPicPr>
+            <a:picLocks noChangeAspect="1"/>
+          </p:cNvPicPr>
+          <p:nvPr/>
+        </p:nvPicPr>
+        <p:blipFill>
+          <a:blip r:embed="rId2"/>
+          <a:stretch>
+            <a:fillRect/>
+          </a:stretch>
+        </p:blipFill>
+        <p:spPr>
+          <a:xfrm>
+            <a:off x="6949440" y="1600200"/>
+            <a:ext cx="2240280" cy="1682496"/>
+          </a:xfrm>
+          <a:prstGeom prst="rect">
+            <a:avLst/>
+          </a:prstGeom>
+        </p:spPr>
+      </p:pic>
+      <p:sp>
+        <p:nvSpPr>
+          <p:cNvPr id="8" name="Фото 2 рамка"/>
+          <p:cNvSpPr/>
+          <p:nvPr/>
+        </p:nvSpPr>
+        <p:spPr>
+          <a:xfrm>
+            <a:off x="9317736" y="1563624"/>
+            <a:ext cx="2313432" cy="1746504"/>
+          </a:xfrm>
+          <a:prstGeom prst="roundRect">
+            <a:avLst>
+              <a:gd name="adj" fmla="val 4188"/>
+            </a:avLst>
+          </a:prstGeom>
+          <a:solidFill>
+            <a:schemeClr val="bg1"/>
+          </a:solidFill>
+          <a:ln w="12700">
+            <a:solidFill>
+              <a:schemeClr val="bg2"/>
+            </a:solidFill>
+            <a:prstDash val="solid"/>
+          </a:ln>
+          <a:effectLst>
+            <a:outerShdw sx="100000" sy="100000" kx="0" ky="0" algn="bl" rotWithShape="0" blurRad="101600" dist="38100" dir="5400000">
+              <a:srgbClr val="0F2747">
+                <a:alpha val="25000"/>
+              </a:srgbClr>
+            </a:outerShdw>
+          </a:effectLst>
+        </p:spPr>
+      </p:sp>
+      <p:pic>
+        <p:nvPicPr>
+          <p:cNvPr id="9" name="Фото 2" descr="C:\Study\University\Repos\ProjectsControl\Project-1\_work\generator\src\photos\VM-NB-003.png">    </p:cNvPr>
+          <p:cNvPicPr>
+            <a:picLocks noChangeAspect="1"/>
+          </p:cNvPicPr>
+          <p:nvPr/>
+        </p:nvPicPr>
+        <p:blipFill>
+          <a:blip r:embed="rId3"/>
+          <a:stretch>
+            <a:fillRect/>
+          </a:stretch>
+        </p:blipFill>
+        <p:spPr>
+          <a:xfrm>
+            <a:off x="9354312" y="1600200"/>
+            <a:ext cx="2240280" cy="1682496"/>
+          </a:xfrm>
+          <a:prstGeom prst="rect">
+            <a:avLst/>
+          </a:prstGeom>
+        </p:spPr>
+      </p:pic>
+      <p:sp>
+        <p:nvSpPr>
+          <p:cNvPr id="10" name="Фото 3 рамка"/>
+          <p:cNvSpPr/>
+          <p:nvPr/>
+        </p:nvSpPr>
+        <p:spPr>
+          <a:xfrm>
+            <a:off x="6912864" y="3438144"/>
+            <a:ext cx="2313432" cy="1746504"/>
+          </a:xfrm>
+          <a:prstGeom prst="roundRect">
+            <a:avLst>
+              <a:gd name="adj" fmla="val 4188"/>
+            </a:avLst>
+          </a:prstGeom>
+          <a:solidFill>
+            <a:schemeClr val="bg1"/>
+          </a:solidFill>
+          <a:ln w="12700">
+            <a:solidFill>
+              <a:schemeClr val="bg2"/>
+            </a:solidFill>
+            <a:prstDash val="solid"/>
+          </a:ln>
+          <a:effectLst>
+            <a:outerShdw sx="100000" sy="100000" kx="0" ky="0" algn="bl" rotWithShape="0" blurRad="101600" dist="38100" dir="5400000">
+              <a:srgbClr val="0F2747">
+                <a:alpha val="25000"/>
+              </a:srgbClr>
+            </a:outerShdw>
+          </a:effectLst>
+        </p:spPr>
+      </p:sp>
+      <p:pic>
+        <p:nvPicPr>
+          <p:cNvPr id="11" name="Фото 3" descr="C:\Study\University\Repos\ProjectsControl\Project-1\_work\generator\src\photos\VM-AU-003.png">    </p:cNvPr>
+          <p:cNvPicPr>
+            <a:picLocks noChangeAspect="1"/>
+          </p:cNvPicPr>
+          <p:nvPr/>
+        </p:nvPicPr>
+        <p:blipFill>
+          <a:blip r:embed="rId4"/>
+          <a:stretch>
+            <a:fillRect/>
+          </a:stretch>
+        </p:blipFill>
+        <p:spPr>
+          <a:xfrm>
+            <a:off x="6949440" y="3474720"/>
+            <a:ext cx="2240280" cy="1682496"/>
+          </a:xfrm>
+          <a:prstGeom prst="rect">
+            <a:avLst/>
+          </a:prstGeom>
+        </p:spPr>
+      </p:pic>
+      <p:sp>
+        <p:nvSpPr>
+          <p:cNvPr id="12" name="Фото 4 рамка"/>
+          <p:cNvSpPr/>
+          <p:nvPr/>
+        </p:nvSpPr>
+        <p:spPr>
+          <a:xfrm>
+            <a:off x="9317736" y="3438144"/>
+            <a:ext cx="2313432" cy="1746504"/>
+          </a:xfrm>
+          <a:prstGeom prst="roundRect">
+            <a:avLst>
+              <a:gd name="adj" fmla="val 4188"/>
+            </a:avLst>
+          </a:prstGeom>
+          <a:solidFill>
+            <a:schemeClr val="bg1"/>
+          </a:solidFill>
+          <a:ln w="12700">
+            <a:solidFill>
+              <a:schemeClr val="bg2"/>
+            </a:solidFill>
+            <a:prstDash val="solid"/>
+          </a:ln>
+          <a:effectLst>
+            <a:outerShdw sx="100000" sy="100000" kx="0" ky="0" algn="bl" rotWithShape="0" blurRad="101600" dist="38100" dir="5400000">
+              <a:srgbClr val="0F2747">
+                <a:alpha val="25000"/>
+              </a:srgbClr>
+            </a:outerShdw>
+          </a:effectLst>
+        </p:spPr>
+      </p:sp>
+      <p:pic>
+        <p:nvPicPr>
+          <p:cNvPr id="13" name="Фото 4" descr="C:\Study\University\Repos\ProjectsControl\Project-1\_work\generator\src\photos\VM-TV-002.png">    </p:cNvPr>
+          <p:cNvPicPr>
+            <a:picLocks noChangeAspect="1"/>
+          </p:cNvPicPr>
+          <p:nvPr/>
+        </p:nvPicPr>
+        <p:blipFill>
+          <a:blip r:embed="rId5"/>
+          <a:stretch>
+            <a:fillRect/>
+          </a:stretch>
+        </p:blipFill>
+        <p:spPr>
+          <a:xfrm>
+            <a:off x="9354312" y="3474720"/>
+            <a:ext cx="2240280" cy="1682496"/>
+          </a:xfrm>
+          <a:prstGeom prst="rect">
+            <a:avLst/>
+          </a:prstGeom>
+        </p:spPr>
+      </p:pic>
+      <p:sp>
+        <p:nvSpPr>
+          <p:cNvPr id="14" name="Подпись фото"/>
           <p:cNvSpPr txBox="1"/>
           <p:nvPr/>
         </p:nvSpPr>
         <p:spPr>
           <a:xfrm>
-            <a:off x="640080" y="5852160"/>
-            <a:ext cx="5349240" cy="365760"/>
+            <a:off x="6949440" y="5437453"/>
+            <a:ext cx="4663440" cy="365760"/>
           </a:xfrm>
           <a:prstGeom prst="rect">
             <a:avLst/>
@@ -6767,21 +8240,57 @@
           <a:ln/>
         </p:spPr>
         <p:txBody>
+          <a:bodyPr wrap="square" lIns="0" tIns="0" rIns="0" bIns="0" rtlCol="0" anchor="t"/>
+          <a:lstStyle/>
+          <a:p>
+            <a:pPr indent="0" marL="0">
+              <a:buNone/>
+            </a:pPr>
+            <a:r>
+              <a:rPr lang="en-US" sz="1500" dirty="0">
+                <a:solidFill>
+                  <a:schemeClr val="tx1"/>
+                </a:solidFill>
+              </a:rPr>
+              <a:t>17 товаров — у каждого своя фотография в едином стиле</a:t>
+            </a:r>
+            <a:endParaRPr lang="en-US" sz="1500" dirty="0"/>
+          </a:p>
+        </p:txBody>
+      </p:sp>
+      <p:sp>
+        <p:nvSpPr>
+          <p:cNvPr id="15" name="Стиль"/>
+          <p:cNvSpPr txBox="1"/>
+          <p:nvPr/>
+        </p:nvSpPr>
+        <p:spPr>
+          <a:xfrm>
+            <a:off x="640080" y="5870448"/>
+            <a:ext cx="10881360" cy="384048"/>
+          </a:xfrm>
+          <a:prstGeom prst="rect">
+            <a:avLst/>
+          </a:prstGeom>
+          <a:noFill/>
+          <a:ln/>
+        </p:spPr>
+        <p:txBody>
           <a:bodyPr wrap="square" lIns="0" tIns="0" rIns="0" bIns="0" rtlCol="0" anchor="ctr"/>
           <a:lstStyle/>
           <a:p>
-            <a:pPr indent="0" marL="0">
-              <a:buNone/>
-            </a:pPr>
-            <a:r>
-              <a:rPr lang="en-US" sz="1400" dirty="0">
-                <a:solidFill>
-                  <a:schemeClr val="accent4"/>
-                </a:solidFill>
-              </a:rPr>
-              <a:t>В базе уже есть товары, поставщики, покупатели, цены и документы</a:t>
-            </a:r>
-            <a:endParaRPr lang="en-US" sz="1400" dirty="0"/>
+            <a:pPr algn="ctr" indent="0" marL="0">
+              <a:buNone/>
+            </a:pPr>
+            <a:r>
+              <a:rPr lang="en-US" sz="1800" b="1" i="1" dirty="0">
+                <a:solidFill>
+                  <a:schemeClr val="accent1"/>
+                </a:solidFill>
+              </a:rPr>
+              <a:t>Единый фирменный стиль: тёмно-синий, голубой и янтарная молния</a:t>
+            </a:r>
+            <a:endParaRPr lang="en-US" sz="1800" dirty="0"/>
           </a:p>
         </p:txBody>
       </p:sp>
@@ -6855,9 +8364,72 @@
           <a:chExt cx="0" cy="0"/>
         </a:xfrm>
       </p:grpSpPr>
+      <p:sp>
+        <p:nvSpPr>
+          <p:cNvPr id="2" name="Text 0"/>
+          <p:cNvSpPr/>
+          <p:nvPr>
+            <p:ph idx="100" type="title" hasCustomPrompt="1"/>
+          </p:nvPr>
+        </p:nvSpPr>
+        <p:spPr>
+          <a:xfrm>
+            <a:off x="640080" y="411480"/>
+            <a:ext cx="10881360" cy="868680"/>
+          </a:xfrm>
+          <a:prstGeom prst="rect">
+            <a:avLst/>
+          </a:prstGeom>
+          <a:noFill/>
+          <a:ln/>
+        </p:spPr>
+        <p:txBody>
+          <a:bodyPr wrap="square" lIns="0" tIns="0" rIns="0" bIns="0" rtlCol="0" anchor="ctr"/>
+          <a:lstStyle/>
+          <a:p>
+            <a:pPr indent="0" marL="0">
+              <a:buNone/>
+            </a:pPr>
+            <a:r>
+              <a:rPr lang="en-US" sz="3600" b="1" dirty="0">
+                <a:solidFill>
+                  <a:schemeClr val="bg1"/>
+                </a:solidFill>
+              </a:rPr>
+              <a:t>Каждому — своё, и никаких ошибок</a:t>
+            </a:r>
+            <a:endParaRPr lang="en-US" sz="3600" dirty="0"/>
+          </a:p>
+        </p:txBody>
+      </p:sp>
+      <p:sp>
+        <p:nvSpPr>
+          <p:cNvPr id="3" name="Роль 1 круг"/>
+          <p:cNvSpPr/>
+          <p:nvPr/>
+        </p:nvSpPr>
+        <p:spPr>
+          <a:xfrm>
+            <a:off x="640080" y="1645920"/>
+            <a:ext cx="822960" cy="822960"/>
+          </a:xfrm>
+          <a:prstGeom prst="ellipse">
+            <a:avLst/>
+          </a:prstGeom>
+          <a:solidFill>
+            <a:srgbClr val="1565C0"/>
+          </a:solidFill>
+          <a:ln w="12700">
+            <a:solidFill>
+              <a:srgbClr val="1565C0"/>
+            </a:solidFill>
+            <a:prstDash val="solid"/>
+          </a:ln>
+        </p:spPr>
+      </p:sp>
       <p:pic>
         <p:nvPicPr>
-          <p:cNvPr id="2" name="Логотип" descr="C:\Study\University\Portfolio\3-course\SEM5\Projects\Project-1\_work\generator\src\pictures\logo.png">    </p:cNvPr>
+          <p:cNvPr id="4" name="Роль 1 иконка" descr="preencoded.png">    </p:cNvPr>
           <p:cNvPicPr>
             <a:picLocks noChangeAspect="1"/>
           </p:cNvPicPr>
@@ -6871,8 +8443,8 @@
         </p:blipFill>
         <p:spPr>
           <a:xfrm>
-            <a:off x="731520" y="822960"/>
-            <a:ext cx="4023360" cy="1005840"/>
+            <a:off x="837590" y="1843430"/>
+            <a:ext cx="427939" cy="427939"/>
           </a:xfrm>
           <a:prstGeom prst="rect">
             <a:avLst/>
@@ -6881,16 +8453,14 @@
       </p:pic>
       <p:sp>
         <p:nvSpPr>
-          <p:cNvPr id="3" name="Text 0"/>
-          <p:cNvSpPr/>
-          <p:nvPr>
-            <p:ph idx="100" type="title" hasCustomPrompt="1"/>
-          </p:nvPr>
-        </p:nvSpPr>
-        <p:spPr>
-          <a:xfrm>
-            <a:off x="731520" y="2331720"/>
-            <a:ext cx="5852160" cy="1188720"/>
+          <p:cNvPr id="5" name="Роль 1 текст"/>
+          <p:cNvSpPr txBox="1"/>
+          <p:nvPr/>
+        </p:nvSpPr>
+        <p:spPr>
+          <a:xfrm>
+            <a:off x="1691640" y="1645920"/>
+            <a:ext cx="3840480" cy="822960"/>
           </a:xfrm>
           <a:prstGeom prst="rect">
             <a:avLst/>
@@ -6899,36 +8469,97 @@
           <a:ln/>
         </p:spPr>
         <p:txBody>
-          <a:bodyPr wrap="square" lIns="0" tIns="0" rIns="0" bIns="0" rtlCol="0" anchor="t"/>
-          <a:lstStyle/>
-          <a:p>
-            <a:pPr algn="l" indent="0" marL="0">
-              <a:buNone/>
-            </a:pPr>
-            <a:r>
-              <a:rPr lang="en-US" sz="5400" b="1" dirty="0">
+          <a:bodyPr wrap="square" lIns="0" tIns="0" rIns="0" bIns="0" rtlCol="0" anchor="ctr"/>
+          <a:lstStyle/>
+          <a:p>
+            <a:pPr indent="0" marL="0">
+              <a:buNone/>
+            </a:pPr>
+            <a:r>
+              <a:rPr lang="en-US" sz="2200" b="1" dirty="0">
                 <a:solidFill>
                   <a:schemeClr val="bg1"/>
                 </a:solidFill>
               </a:rPr>
-              <a:t>Спасибо!</a:t>
-            </a:r>
-            <a:endParaRPr lang="en-US" sz="5400" dirty="0"/>
-          </a:p>
-        </p:txBody>
-      </p:sp>
-      <p:sp>
-        <p:nvSpPr>
-          <p:cNvPr id="4" name="Text 0"/>
+              <a:t>Закупщик</a:t>
+            </a:r>
+            <a:endParaRPr lang="en-US" sz="2200" dirty="0"/>
+          </a:p>
+          <a:p>
+            <a:pPr indent="0" marL="0">
+              <a:buNone/>
+            </a:pPr>
+            <a:r>
+              <a:rPr lang="en-US" sz="1600" dirty="0">
+                <a:solidFill>
+                  <a:schemeClr val="accent2"/>
+                </a:solidFill>
+              </a:rPr>
+              <a:t>каталог, поставщики, поступления</a:t>
+            </a:r>
+            <a:endParaRPr lang="en-US" sz="2200" dirty="0"/>
+          </a:p>
+        </p:txBody>
+      </p:sp>
+      <p:sp>
+        <p:nvSpPr>
+          <p:cNvPr id="6" name="Роль 2 круг"/>
           <p:cNvSpPr/>
-          <p:nvPr>
-            <p:ph idx="101" type="body" hasCustomPrompt="1"/>
-          </p:nvPr>
-        </p:nvSpPr>
-        <p:spPr>
-          <a:xfrm>
-            <a:off x="731520" y="3566160"/>
-            <a:ext cx="5486400" cy="1097280"/>
+          <p:nvPr/>
+        </p:nvSpPr>
+        <p:spPr>
+          <a:xfrm>
+            <a:off x="640080" y="3017520"/>
+            <a:ext cx="822960" cy="822960"/>
+          </a:xfrm>
+          <a:prstGeom prst="ellipse">
+            <a:avLst/>
+          </a:prstGeom>
+          <a:solidFill>
+            <a:srgbClr val="1565C0"/>
+          </a:solidFill>
+          <a:ln w="12700">
+            <a:solidFill>
+              <a:srgbClr val="1565C0"/>
+            </a:solidFill>
+            <a:prstDash val="solid"/>
+          </a:ln>
+        </p:spPr>
+      </p:sp>
+      <p:pic>
+        <p:nvPicPr>
+          <p:cNvPr id="7" name="Роль 2 иконка" descr="preencoded.png">    </p:cNvPr>
+          <p:cNvPicPr>
+            <a:picLocks noChangeAspect="1"/>
+          </p:cNvPicPr>
+          <p:nvPr/>
+        </p:nvPicPr>
+        <p:blipFill>
+          <a:blip r:embed="rId2"/>
+          <a:stretch>
+            <a:fillRect/>
+          </a:stretch>
+        </p:blipFill>
+        <p:spPr>
+          <a:xfrm>
+            <a:off x="837590" y="3215030"/>
+            <a:ext cx="427939" cy="427939"/>
+          </a:xfrm>
+          <a:prstGeom prst="rect">
+            <a:avLst/>
+          </a:prstGeom>
+        </p:spPr>
+      </p:pic>
+      <p:sp>
+        <p:nvSpPr>
+          <p:cNvPr id="8" name="Роль 2 текст"/>
+          <p:cNvSpPr txBox="1"/>
+          <p:nvPr/>
+        </p:nvSpPr>
+        <p:spPr>
+          <a:xfrm>
+            <a:off x="1691640" y="3017520"/>
+            <a:ext cx="3840480" cy="822960"/>
           </a:xfrm>
           <a:prstGeom prst="rect">
             <a:avLst/>
@@ -6937,19 +8568,33 @@
           <a:ln/>
         </p:spPr>
         <p:txBody>
-          <a:bodyPr wrap="square" lIns="0" tIns="0" rIns="0" bIns="0" rtlCol="0" anchor="t"/>
-          <a:lstStyle/>
-          <a:p>
-            <a:pPr algn="l" indent="0" marL="0">
-              <a:buNone/>
-            </a:pPr>
-            <a:r>
-              <a:rPr lang="en-US" sz="2200" dirty="0">
+          <a:bodyPr wrap="square" lIns="0" tIns="0" rIns="0" bIns="0" rtlCol="0" anchor="ctr"/>
+          <a:lstStyle/>
+          <a:p>
+            <a:pPr indent="0" marL="0">
+              <a:buNone/>
+            </a:pPr>
+            <a:r>
+              <a:rPr lang="en-US" sz="2200" b="1" dirty="0">
+                <a:solidFill>
+                  <a:schemeClr val="bg1"/>
+                </a:solidFill>
+              </a:rPr>
+              <a:t>Продавец</a:t>
+            </a:r>
+            <a:endParaRPr lang="en-US" sz="2200" dirty="0"/>
+          </a:p>
+          <a:p>
+            <a:pPr indent="0" marL="0">
+              <a:buNone/>
+            </a:pPr>
+            <a:r>
+              <a:rPr lang="en-US" sz="1600" dirty="0">
                 <a:solidFill>
                   <a:schemeClr val="accent2"/>
                 </a:solidFill>
               </a:rPr>
-              <a:t>ВольтМаркет — учёт, который заряжает ваш магазин</a:t>
+              <a:t>покупатели, цены, брони, продажи</a:t>
             </a:r>
             <a:endParaRPr lang="en-US" sz="2200" dirty="0"/>
           </a:p>
@@ -6957,18 +8602,117 @@
       </p:sp>
       <p:sp>
         <p:nvSpPr>
-          <p:cNvPr id="5" name="Попробуйте"/>
+          <p:cNvPr id="9" name="Роль 3 круг"/>
           <p:cNvSpPr/>
           <p:nvPr/>
         </p:nvSpPr>
         <p:spPr>
           <a:xfrm>
-            <a:off x="6949440" y="2011680"/>
-            <a:ext cx="4572000" cy="2423160"/>
+            <a:off x="640080" y="4389120"/>
+            <a:ext cx="822960" cy="822960"/>
+          </a:xfrm>
+          <a:prstGeom prst="ellipse">
+            <a:avLst/>
+          </a:prstGeom>
+          <a:solidFill>
+            <a:srgbClr val="1565C0"/>
+          </a:solidFill>
+          <a:ln w="12700">
+            <a:solidFill>
+              <a:srgbClr val="1565C0"/>
+            </a:solidFill>
+            <a:prstDash val="solid"/>
+          </a:ln>
+        </p:spPr>
+      </p:sp>
+      <p:pic>
+        <p:nvPicPr>
+          <p:cNvPr id="10" name="Роль 3 иконка" descr="preencoded.png">    </p:cNvPr>
+          <p:cNvPicPr>
+            <a:picLocks noChangeAspect="1"/>
+          </p:cNvPicPr>
+          <p:nvPr/>
+        </p:nvPicPr>
+        <p:blipFill>
+          <a:blip r:embed="rId3"/>
+          <a:stretch>
+            <a:fillRect/>
+          </a:stretch>
+        </p:blipFill>
+        <p:spPr>
+          <a:xfrm>
+            <a:off x="837590" y="4586630"/>
+            <a:ext cx="427939" cy="427939"/>
+          </a:xfrm>
+          <a:prstGeom prst="rect">
+            <a:avLst/>
+          </a:prstGeom>
+        </p:spPr>
+      </p:pic>
+      <p:sp>
+        <p:nvSpPr>
+          <p:cNvPr id="11" name="Роль 3 текст"/>
+          <p:cNvSpPr txBox="1"/>
+          <p:nvPr/>
+        </p:nvSpPr>
+        <p:spPr>
+          <a:xfrm>
+            <a:off x="1691640" y="4389120"/>
+            <a:ext cx="3840480" cy="822960"/>
+          </a:xfrm>
+          <a:prstGeom prst="rect">
+            <a:avLst/>
+          </a:prstGeom>
+          <a:noFill/>
+          <a:ln/>
+        </p:spPr>
+        <p:txBody>
+          <a:bodyPr wrap="square" lIns="0" tIns="0" rIns="0" bIns="0" rtlCol="0" anchor="ctr"/>
+          <a:lstStyle/>
+          <a:p>
+            <a:pPr indent="0" marL="0">
+              <a:buNone/>
+            </a:pPr>
+            <a:r>
+              <a:rPr lang="en-US" sz="2200" b="1" dirty="0">
+                <a:solidFill>
+                  <a:schemeClr val="bg1"/>
+                </a:solidFill>
+              </a:rPr>
+              <a:t>Администратор</a:t>
+            </a:r>
+            <a:endParaRPr lang="en-US" sz="2200" dirty="0"/>
+          </a:p>
+          <a:p>
+            <a:pPr indent="0" marL="0">
+              <a:buNone/>
+            </a:pPr>
+            <a:r>
+              <a:rPr lang="en-US" sz="1600" dirty="0">
+                <a:solidFill>
+                  <a:schemeClr val="accent2"/>
+                </a:solidFill>
+              </a:rPr>
+              <a:t>всё, плюс пользователи и права</a:t>
+            </a:r>
+            <a:endParaRPr lang="en-US" sz="2200" dirty="0"/>
+          </a:p>
+        </p:txBody>
+      </p:sp>
+      <p:sp>
+        <p:nvSpPr>
+          <p:cNvPr id="12" name="Защита"/>
+          <p:cNvSpPr/>
+          <p:nvPr/>
+        </p:nvSpPr>
+        <p:spPr>
+          <a:xfrm>
+            <a:off x="6035040" y="1645920"/>
+            <a:ext cx="5486400" cy="3429000"/>
           </a:xfrm>
           <a:prstGeom prst="roundRect">
             <a:avLst>
-              <a:gd name="adj" fmla="val 5660"/>
+              <a:gd name="adj" fmla="val 4000"/>
             </a:avLst>
           </a:prstGeom>
           <a:solidFill>
@@ -6984,13 +8728,13 @@
       </p:sp>
       <p:sp>
         <p:nvSpPr>
-          <p:cNvPr id="6" name="Попробуйте круг"/>
+          <p:cNvPr id="13" name="Защита круг"/>
           <p:cNvSpPr/>
           <p:nvPr/>
         </p:nvSpPr>
         <p:spPr>
           <a:xfrm>
-            <a:off x="7269480" y="2286000"/>
+            <a:off x="6355080" y="1920240"/>
             <a:ext cx="822960" cy="822960"/>
           </a:xfrm>
           <a:prstGeom prst="ellipse">
@@ -7009,21 +8753,21 @@
       </p:sp>
       <p:pic>
         <p:nvPicPr>
-          <p:cNvPr id="7" name="Попробуйте иконка" descr="preencoded.png">    </p:cNvPr>
+          <p:cNvPr id="14" name="Защита иконка" descr="preencoded.png">    </p:cNvPr>
           <p:cNvPicPr>
             <a:picLocks noChangeAspect="1"/>
           </p:cNvPicPr>
           <p:nvPr/>
         </p:nvPicPr>
         <p:blipFill>
-          <a:blip r:embed="rId2"/>
+          <a:blip r:embed="rId4"/>
           <a:stretch>
             <a:fillRect/>
           </a:stretch>
         </p:blipFill>
         <p:spPr>
           <a:xfrm>
-            <a:off x="7466990" y="2483510"/>
+            <a:off x="6552590" y="2117750"/>
             <a:ext cx="427939" cy="427939"/>
           </a:xfrm>
           <a:prstGeom prst="rect">
@@ -7033,14 +8777,14 @@
       </p:pic>
       <p:sp>
         <p:nvSpPr>
-          <p:cNvPr id="8" name="Попробуйте заголовок"/>
+          <p:cNvPr id="15" name="Защита заголовок"/>
           <p:cNvSpPr txBox="1"/>
           <p:nvPr/>
         </p:nvSpPr>
         <p:spPr>
           <a:xfrm>
-            <a:off x="8275320" y="2286000"/>
-            <a:ext cx="3017520" cy="822960"/>
+            <a:off x="7360920" y="1920240"/>
+            <a:ext cx="3931920" cy="822960"/>
           </a:xfrm>
           <a:prstGeom prst="rect">
             <a:avLst/>
@@ -7061,7 +8805,7 @@
                   <a:schemeClr val="tx2"/>
                 </a:solidFill>
               </a:rPr>
-              <a:t>Попробуйте сами</a:t>
+              <a:t>Защита от ошибок</a:t>
             </a:r>
             <a:endParaRPr lang="en-US" sz="2400" dirty="0"/>
           </a:p>
@@ -7069,14 +8813,14 @@
       </p:sp>
       <p:sp>
         <p:nvSpPr>
-          <p:cNvPr id="9" name="Попробуйте текст"/>
+          <p:cNvPr id="16" name="Защита список"/>
           <p:cNvSpPr txBox="1"/>
           <p:nvPr/>
         </p:nvSpPr>
         <p:spPr>
           <a:xfrm>
-            <a:off x="7269480" y="3291840"/>
-            <a:ext cx="3977640" cy="1188720"/>
+            <a:off x="6355080" y="2880360"/>
+            <a:ext cx="4892040" cy="2103120"/>
           </a:xfrm>
           <a:prstGeom prst="rect">
             <a:avLst/>
@@ -7088,54 +8832,121 @@
           <a:bodyPr wrap="square" lIns="0" tIns="0" rIns="0" bIns="0" rtlCol="0" anchor="t"/>
           <a:lstStyle/>
           <a:p>
-            <a:pPr indent="0" marL="0">
-              <a:buNone/>
-            </a:pPr>
-            <a:r>
-              <a:rPr lang="en-US" sz="1700" dirty="0">
+            <a:pPr marL="342900" indent="-342900">
+              <a:spcAft>
+                <a:spcPts val="1000"/>
+              </a:spcAft>
+              <a:buSzPct val="100000"/>
+              <a:buChar char="•"/>
+            </a:pPr>
+            <a:r>
+              <a:rPr lang="en-US" sz="1500" dirty="0">
                 <a:solidFill>
                   <a:schemeClr val="tx1"/>
                 </a:solidFill>
               </a:rPr>
-              <a:t>Загрузите VoltMarket.dt, войдите как «Продавец» и оформите первую продажу за минуту</a:t>
-            </a:r>
-            <a:endParaRPr lang="en-US" sz="1700" dirty="0"/>
-          </a:p>
-        </p:txBody>
-      </p:sp>
-      <p:sp>
-        <p:nvSpPr>
-          <p:cNvPr id="10" name="Подпись"/>
-          <p:cNvSpPr txBox="1"/>
-          <p:nvPr/>
-        </p:nvSpPr>
-        <p:spPr>
-          <a:xfrm>
-            <a:off x="731520" y="6172200"/>
-            <a:ext cx="5486400" cy="320040"/>
-          </a:xfrm>
-          <a:prstGeom prst="rect">
-            <a:avLst/>
-          </a:prstGeom>
-          <a:noFill/>
-          <a:ln/>
-        </p:spPr>
-        <p:txBody>
-          <a:bodyPr wrap="square" lIns="0" tIns="0" rIns="0" bIns="0" rtlCol="0" anchor="ctr"/>
-          <a:lstStyle/>
-          <a:p>
-            <a:pPr indent="0" marL="0">
-              <a:buNone/>
-            </a:pPr>
-            <a:r>
-              <a:rPr lang="en-US" sz="1200" dirty="0">
+              <a:t>Нельзя продать больше, чем есть на складе — система покажет остаток</a:t>
+            </a:r>
+            <a:endParaRPr lang="en-US" sz="1500" dirty="0"/>
+          </a:p>
+          <a:p>
+            <a:pPr marL="342900" indent="-342900">
+              <a:spcAft>
+                <a:spcPts val="1000"/>
+              </a:spcAft>
+              <a:buSzPct val="100000"/>
+              <a:buChar char="•"/>
+            </a:pPr>
+            <a:r>
+              <a:rPr lang="en-US" sz="1500" dirty="0">
+                <a:solidFill>
+                  <a:schemeClr val="tx1"/>
+                </a:solidFill>
+              </a:rPr>
+              <a:t>Забронированный товар не продадут другому покупателю</a:t>
+            </a:r>
+            <a:endParaRPr lang="en-US" sz="1500" dirty="0"/>
+          </a:p>
+          <a:p>
+            <a:pPr marL="342900" indent="-342900">
+              <a:spcAft>
+                <a:spcPts val="1000"/>
+              </a:spcAft>
+              <a:buSzPct val="100000"/>
+              <a:buChar char="•"/>
+            </a:pPr>
+            <a:r>
+              <a:rPr lang="en-US" sz="1500" dirty="0">
+                <a:solidFill>
+                  <a:schemeClr val="tx1"/>
+                </a:solidFill>
+              </a:rPr>
+              <a:t>Обязательные поля проверяются перед проведением</a:t>
+            </a:r>
+            <a:endParaRPr lang="en-US" sz="1500" dirty="0"/>
+          </a:p>
+          <a:p>
+            <a:pPr marL="342900" indent="-342900">
+              <a:spcAft>
+                <a:spcPts val="1000"/>
+              </a:spcAft>
+              <a:buSzPct val="100000"/>
+              <a:buChar char="•"/>
+            </a:pPr>
+            <a:r>
+              <a:rPr lang="en-US" sz="1500" dirty="0">
+                <a:solidFill>
+                  <a:schemeClr val="tx1"/>
+                </a:solidFill>
+              </a:rPr>
+              <a:t>Два продавца не продадут один последний товар одновременно</a:t>
+            </a:r>
+            <a:endParaRPr lang="en-US" sz="1500" dirty="0"/>
+          </a:p>
+        </p:txBody>
+      </p:sp>
+      <p:sp>
+        <p:nvSpPr>
+          <p:cNvPr id="25" name="Slide Number Placeholder 0"/>
+          <p:cNvSpPr>
+            <a:spLocks noGrp="1"/>
+          </p:cNvSpPr>
+          <p:nvPr>
+            <p:ph type="sldNum" sz="quarter" idx="4294967295"/>
+          </p:nvPr>
+        </p:nvSpPr>
+        <p:spPr>
+          <a:xfrm>
+            <a:off x="11338560" y="6355080"/>
+            <a:ext cx="457200" cy="274320"/>
+          </a:xfrm>
+          <a:prstGeom prst="rect">
+            <a:avLst/>
+          </a:prstGeom>
+          <a:extLst>
+            <a:ext uri="{C572A759-6A51-4108-AA02-DFA0A04FC94B}">
+              <ma14:wrappingTextBoxFlag xmlns:ma14="http://schemas.microsoft.com/office/mac/drawingml/2011/main" val="0"/>
+            </a:ext>
+          </a:extLst>
+        </p:spPr>
+        <p:txBody>
+          <a:bodyPr/>
+          <a:lstStyle>
+            <a:lvl1pPr>
+              <a:defRPr sz="1100">
                 <a:solidFill>
                   <a:schemeClr val="accent4"/>
                 </a:solidFill>
-              </a:rPr>
-              <a:t>Команда «ВольтМаркет» · 2026</a:t>
-            </a:r>
-            <a:endParaRPr lang="en-US" sz="1200" dirty="0"/>
+              </a:defRPr>
+            </a:lvl1pPr>
+          </a:lstStyle>
+          <a:p>
+            <a:pPr algn="l"/>
+            <a:fld id="{F7021451-1387-4CA6-816F-3879F97B5CBC}" type="slidenum">
+              <a:rPr b="0" lang="en-US"/>
+              <a:t>9</a:t>
+            </a:fld>
+            <a:endParaRPr lang="en-US"/>
           </a:p>
         </p:txBody>
       </p:sp>
